--- a/cours/Module TIC/Département Français/Master 2 - DLE/Cours_TIC_02_Informatique_et_Ordinateur_FR.pptx
+++ b/cours/Module TIC/Département Français/Master 2 - DLE/Cours_TIC_02_Informatique_et_Ordinateur_FR.pptx
@@ -4,9 +4,6 @@
   <p:sldMasterIdLst>
     <p:sldMasterId id="2147483648" r:id="rId1"/>
   </p:sldMasterIdLst>
-  <p:notesMasterIdLst>
-    <p:notesMasterId r:id="rId33"/>
-  </p:notesMasterIdLst>
   <p:sldIdLst>
     <p:sldId id="256" r:id="rId7"/>
     <p:sldId id="257" r:id="rId8"/>
@@ -18,6 +15,11 @@
     <p:sldId id="263" r:id="rId14"/>
     <p:sldId id="264" r:id="rId15"/>
     <p:sldId id="265" r:id="rId16"/>
+    <p:sldId id="266" r:id="rId17"/>
+    <p:sldId id="267" r:id="rId18"/>
+    <p:sldId id="268" r:id="rId19"/>
+    <p:sldId id="269" r:id="rId20"/>
+    <p:sldId id="270" r:id="rId21"/>
   </p:sldIdLst>
   <p:sldSz cx="9144000" cy="6858000" type="screen4x3"/>
   <p:notesSz cx="6858000" cy="9144000"/>
@@ -116,372 +118,7 @@
       </a:defRPr>
     </a:lvl9pPr>
   </p:defaultTextStyle>
-  <p:extLst>
-    <p:ext uri="{EFAFB233-063F-42B5-8137-9DF3F51BA10A}">
-      <p15:sldGuideLst xmlns:p15="http://schemas.microsoft.com/office/powerpoint/2012/main">
-        <p15:guide id="1" orient="horz" pos="2160">
-          <p15:clr>
-            <a:srgbClr val="A4A3A4"/>
-          </p15:clr>
-        </p15:guide>
-        <p15:guide id="2" pos="2880">
-          <p15:clr>
-            <a:srgbClr val="A4A3A4"/>
-          </p15:clr>
-        </p15:guide>
-      </p15:sldGuideLst>
-    </p:ext>
-  </p:extLst>
 </p:presentation>
-</file>
-
-<file path=ppt/notesMasters/notesMaster1.xml><?xml version="1.0" encoding="utf-8"?>
-<p:notesMaster xmlns:a="http://schemas.openxmlformats.org/drawingml/2006/main" xmlns:r="http://schemas.openxmlformats.org/officeDocument/2006/relationships" xmlns:p="http://schemas.openxmlformats.org/presentationml/2006/main">
-  <p:cSld>
-    <p:bg>
-      <p:bgRef idx="1001">
-        <a:schemeClr val="bg1"/>
-      </p:bgRef>
-    </p:bg>
-    <p:spTree>
-      <p:nvGrpSpPr>
-        <p:cNvPr id="1" name=""/>
-        <p:cNvGrpSpPr/>
-        <p:nvPr/>
-      </p:nvGrpSpPr>
-      <p:grpSpPr>
-        <a:xfrm>
-          <a:off x="0" y="0"/>
-          <a:ext cx="0" cy="0"/>
-          <a:chOff x="0" y="0"/>
-          <a:chExt cx="0" cy="0"/>
-        </a:xfrm>
-      </p:grpSpPr>
-      <p:sp>
-        <p:nvSpPr>
-          <p:cNvPr id="2" name="Espace réservé de l'en-tête 1"/>
-          <p:cNvSpPr>
-            <a:spLocks noGrp="1"/>
-          </p:cNvSpPr>
-          <p:nvPr>
-            <p:ph type="hdr" sz="quarter"/>
-          </p:nvPr>
-        </p:nvSpPr>
-        <p:spPr>
-          <a:xfrm>
-            <a:off x="0" y="0"/>
-            <a:ext cx="2971800" cy="458788"/>
-          </a:xfrm>
-          <a:prstGeom prst="rect">
-            <a:avLst/>
-          </a:prstGeom>
-        </p:spPr>
-        <p:txBody>
-          <a:bodyPr vert="horz" lIns="91440" tIns="45720" rIns="91440" bIns="45720" rtlCol="0"/>
-          <a:lstStyle>
-            <a:lvl1pPr algn="l">
-              <a:defRPr sz="1200"/>
-            </a:lvl1pPr>
-          </a:lstStyle>
-          <a:p>
-            <a:endParaRPr lang="fr-FR"/>
-          </a:p>
-        </p:txBody>
-      </p:sp>
-      <p:sp>
-        <p:nvSpPr>
-          <p:cNvPr id="3" name="Espace réservé de la date 2"/>
-          <p:cNvSpPr>
-            <a:spLocks noGrp="1"/>
-          </p:cNvSpPr>
-          <p:nvPr>
-            <p:ph type="dt" idx="1"/>
-          </p:nvPr>
-        </p:nvSpPr>
-        <p:spPr>
-          <a:xfrm>
-            <a:off x="3884613" y="0"/>
-            <a:ext cx="2971800" cy="458788"/>
-          </a:xfrm>
-          <a:prstGeom prst="rect">
-            <a:avLst/>
-          </a:prstGeom>
-        </p:spPr>
-        <p:txBody>
-          <a:bodyPr vert="horz" lIns="91440" tIns="45720" rIns="91440" bIns="45720" rtlCol="0"/>
-          <a:lstStyle>
-            <a:lvl1pPr algn="r">
-              <a:defRPr sz="1200"/>
-            </a:lvl1pPr>
-          </a:lstStyle>
-          <a:p>
-            <a:fld id="{B8F0B2C1-4194-45A7-9834-731A4F36BABD}" type="datetimeFigureOut">
-              <a:rPr lang="fr-FR" smtClean="0"/>
-              <a:t>16/05/2026</a:t>
-            </a:fld>
-            <a:endParaRPr lang="fr-FR"/>
-          </a:p>
-        </p:txBody>
-      </p:sp>
-      <p:sp>
-        <p:nvSpPr>
-          <p:cNvPr id="4" name="Espace réservé de l'image des diapositives 3"/>
-          <p:cNvSpPr>
-            <a:spLocks noGrp="1" noRot="1" noChangeAspect="1"/>
-          </p:cNvSpPr>
-          <p:nvPr>
-            <p:ph type="sldImg" idx="2"/>
-          </p:nvPr>
-        </p:nvSpPr>
-        <p:spPr>
-          <a:xfrm>
-            <a:off x="1371600" y="1143000"/>
-            <a:ext cx="4114800" cy="3086100"/>
-          </a:xfrm>
-          <a:prstGeom prst="rect">
-            <a:avLst/>
-          </a:prstGeom>
-          <a:noFill/>
-          <a:ln w="12700">
-            <a:solidFill>
-              <a:prstClr val="black"/>
-            </a:solidFill>
-          </a:ln>
-        </p:spPr>
-        <p:txBody>
-          <a:bodyPr vert="horz" lIns="91440" tIns="45720" rIns="91440" bIns="45720" rtlCol="0" anchor="ctr"/>
-          <a:lstStyle/>
-          <a:p>
-            <a:endParaRPr lang="fr-FR"/>
-          </a:p>
-        </p:txBody>
-      </p:sp>
-      <p:sp>
-        <p:nvSpPr>
-          <p:cNvPr id="5" name="Espace réservé des notes 4"/>
-          <p:cNvSpPr>
-            <a:spLocks noGrp="1"/>
-          </p:cNvSpPr>
-          <p:nvPr>
-            <p:ph type="body" sz="quarter" idx="3"/>
-          </p:nvPr>
-        </p:nvSpPr>
-        <p:spPr>
-          <a:xfrm>
-            <a:off x="685800" y="4400550"/>
-            <a:ext cx="5486400" cy="3600450"/>
-          </a:xfrm>
-          <a:prstGeom prst="rect">
-            <a:avLst/>
-          </a:prstGeom>
-        </p:spPr>
-        <p:txBody>
-          <a:bodyPr vert="horz" lIns="91440" tIns="45720" rIns="91440" bIns="45720" rtlCol="0"/>
-          <a:lstStyle/>
-          <a:p>
-            <a:pPr lvl="0"/>
-            <a:r>
-              <a:rPr lang="fr-FR"/>
-              <a:t>Cliquez pour modifier les styles du texte du masque</a:t>
-            </a:r>
-          </a:p>
-          <a:p>
-            <a:pPr lvl="1"/>
-            <a:r>
-              <a:rPr lang="fr-FR"/>
-              <a:t>Deuxième niveau</a:t>
-            </a:r>
-          </a:p>
-          <a:p>
-            <a:pPr lvl="2"/>
-            <a:r>
-              <a:rPr lang="fr-FR"/>
-              <a:t>Troisième niveau</a:t>
-            </a:r>
-          </a:p>
-          <a:p>
-            <a:pPr lvl="3"/>
-            <a:r>
-              <a:rPr lang="fr-FR"/>
-              <a:t>Quatrième niveau</a:t>
-            </a:r>
-          </a:p>
-          <a:p>
-            <a:pPr lvl="4"/>
-            <a:r>
-              <a:rPr lang="fr-FR"/>
-              <a:t>Cinquième niveau</a:t>
-            </a:r>
-          </a:p>
-        </p:txBody>
-      </p:sp>
-      <p:sp>
-        <p:nvSpPr>
-          <p:cNvPr id="6" name="Espace réservé du pied de page 5"/>
-          <p:cNvSpPr>
-            <a:spLocks noGrp="1"/>
-          </p:cNvSpPr>
-          <p:nvPr>
-            <p:ph type="ftr" sz="quarter" idx="4"/>
-          </p:nvPr>
-        </p:nvSpPr>
-        <p:spPr>
-          <a:xfrm>
-            <a:off x="0" y="8685213"/>
-            <a:ext cx="2971800" cy="458787"/>
-          </a:xfrm>
-          <a:prstGeom prst="rect">
-            <a:avLst/>
-          </a:prstGeom>
-        </p:spPr>
-        <p:txBody>
-          <a:bodyPr vert="horz" lIns="91440" tIns="45720" rIns="91440" bIns="45720" rtlCol="0" anchor="b"/>
-          <a:lstStyle>
-            <a:lvl1pPr algn="l">
-              <a:defRPr sz="1200"/>
-            </a:lvl1pPr>
-          </a:lstStyle>
-          <a:p>
-            <a:endParaRPr lang="fr-FR"/>
-          </a:p>
-        </p:txBody>
-      </p:sp>
-      <p:sp>
-        <p:nvSpPr>
-          <p:cNvPr id="7" name="Espace réservé du numéro de diapositive 6"/>
-          <p:cNvSpPr>
-            <a:spLocks noGrp="1"/>
-          </p:cNvSpPr>
-          <p:nvPr>
-            <p:ph type="sldNum" sz="quarter" idx="5"/>
-          </p:nvPr>
-        </p:nvSpPr>
-        <p:spPr>
-          <a:xfrm>
-            <a:off x="3884613" y="8685213"/>
-            <a:ext cx="2971800" cy="458787"/>
-          </a:xfrm>
-          <a:prstGeom prst="rect">
-            <a:avLst/>
-          </a:prstGeom>
-        </p:spPr>
-        <p:txBody>
-          <a:bodyPr vert="horz" lIns="91440" tIns="45720" rIns="91440" bIns="45720" rtlCol="0" anchor="b"/>
-          <a:lstStyle>
-            <a:lvl1pPr algn="r">
-              <a:defRPr sz="1200"/>
-            </a:lvl1pPr>
-          </a:lstStyle>
-          <a:p>
-            <a:fld id="{EDB5666F-E79B-4A29-9A64-FA4855FAABBD}" type="slidenum">
-              <a:rPr lang="fr-FR" smtClean="0"/>
-              <a:t>‹N°›</a:t>
-            </a:fld>
-            <a:endParaRPr lang="fr-FR"/>
-          </a:p>
-        </p:txBody>
-      </p:sp>
-    </p:spTree>
-    <p:extLst>
-      <p:ext uri="{BB962C8B-B14F-4D97-AF65-F5344CB8AC3E}">
-        <p14:creationId xmlns:p14="http://schemas.microsoft.com/office/powerpoint/2010/main" val="4057233482"/>
-      </p:ext>
-    </p:extLst>
-  </p:cSld>
-  <p:clrMap bg1="lt1" tx1="dk1" bg2="lt2" tx2="dk2" accent1="accent1" accent2="accent2" accent3="accent3" accent4="accent4" accent5="accent5" accent6="accent6" hlink="hlink" folHlink="folHlink"/>
-  <p:notesStyle>
-    <a:lvl1pPr marL="0" algn="l" defTabSz="914400" rtl="0" eaLnBrk="1" latinLnBrk="0" hangingPunct="1">
-      <a:defRPr sz="1200" kern="1200">
-        <a:solidFill>
-          <a:schemeClr val="tx1"/>
-        </a:solidFill>
-        <a:latin typeface="+mn-lt"/>
-        <a:ea typeface="+mn-ea"/>
-        <a:cs typeface="+mn-cs"/>
-      </a:defRPr>
-    </a:lvl1pPr>
-    <a:lvl2pPr marL="457200" algn="l" defTabSz="914400" rtl="0" eaLnBrk="1" latinLnBrk="0" hangingPunct="1">
-      <a:defRPr sz="1200" kern="1200">
-        <a:solidFill>
-          <a:schemeClr val="tx1"/>
-        </a:solidFill>
-        <a:latin typeface="+mn-lt"/>
-        <a:ea typeface="+mn-ea"/>
-        <a:cs typeface="+mn-cs"/>
-      </a:defRPr>
-    </a:lvl2pPr>
-    <a:lvl3pPr marL="914400" algn="l" defTabSz="914400" rtl="0" eaLnBrk="1" latinLnBrk="0" hangingPunct="1">
-      <a:defRPr sz="1200" kern="1200">
-        <a:solidFill>
-          <a:schemeClr val="tx1"/>
-        </a:solidFill>
-        <a:latin typeface="+mn-lt"/>
-        <a:ea typeface="+mn-ea"/>
-        <a:cs typeface="+mn-cs"/>
-      </a:defRPr>
-    </a:lvl3pPr>
-    <a:lvl4pPr marL="1371600" algn="l" defTabSz="914400" rtl="0" eaLnBrk="1" latinLnBrk="0" hangingPunct="1">
-      <a:defRPr sz="1200" kern="1200">
-        <a:solidFill>
-          <a:schemeClr val="tx1"/>
-        </a:solidFill>
-        <a:latin typeface="+mn-lt"/>
-        <a:ea typeface="+mn-ea"/>
-        <a:cs typeface="+mn-cs"/>
-      </a:defRPr>
-    </a:lvl4pPr>
-    <a:lvl5pPr marL="1828800" algn="l" defTabSz="914400" rtl="0" eaLnBrk="1" latinLnBrk="0" hangingPunct="1">
-      <a:defRPr sz="1200" kern="1200">
-        <a:solidFill>
-          <a:schemeClr val="tx1"/>
-        </a:solidFill>
-        <a:latin typeface="+mn-lt"/>
-        <a:ea typeface="+mn-ea"/>
-        <a:cs typeface="+mn-cs"/>
-      </a:defRPr>
-    </a:lvl5pPr>
-    <a:lvl6pPr marL="2286000" algn="l" defTabSz="914400" rtl="0" eaLnBrk="1" latinLnBrk="0" hangingPunct="1">
-      <a:defRPr sz="1200" kern="1200">
-        <a:solidFill>
-          <a:schemeClr val="tx1"/>
-        </a:solidFill>
-        <a:latin typeface="+mn-lt"/>
-        <a:ea typeface="+mn-ea"/>
-        <a:cs typeface="+mn-cs"/>
-      </a:defRPr>
-    </a:lvl6pPr>
-    <a:lvl7pPr marL="2743200" algn="l" defTabSz="914400" rtl="0" eaLnBrk="1" latinLnBrk="0" hangingPunct="1">
-      <a:defRPr sz="1200" kern="1200">
-        <a:solidFill>
-          <a:schemeClr val="tx1"/>
-        </a:solidFill>
-        <a:latin typeface="+mn-lt"/>
-        <a:ea typeface="+mn-ea"/>
-        <a:cs typeface="+mn-cs"/>
-      </a:defRPr>
-    </a:lvl7pPr>
-    <a:lvl8pPr marL="3200400" algn="l" defTabSz="914400" rtl="0" eaLnBrk="1" latinLnBrk="0" hangingPunct="1">
-      <a:defRPr sz="1200" kern="1200">
-        <a:solidFill>
-          <a:schemeClr val="tx1"/>
-        </a:solidFill>
-        <a:latin typeface="+mn-lt"/>
-        <a:ea typeface="+mn-ea"/>
-        <a:cs typeface="+mn-cs"/>
-      </a:defRPr>
-    </a:lvl8pPr>
-    <a:lvl9pPr marL="3657600" algn="l" defTabSz="914400" rtl="0" eaLnBrk="1" latinLnBrk="0" hangingPunct="1">
-      <a:defRPr sz="1200" kern="1200">
-        <a:solidFill>
-          <a:schemeClr val="tx1"/>
-        </a:solidFill>
-        <a:latin typeface="+mn-lt"/>
-        <a:ea typeface="+mn-ea"/>
-        <a:cs typeface="+mn-cs"/>
-      </a:defRPr>
-    </a:lvl9pPr>
-  </p:notesStyle>
-</p:notesMaster>
 </file>
 
 <file path=ppt/slideLayouts/slideLayout1.xml><?xml version="1.0" encoding="utf-8"?>
@@ -522,9 +159,10 @@
           <a:lstStyle/>
           <a:p>
             <a:r>
-              <a:rPr lang="en-US"/>
+              <a:rPr lang="en-US" smtClean="0"/>
               <a:t>Click to edit Master title style</a:t>
             </a:r>
+            <a:endParaRPr lang="en-US"/>
           </a:p>
         </p:txBody>
       </p:sp>
@@ -640,9 +278,10 @@
           </a:lstStyle>
           <a:p>
             <a:r>
-              <a:rPr lang="en-US"/>
+              <a:rPr lang="en-US" smtClean="0"/>
               <a:t>Click to edit Master subtitle style</a:t>
             </a:r>
+            <a:endParaRPr lang="en-US"/>
           </a:p>
         </p:txBody>
       </p:sp>
@@ -663,7 +302,7 @@
           <a:p>
             <a:fld id="{5BCAD085-E8A6-8845-BD4E-CB4CCA059FC4}" type="datetimeFigureOut">
               <a:rPr lang="en-US" smtClean="0"/>
-              <a:t>5/16/2026</a:t>
+              <a:t>1/27/13</a:t>
             </a:fld>
             <a:endParaRPr lang="en-US"/>
           </a:p>
@@ -705,7 +344,7 @@
           <a:p>
             <a:fld id="{C1FF6DA9-008F-8B48-92A6-B652298478BF}" type="slidenum">
               <a:rPr lang="en-US" smtClean="0"/>
-              <a:t>‹N°›</a:t>
+              <a:t>‹#›</a:t>
             </a:fld>
             <a:endParaRPr lang="en-US"/>
           </a:p>
@@ -757,9 +396,10 @@
           <a:lstStyle/>
           <a:p>
             <a:r>
-              <a:rPr lang="en-US"/>
+              <a:rPr lang="en-US" smtClean="0"/>
               <a:t>Click to edit Master title style</a:t>
             </a:r>
+            <a:endParaRPr lang="en-US"/>
           </a:p>
         </p:txBody>
       </p:sp>
@@ -780,37 +420,38 @@
           <a:p>
             <a:pPr lvl="0"/>
             <a:r>
-              <a:rPr lang="en-US"/>
+              <a:rPr lang="en-US" smtClean="0"/>
               <a:t>Click to edit Master text styles</a:t>
             </a:r>
           </a:p>
           <a:p>
             <a:pPr lvl="1"/>
             <a:r>
-              <a:rPr lang="en-US"/>
+              <a:rPr lang="en-US" smtClean="0"/>
               <a:t>Second level</a:t>
             </a:r>
           </a:p>
           <a:p>
             <a:pPr lvl="2"/>
             <a:r>
-              <a:rPr lang="en-US"/>
+              <a:rPr lang="en-US" smtClean="0"/>
               <a:t>Third level</a:t>
             </a:r>
           </a:p>
           <a:p>
             <a:pPr lvl="3"/>
             <a:r>
-              <a:rPr lang="en-US"/>
+              <a:rPr lang="en-US" smtClean="0"/>
               <a:t>Fourth level</a:t>
             </a:r>
           </a:p>
           <a:p>
             <a:pPr lvl="4"/>
             <a:r>
-              <a:rPr lang="en-US"/>
+              <a:rPr lang="en-US" smtClean="0"/>
               <a:t>Fifth level</a:t>
             </a:r>
+            <a:endParaRPr lang="en-US"/>
           </a:p>
         </p:txBody>
       </p:sp>
@@ -831,7 +472,7 @@
           <a:p>
             <a:fld id="{5BCAD085-E8A6-8845-BD4E-CB4CCA059FC4}" type="datetimeFigureOut">
               <a:rPr lang="en-US" smtClean="0"/>
-              <a:t>5/16/2026</a:t>
+              <a:t>1/27/13</a:t>
             </a:fld>
             <a:endParaRPr lang="en-US"/>
           </a:p>
@@ -873,7 +514,7 @@
           <a:p>
             <a:fld id="{C1FF6DA9-008F-8B48-92A6-B652298478BF}" type="slidenum">
               <a:rPr lang="en-US" smtClean="0"/>
-              <a:t>‹N°›</a:t>
+              <a:t>‹#›</a:t>
             </a:fld>
             <a:endParaRPr lang="en-US"/>
           </a:p>
@@ -930,9 +571,10 @@
           <a:lstStyle/>
           <a:p>
             <a:r>
-              <a:rPr lang="en-US"/>
+              <a:rPr lang="en-US" smtClean="0"/>
               <a:t>Click to edit Master title style</a:t>
             </a:r>
+            <a:endParaRPr lang="en-US"/>
           </a:p>
         </p:txBody>
       </p:sp>
@@ -958,37 +600,38 @@
           <a:p>
             <a:pPr lvl="0"/>
             <a:r>
-              <a:rPr lang="en-US"/>
+              <a:rPr lang="en-US" smtClean="0"/>
               <a:t>Click to edit Master text styles</a:t>
             </a:r>
           </a:p>
           <a:p>
             <a:pPr lvl="1"/>
             <a:r>
-              <a:rPr lang="en-US"/>
+              <a:rPr lang="en-US" smtClean="0"/>
               <a:t>Second level</a:t>
             </a:r>
           </a:p>
           <a:p>
             <a:pPr lvl="2"/>
             <a:r>
-              <a:rPr lang="en-US"/>
+              <a:rPr lang="en-US" smtClean="0"/>
               <a:t>Third level</a:t>
             </a:r>
           </a:p>
           <a:p>
             <a:pPr lvl="3"/>
             <a:r>
-              <a:rPr lang="en-US"/>
+              <a:rPr lang="en-US" smtClean="0"/>
               <a:t>Fourth level</a:t>
             </a:r>
           </a:p>
           <a:p>
             <a:pPr lvl="4"/>
             <a:r>
-              <a:rPr lang="en-US"/>
+              <a:rPr lang="en-US" smtClean="0"/>
               <a:t>Fifth level</a:t>
             </a:r>
+            <a:endParaRPr lang="en-US"/>
           </a:p>
         </p:txBody>
       </p:sp>
@@ -1009,7 +652,7 @@
           <a:p>
             <a:fld id="{5BCAD085-E8A6-8845-BD4E-CB4CCA059FC4}" type="datetimeFigureOut">
               <a:rPr lang="en-US" smtClean="0"/>
-              <a:t>5/16/2026</a:t>
+              <a:t>1/27/13</a:t>
             </a:fld>
             <a:endParaRPr lang="en-US"/>
           </a:p>
@@ -1051,7 +694,7 @@
           <a:p>
             <a:fld id="{C1FF6DA9-008F-8B48-92A6-B652298478BF}" type="slidenum">
               <a:rPr lang="en-US" smtClean="0"/>
-              <a:t>‹N°›</a:t>
+              <a:t>‹#›</a:t>
             </a:fld>
             <a:endParaRPr lang="en-US"/>
           </a:p>
@@ -1103,9 +746,10 @@
           <a:lstStyle/>
           <a:p>
             <a:r>
-              <a:rPr lang="en-US"/>
+              <a:rPr lang="en-US" smtClean="0"/>
               <a:t>Click to edit Master title style</a:t>
             </a:r>
+            <a:endParaRPr lang="en-US"/>
           </a:p>
         </p:txBody>
       </p:sp>
@@ -1126,37 +770,38 @@
           <a:p>
             <a:pPr lvl="0"/>
             <a:r>
-              <a:rPr lang="en-US"/>
+              <a:rPr lang="en-US" smtClean="0"/>
               <a:t>Click to edit Master text styles</a:t>
             </a:r>
           </a:p>
           <a:p>
             <a:pPr lvl="1"/>
             <a:r>
-              <a:rPr lang="en-US"/>
+              <a:rPr lang="en-US" smtClean="0"/>
               <a:t>Second level</a:t>
             </a:r>
           </a:p>
           <a:p>
             <a:pPr lvl="2"/>
             <a:r>
-              <a:rPr lang="en-US"/>
+              <a:rPr lang="en-US" smtClean="0"/>
               <a:t>Third level</a:t>
             </a:r>
           </a:p>
           <a:p>
             <a:pPr lvl="3"/>
             <a:r>
-              <a:rPr lang="en-US"/>
+              <a:rPr lang="en-US" smtClean="0"/>
               <a:t>Fourth level</a:t>
             </a:r>
           </a:p>
           <a:p>
             <a:pPr lvl="4"/>
             <a:r>
-              <a:rPr lang="en-US"/>
+              <a:rPr lang="en-US" smtClean="0"/>
               <a:t>Fifth level</a:t>
             </a:r>
+            <a:endParaRPr lang="en-US"/>
           </a:p>
         </p:txBody>
       </p:sp>
@@ -1177,7 +822,7 @@
           <a:p>
             <a:fld id="{5BCAD085-E8A6-8845-BD4E-CB4CCA059FC4}" type="datetimeFigureOut">
               <a:rPr lang="en-US" smtClean="0"/>
-              <a:t>5/16/2026</a:t>
+              <a:t>1/27/13</a:t>
             </a:fld>
             <a:endParaRPr lang="en-US"/>
           </a:p>
@@ -1219,7 +864,7 @@
           <a:p>
             <a:fld id="{C1FF6DA9-008F-8B48-92A6-B652298478BF}" type="slidenum">
               <a:rPr lang="en-US" smtClean="0"/>
-              <a:t>‹N°›</a:t>
+              <a:t>‹#›</a:t>
             </a:fld>
             <a:endParaRPr lang="en-US"/>
           </a:p>
@@ -1280,9 +925,10 @@
           </a:lstStyle>
           <a:p>
             <a:r>
-              <a:rPr lang="en-US"/>
+              <a:rPr lang="en-US" smtClean="0"/>
               <a:t>Click to edit Master title style</a:t>
             </a:r>
+            <a:endParaRPr lang="en-US"/>
           </a:p>
         </p:txBody>
       </p:sp>
@@ -1399,7 +1045,7 @@
           <a:p>
             <a:pPr lvl="0"/>
             <a:r>
-              <a:rPr lang="en-US"/>
+              <a:rPr lang="en-US" smtClean="0"/>
               <a:t>Click to edit Master text styles</a:t>
             </a:r>
           </a:p>
@@ -1422,7 +1068,7 @@
           <a:p>
             <a:fld id="{5BCAD085-E8A6-8845-BD4E-CB4CCA059FC4}" type="datetimeFigureOut">
               <a:rPr lang="en-US" smtClean="0"/>
-              <a:t>5/16/2026</a:t>
+              <a:t>1/27/13</a:t>
             </a:fld>
             <a:endParaRPr lang="en-US"/>
           </a:p>
@@ -1464,7 +1110,7 @@
           <a:p>
             <a:fld id="{C1FF6DA9-008F-8B48-92A6-B652298478BF}" type="slidenum">
               <a:rPr lang="en-US" smtClean="0"/>
-              <a:t>‹N°›</a:t>
+              <a:t>‹#›</a:t>
             </a:fld>
             <a:endParaRPr lang="en-US"/>
           </a:p>
@@ -1516,9 +1162,10 @@
           <a:lstStyle/>
           <a:p>
             <a:r>
-              <a:rPr lang="en-US"/>
+              <a:rPr lang="en-US" smtClean="0"/>
               <a:t>Click to edit Master title style</a:t>
             </a:r>
+            <a:endParaRPr lang="en-US"/>
           </a:p>
         </p:txBody>
       </p:sp>
@@ -1572,37 +1219,38 @@
           <a:p>
             <a:pPr lvl="0"/>
             <a:r>
-              <a:rPr lang="en-US"/>
+              <a:rPr lang="en-US" smtClean="0"/>
               <a:t>Click to edit Master text styles</a:t>
             </a:r>
           </a:p>
           <a:p>
             <a:pPr lvl="1"/>
             <a:r>
-              <a:rPr lang="en-US"/>
+              <a:rPr lang="en-US" smtClean="0"/>
               <a:t>Second level</a:t>
             </a:r>
           </a:p>
           <a:p>
             <a:pPr lvl="2"/>
             <a:r>
-              <a:rPr lang="en-US"/>
+              <a:rPr lang="en-US" smtClean="0"/>
               <a:t>Third level</a:t>
             </a:r>
           </a:p>
           <a:p>
             <a:pPr lvl="3"/>
             <a:r>
-              <a:rPr lang="en-US"/>
+              <a:rPr lang="en-US" smtClean="0"/>
               <a:t>Fourth level</a:t>
             </a:r>
           </a:p>
           <a:p>
             <a:pPr lvl="4"/>
             <a:r>
-              <a:rPr lang="en-US"/>
+              <a:rPr lang="en-US" smtClean="0"/>
               <a:t>Fifth level</a:t>
             </a:r>
+            <a:endParaRPr lang="en-US"/>
           </a:p>
         </p:txBody>
       </p:sp>
@@ -1656,37 +1304,38 @@
           <a:p>
             <a:pPr lvl="0"/>
             <a:r>
-              <a:rPr lang="en-US"/>
+              <a:rPr lang="en-US" smtClean="0"/>
               <a:t>Click to edit Master text styles</a:t>
             </a:r>
           </a:p>
           <a:p>
             <a:pPr lvl="1"/>
             <a:r>
-              <a:rPr lang="en-US"/>
+              <a:rPr lang="en-US" smtClean="0"/>
               <a:t>Second level</a:t>
             </a:r>
           </a:p>
           <a:p>
             <a:pPr lvl="2"/>
             <a:r>
-              <a:rPr lang="en-US"/>
+              <a:rPr lang="en-US" smtClean="0"/>
               <a:t>Third level</a:t>
             </a:r>
           </a:p>
           <a:p>
             <a:pPr lvl="3"/>
             <a:r>
-              <a:rPr lang="en-US"/>
+              <a:rPr lang="en-US" smtClean="0"/>
               <a:t>Fourth level</a:t>
             </a:r>
           </a:p>
           <a:p>
             <a:pPr lvl="4"/>
             <a:r>
-              <a:rPr lang="en-US"/>
+              <a:rPr lang="en-US" smtClean="0"/>
               <a:t>Fifth level</a:t>
             </a:r>
+            <a:endParaRPr lang="en-US"/>
           </a:p>
         </p:txBody>
       </p:sp>
@@ -1707,7 +1356,7 @@
           <a:p>
             <a:fld id="{5BCAD085-E8A6-8845-BD4E-CB4CCA059FC4}" type="datetimeFigureOut">
               <a:rPr lang="en-US" smtClean="0"/>
-              <a:t>5/16/2026</a:t>
+              <a:t>1/27/13</a:t>
             </a:fld>
             <a:endParaRPr lang="en-US"/>
           </a:p>
@@ -1749,7 +1398,7 @@
           <a:p>
             <a:fld id="{C1FF6DA9-008F-8B48-92A6-B652298478BF}" type="slidenum">
               <a:rPr lang="en-US" smtClean="0"/>
-              <a:t>‹N°›</a:t>
+              <a:t>‹#›</a:t>
             </a:fld>
             <a:endParaRPr lang="en-US"/>
           </a:p>
@@ -1805,9 +1454,10 @@
           </a:lstStyle>
           <a:p>
             <a:r>
-              <a:rPr lang="en-US"/>
+              <a:rPr lang="en-US" smtClean="0"/>
               <a:t>Click to edit Master title style</a:t>
             </a:r>
+            <a:endParaRPr lang="en-US"/>
           </a:p>
         </p:txBody>
       </p:sp>
@@ -1870,7 +1520,7 @@
           <a:p>
             <a:pPr lvl="0"/>
             <a:r>
-              <a:rPr lang="en-US"/>
+              <a:rPr lang="en-US" smtClean="0"/>
               <a:t>Click to edit Master text styles</a:t>
             </a:r>
           </a:p>
@@ -1926,37 +1576,38 @@
           <a:p>
             <a:pPr lvl="0"/>
             <a:r>
-              <a:rPr lang="en-US"/>
+              <a:rPr lang="en-US" smtClean="0"/>
               <a:t>Click to edit Master text styles</a:t>
             </a:r>
           </a:p>
           <a:p>
             <a:pPr lvl="1"/>
             <a:r>
-              <a:rPr lang="en-US"/>
+              <a:rPr lang="en-US" smtClean="0"/>
               <a:t>Second level</a:t>
             </a:r>
           </a:p>
           <a:p>
             <a:pPr lvl="2"/>
             <a:r>
-              <a:rPr lang="en-US"/>
+              <a:rPr lang="en-US" smtClean="0"/>
               <a:t>Third level</a:t>
             </a:r>
           </a:p>
           <a:p>
             <a:pPr lvl="3"/>
             <a:r>
-              <a:rPr lang="en-US"/>
+              <a:rPr lang="en-US" smtClean="0"/>
               <a:t>Fourth level</a:t>
             </a:r>
           </a:p>
           <a:p>
             <a:pPr lvl="4"/>
             <a:r>
-              <a:rPr lang="en-US"/>
+              <a:rPr lang="en-US" smtClean="0"/>
               <a:t>Fifth level</a:t>
             </a:r>
+            <a:endParaRPr lang="en-US"/>
           </a:p>
         </p:txBody>
       </p:sp>
@@ -2019,7 +1670,7 @@
           <a:p>
             <a:pPr lvl="0"/>
             <a:r>
-              <a:rPr lang="en-US"/>
+              <a:rPr lang="en-US" smtClean="0"/>
               <a:t>Click to edit Master text styles</a:t>
             </a:r>
           </a:p>
@@ -2075,37 +1726,38 @@
           <a:p>
             <a:pPr lvl="0"/>
             <a:r>
-              <a:rPr lang="en-US"/>
+              <a:rPr lang="en-US" smtClean="0"/>
               <a:t>Click to edit Master text styles</a:t>
             </a:r>
           </a:p>
           <a:p>
             <a:pPr lvl="1"/>
             <a:r>
-              <a:rPr lang="en-US"/>
+              <a:rPr lang="en-US" smtClean="0"/>
               <a:t>Second level</a:t>
             </a:r>
           </a:p>
           <a:p>
             <a:pPr lvl="2"/>
             <a:r>
-              <a:rPr lang="en-US"/>
+              <a:rPr lang="en-US" smtClean="0"/>
               <a:t>Third level</a:t>
             </a:r>
           </a:p>
           <a:p>
             <a:pPr lvl="3"/>
             <a:r>
-              <a:rPr lang="en-US"/>
+              <a:rPr lang="en-US" smtClean="0"/>
               <a:t>Fourth level</a:t>
             </a:r>
           </a:p>
           <a:p>
             <a:pPr lvl="4"/>
             <a:r>
-              <a:rPr lang="en-US"/>
+              <a:rPr lang="en-US" smtClean="0"/>
               <a:t>Fifth level</a:t>
             </a:r>
+            <a:endParaRPr lang="en-US"/>
           </a:p>
         </p:txBody>
       </p:sp>
@@ -2126,7 +1778,7 @@
           <a:p>
             <a:fld id="{5BCAD085-E8A6-8845-BD4E-CB4CCA059FC4}" type="datetimeFigureOut">
               <a:rPr lang="en-US" smtClean="0"/>
-              <a:t>5/16/2026</a:t>
+              <a:t>1/27/13</a:t>
             </a:fld>
             <a:endParaRPr lang="en-US"/>
           </a:p>
@@ -2168,7 +1820,7 @@
           <a:p>
             <a:fld id="{C1FF6DA9-008F-8B48-92A6-B652298478BF}" type="slidenum">
               <a:rPr lang="en-US" smtClean="0"/>
-              <a:t>‹N°›</a:t>
+              <a:t>‹#›</a:t>
             </a:fld>
             <a:endParaRPr lang="en-US"/>
           </a:p>
@@ -2220,9 +1872,10 @@
           <a:lstStyle/>
           <a:p>
             <a:r>
-              <a:rPr lang="en-US"/>
+              <a:rPr lang="en-US" smtClean="0"/>
               <a:t>Click to edit Master title style</a:t>
             </a:r>
+            <a:endParaRPr lang="en-US"/>
           </a:p>
         </p:txBody>
       </p:sp>
@@ -2243,7 +1896,7 @@
           <a:p>
             <a:fld id="{5BCAD085-E8A6-8845-BD4E-CB4CCA059FC4}" type="datetimeFigureOut">
               <a:rPr lang="en-US" smtClean="0"/>
-              <a:t>5/16/2026</a:t>
+              <a:t>1/27/13</a:t>
             </a:fld>
             <a:endParaRPr lang="en-US"/>
           </a:p>
@@ -2285,7 +1938,7 @@
           <a:p>
             <a:fld id="{C1FF6DA9-008F-8B48-92A6-B652298478BF}" type="slidenum">
               <a:rPr lang="en-US" smtClean="0"/>
-              <a:t>‹N°›</a:t>
+              <a:t>‹#›</a:t>
             </a:fld>
             <a:endParaRPr lang="en-US"/>
           </a:p>
@@ -2338,7 +1991,7 @@
           <a:p>
             <a:fld id="{5BCAD085-E8A6-8845-BD4E-CB4CCA059FC4}" type="datetimeFigureOut">
               <a:rPr lang="en-US" smtClean="0"/>
-              <a:t>5/16/2026</a:t>
+              <a:t>1/27/13</a:t>
             </a:fld>
             <a:endParaRPr lang="en-US"/>
           </a:p>
@@ -2380,7 +2033,7 @@
           <a:p>
             <a:fld id="{C1FF6DA9-008F-8B48-92A6-B652298478BF}" type="slidenum">
               <a:rPr lang="en-US" smtClean="0"/>
-              <a:t>‹N°›</a:t>
+              <a:t>‹#›</a:t>
             </a:fld>
             <a:endParaRPr lang="en-US"/>
           </a:p>
@@ -2441,9 +2094,10 @@
           </a:lstStyle>
           <a:p>
             <a:r>
-              <a:rPr lang="en-US"/>
+              <a:rPr lang="en-US" smtClean="0"/>
               <a:t>Click to edit Master title style</a:t>
             </a:r>
+            <a:endParaRPr lang="en-US"/>
           </a:p>
         </p:txBody>
       </p:sp>
@@ -2497,37 +2151,38 @@
           <a:p>
             <a:pPr lvl="0"/>
             <a:r>
-              <a:rPr lang="en-US"/>
+              <a:rPr lang="en-US" smtClean="0"/>
               <a:t>Click to edit Master text styles</a:t>
             </a:r>
           </a:p>
           <a:p>
             <a:pPr lvl="1"/>
             <a:r>
-              <a:rPr lang="en-US"/>
+              <a:rPr lang="en-US" smtClean="0"/>
               <a:t>Second level</a:t>
             </a:r>
           </a:p>
           <a:p>
             <a:pPr lvl="2"/>
             <a:r>
-              <a:rPr lang="en-US"/>
+              <a:rPr lang="en-US" smtClean="0"/>
               <a:t>Third level</a:t>
             </a:r>
           </a:p>
           <a:p>
             <a:pPr lvl="3"/>
             <a:r>
-              <a:rPr lang="en-US"/>
+              <a:rPr lang="en-US" smtClean="0"/>
               <a:t>Fourth level</a:t>
             </a:r>
           </a:p>
           <a:p>
             <a:pPr lvl="4"/>
             <a:r>
-              <a:rPr lang="en-US"/>
+              <a:rPr lang="en-US" smtClean="0"/>
               <a:t>Fifth level</a:t>
             </a:r>
+            <a:endParaRPr lang="en-US"/>
           </a:p>
         </p:txBody>
       </p:sp>
@@ -2590,7 +2245,7 @@
           <a:p>
             <a:pPr lvl="0"/>
             <a:r>
-              <a:rPr lang="en-US"/>
+              <a:rPr lang="en-US" smtClean="0"/>
               <a:t>Click to edit Master text styles</a:t>
             </a:r>
           </a:p>
@@ -2613,7 +2268,7 @@
           <a:p>
             <a:fld id="{5BCAD085-E8A6-8845-BD4E-CB4CCA059FC4}" type="datetimeFigureOut">
               <a:rPr lang="en-US" smtClean="0"/>
-              <a:t>5/16/2026</a:t>
+              <a:t>1/27/13</a:t>
             </a:fld>
             <a:endParaRPr lang="en-US"/>
           </a:p>
@@ -2655,7 +2310,7 @@
           <a:p>
             <a:fld id="{C1FF6DA9-008F-8B48-92A6-B652298478BF}" type="slidenum">
               <a:rPr lang="en-US" smtClean="0"/>
-              <a:t>‹N°›</a:t>
+              <a:t>‹#›</a:t>
             </a:fld>
             <a:endParaRPr lang="en-US"/>
           </a:p>
@@ -2716,9 +2371,10 @@
           </a:lstStyle>
           <a:p>
             <a:r>
-              <a:rPr lang="en-US"/>
+              <a:rPr lang="en-US" smtClean="0"/>
               <a:t>Click to edit Master title style</a:t>
             </a:r>
+            <a:endParaRPr lang="en-US"/>
           </a:p>
         </p:txBody>
       </p:sp>
@@ -2842,7 +2498,7 @@
           <a:p>
             <a:pPr lvl="0"/>
             <a:r>
-              <a:rPr lang="en-US"/>
+              <a:rPr lang="en-US" smtClean="0"/>
               <a:t>Click to edit Master text styles</a:t>
             </a:r>
           </a:p>
@@ -2865,7 +2521,7 @@
           <a:p>
             <a:fld id="{5BCAD085-E8A6-8845-BD4E-CB4CCA059FC4}" type="datetimeFigureOut">
               <a:rPr lang="en-US" smtClean="0"/>
-              <a:t>5/16/2026</a:t>
+              <a:t>1/27/13</a:t>
             </a:fld>
             <a:endParaRPr lang="en-US"/>
           </a:p>
@@ -2907,7 +2563,7 @@
           <a:p>
             <a:fld id="{C1FF6DA9-008F-8B48-92A6-B652298478BF}" type="slidenum">
               <a:rPr lang="en-US" smtClean="0"/>
-              <a:t>‹N°›</a:t>
+              <a:t>‹#›</a:t>
             </a:fld>
             <a:endParaRPr lang="en-US"/>
           </a:p>
@@ -2974,9 +2630,10 @@
           <a:lstStyle/>
           <a:p>
             <a:r>
-              <a:rPr lang="en-US"/>
+              <a:rPr lang="en-US" smtClean="0"/>
               <a:t>Click to edit Master title style</a:t>
             </a:r>
+            <a:endParaRPr lang="en-US"/>
           </a:p>
         </p:txBody>
       </p:sp>
@@ -3007,37 +2664,38 @@
           <a:p>
             <a:pPr lvl="0"/>
             <a:r>
-              <a:rPr lang="en-US"/>
+              <a:rPr lang="en-US" smtClean="0"/>
               <a:t>Click to edit Master text styles</a:t>
             </a:r>
           </a:p>
           <a:p>
             <a:pPr lvl="1"/>
             <a:r>
-              <a:rPr lang="en-US"/>
+              <a:rPr lang="en-US" smtClean="0"/>
               <a:t>Second level</a:t>
             </a:r>
           </a:p>
           <a:p>
             <a:pPr lvl="2"/>
             <a:r>
-              <a:rPr lang="en-US"/>
+              <a:rPr lang="en-US" smtClean="0"/>
               <a:t>Third level</a:t>
             </a:r>
           </a:p>
           <a:p>
             <a:pPr lvl="3"/>
             <a:r>
-              <a:rPr lang="en-US"/>
+              <a:rPr lang="en-US" smtClean="0"/>
               <a:t>Fourth level</a:t>
             </a:r>
           </a:p>
           <a:p>
             <a:pPr lvl="4"/>
             <a:r>
-              <a:rPr lang="en-US"/>
+              <a:rPr lang="en-US" smtClean="0"/>
               <a:t>Fifth level</a:t>
             </a:r>
+            <a:endParaRPr lang="en-US"/>
           </a:p>
         </p:txBody>
       </p:sp>
@@ -3076,7 +2734,7 @@
           <a:p>
             <a:fld id="{5BCAD085-E8A6-8845-BD4E-CB4CCA059FC4}" type="datetimeFigureOut">
               <a:rPr lang="en-US" smtClean="0"/>
-              <a:t>5/16/2026</a:t>
+              <a:t>1/27/13</a:t>
             </a:fld>
             <a:endParaRPr lang="en-US"/>
           </a:p>
@@ -3154,7 +2812,7 @@
           <a:p>
             <a:fld id="{C1FF6DA9-008F-8B48-92A6-B652298478BF}" type="slidenum">
               <a:rPr lang="en-US" smtClean="0"/>
-              <a:t>‹N°›</a:t>
+              <a:t>‹#›</a:t>
             </a:fld>
             <a:endParaRPr lang="en-US"/>
           </a:p>
@@ -3437,6 +3095,14 @@
 <file path=ppt/slides/slide1.xml><?xml version="1.0" encoding="utf-8"?>
 <p:sld xmlns:a="http://schemas.openxmlformats.org/drawingml/2006/main" xmlns:p="http://schemas.openxmlformats.org/presentationml/2006/main" xmlns:r="http://schemas.openxmlformats.org/officeDocument/2006/relationships">
   <p:cSld>
+    <p:bg>
+      <p:bgPr>
+        <a:solidFill>
+          <a:srgbClr val="1A5C33"/>
+        </a:solidFill>
+        <a:effectLst/>
+      </p:bgPr>
+    </p:bg>
     <p:spTree>
       <p:nvGrpSpPr>
         <p:cNvPr id="1" name=""/>
@@ -3446,56 +3112,14 @@
       <p:grpSpPr/>
       <p:sp>
         <p:nvSpPr>
-          <p:cNvPr id="2" name="Title 1"/>
-          <p:cNvSpPr>
-            <a:spLocks noGrp="1"/>
-          </p:cNvSpPr>
-          <p:nvPr>
-            <p:ph type="ctrTitle"/>
-          </p:nvPr>
-        </p:nvSpPr>
-        <p:spPr/>
-        <p:txBody>
-          <a:bodyPr/>
-          <a:lstStyle/>
-          <a:p>
-            <a:r>
-              <a:t>Informatique et Architecture de l'Ordinateur</a:t>
-            </a:r>
-          </a:p>
-        </p:txBody>
-      </p:sp>
-      <p:sp>
-        <p:nvSpPr>
-          <p:cNvPr id="3" name="Subtitle 2"/>
-          <p:cNvSpPr>
-            <a:spLocks noGrp="1"/>
-          </p:cNvSpPr>
-          <p:nvPr>
-            <p:ph type="subTitle" idx="1"/>
-          </p:nvPr>
-        </p:nvSpPr>
-        <p:spPr/>
-        <p:txBody>
-          <a:bodyPr/>
-          <a:lstStyle/>
-          <a:p>
-            <a:r>
-              <a:t>Cours TIC 02 | 1h30 (90 min) | BELACEL Madani</a:t>
-            </a:r>
-          </a:p>
-        </p:txBody>
-      </p:sp>
-      <p:sp>
-        <p:nvSpPr>
-          <p:cNvPr id="4" name="TextBox 3"/>
+          <p:cNvPr id="2" name="TextBox 1"/>
           <p:cNvSpPr txBox="1"/>
           <p:nvPr/>
         </p:nvSpPr>
         <p:spPr>
           <a:xfrm>
-            <a:off x="365760" y="6446520"/>
-            <a:ext cx="8412480" cy="320040"/>
+            <a:off x="731520" y="1371600"/>
+            <a:ext cx="7680960" cy="1371600"/>
           </a:xfrm>
           <a:prstGeom prst="rect">
             <a:avLst/>
@@ -3503,20 +3127,90 @@
           <a:noFill/>
         </p:spPr>
         <p:txBody>
-          <a:bodyPr wrap="none">
+          <a:bodyPr wrap="square">
             <a:spAutoFit/>
           </a:bodyPr>
           <a:lstStyle/>
           <a:p>
             <a:pPr algn="ctr">
-              <a:defRPr sz="900">
-                <a:solidFill>
-                  <a:srgbClr val="404040"/>
-                </a:solidFill>
-              </a:defRPr>
-            </a:pPr>
-            <a:r>
-              <a:t>Cours TIC 02  •  Diapositive 1/10</a:t>
+              <a:defRPr sz="3200" b="1">
+                <a:solidFill>
+                  <a:srgbClr val="FFFFFF"/>
+                </a:solidFill>
+              </a:defRPr>
+            </a:pPr>
+            <a:r>
+              <a:t>Cours TIC 02 — Informatique et Ordinateur pour la Recherche en Didactique (Master 2 DLE)</a:t>
+            </a:r>
+          </a:p>
+        </p:txBody>
+      </p:sp>
+      <p:sp>
+        <p:nvSpPr>
+          <p:cNvPr id="3" name="TextBox 2"/>
+          <p:cNvSpPr txBox="1"/>
+          <p:nvPr/>
+        </p:nvSpPr>
+        <p:spPr>
+          <a:xfrm>
+            <a:off x="731520" y="2926080"/>
+            <a:ext cx="7680960" cy="548640"/>
+          </a:xfrm>
+          <a:prstGeom prst="rect">
+            <a:avLst/>
+          </a:prstGeom>
+          <a:noFill/>
+        </p:spPr>
+        <p:txBody>
+          <a:bodyPr wrap="square">
+            <a:spAutoFit/>
+          </a:bodyPr>
+          <a:lstStyle/>
+          <a:p>
+            <a:pPr algn="ctr">
+              <a:defRPr sz="2000" b="0">
+                <a:solidFill>
+                  <a:srgbClr val="C5D9C7"/>
+                </a:solidFill>
+              </a:defRPr>
+            </a:pPr>
+            <a:r>
+              <a:t>Module TIC — Dr. BELACEL Madani</a:t>
+            </a:r>
+          </a:p>
+        </p:txBody>
+      </p:sp>
+      <p:sp>
+        <p:nvSpPr>
+          <p:cNvPr id="4" name="TextBox 3"/>
+          <p:cNvSpPr txBox="1"/>
+          <p:nvPr/>
+        </p:nvSpPr>
+        <p:spPr>
+          <a:xfrm>
+            <a:off x="731520" y="3657600"/>
+            <a:ext cx="7680960" cy="457200"/>
+          </a:xfrm>
+          <a:prstGeom prst="rect">
+            <a:avLst/>
+          </a:prstGeom>
+          <a:noFill/>
+        </p:spPr>
+        <p:txBody>
+          <a:bodyPr wrap="square">
+            <a:spAutoFit/>
+          </a:bodyPr>
+          <a:lstStyle/>
+          <a:p>
+            <a:pPr algn="ctr">
+              <a:defRPr sz="1600" b="0">
+                <a:solidFill>
+                  <a:srgbClr val="A0CFA0"/>
+                </a:solidFill>
+              </a:defRPr>
+            </a:pPr>
+            <a:r>
+              <a:t>Université de Mostaganem — MCB</a:t>
             </a:r>
           </a:p>
         </p:txBody>
@@ -3526,15 +3220,20 @@
   <p:clrMapOvr>
     <a:masterClrMapping/>
   </p:clrMapOvr>
-  <p:transition spd="med">
-    <p:fade/>
-  </p:transition>
 </p:sld>
 </file>
 
 <file path=ppt/slides/slide10.xml><?xml version="1.0" encoding="utf-8"?>
 <p:sld xmlns:a="http://schemas.openxmlformats.org/drawingml/2006/main" xmlns:p="http://schemas.openxmlformats.org/presentationml/2006/main" xmlns:r="http://schemas.openxmlformats.org/officeDocument/2006/relationships">
   <p:cSld>
+    <p:bg>
+      <p:bgPr>
+        <a:solidFill>
+          <a:srgbClr val="FFFFFF"/>
+        </a:solidFill>
+        <a:effectLst/>
+      </p:bgPr>
+    </p:bg>
     <p:spTree>
       <p:nvGrpSpPr>
         <p:cNvPr id="1" name=""/>
@@ -3544,83 +3243,57 @@
       <p:grpSpPr/>
       <p:sp>
         <p:nvSpPr>
-          <p:cNvPr id="2" name="Title 1"/>
-          <p:cNvSpPr>
-            <a:spLocks noGrp="1"/>
-          </p:cNvSpPr>
-          <p:nvPr>
-            <p:ph type="title"/>
-          </p:nvPr>
-        </p:nvSpPr>
-        <p:spPr/>
-        <p:txBody>
-          <a:bodyPr/>
-          <a:lstStyle/>
-          <a:p>
-            <a:r>
-              <a:t>Conclusion</a:t>
-            </a:r>
-          </a:p>
-        </p:txBody>
-      </p:sp>
-      <p:sp>
-        <p:nvSpPr>
-          <p:cNvPr id="3" name="Content Placeholder 2"/>
-          <p:cNvSpPr>
-            <a:spLocks noGrp="1"/>
-          </p:cNvSpPr>
-          <p:nvPr>
-            <p:ph idx="1"/>
-          </p:nvPr>
-        </p:nvSpPr>
-        <p:spPr/>
-        <p:txBody>
-          <a:bodyPr/>
-          <a:lstStyle/>
-          <a:p>
-            <a:pPr>
-              <a:defRPr sz="2000"/>
-            </a:pPr>
-            <a:r>
-              <a:t>✅ Autonomie numérique</a:t>
-            </a:r>
-          </a:p>
-          <a:p>
-            <a:pPr>
-              <a:defRPr sz="2000"/>
-            </a:pPr>
-            <a:r>
-              <a:t>✅ TD 02 — 1h30</a:t>
-            </a:r>
-          </a:p>
-          <a:p>
-            <a:pPr>
-              <a:defRPr sz="2000"/>
-            </a:pPr>
-            <a:r>
-              <a:t>✅ Prochain : Windows</a:t>
-            </a:r>
-          </a:p>
-          <a:p>
-            <a:pPr>
-              <a:defRPr sz="2000"/>
-            </a:pPr>
-            <a:r>
-              <a:t>✅ Questions ?</a:t>
-            </a:r>
-          </a:p>
-        </p:txBody>
-      </p:sp>
-      <p:sp>
-        <p:nvSpPr>
-          <p:cNvPr id="4" name="TextBox 3"/>
+          <p:cNvPr id="2" name="Rectangle 1"/>
+          <p:cNvSpPr/>
+          <p:nvPr/>
+        </p:nvSpPr>
+        <p:spPr>
+          <a:xfrm>
+            <a:off x="0" y="0"/>
+            <a:ext cx="109728" cy="6858000"/>
+          </a:xfrm>
+          <a:prstGeom prst="rect">
+            <a:avLst/>
+          </a:prstGeom>
+          <a:solidFill>
+            <a:srgbClr val="2C6E49"/>
+          </a:solidFill>
+          <a:ln>
+            <a:noFill/>
+          </a:ln>
+        </p:spPr>
+        <p:style>
+          <a:lnRef idx="1">
+            <a:schemeClr val="accent1"/>
+          </a:lnRef>
+          <a:fillRef idx="3">
+            <a:schemeClr val="accent1"/>
+          </a:fillRef>
+          <a:effectRef idx="2">
+            <a:schemeClr val="accent1"/>
+          </a:effectRef>
+          <a:fontRef idx="minor">
+            <a:schemeClr val="lt1"/>
+          </a:fontRef>
+        </p:style>
+        <p:txBody>
+          <a:bodyPr rtlCol="0" anchor="ctr"/>
+          <a:lstStyle/>
+          <a:p>
+            <a:pPr algn="ctr"/>
+          </a:p>
+        </p:txBody>
+      </p:sp>
+      <p:sp>
+        <p:nvSpPr>
+          <p:cNvPr id="3" name="TextBox 2"/>
           <p:cNvSpPr txBox="1"/>
           <p:nvPr/>
         </p:nvSpPr>
         <p:spPr>
           <a:xfrm>
-            <a:off x="365760" y="6446520"/>
-            <a:ext cx="8412480" cy="320040"/>
+            <a:off x="457200" y="365760"/>
+            <a:ext cx="8229600" cy="640080"/>
           </a:xfrm>
           <a:prstGeom prst="rect">
             <a:avLst/>
@@ -3628,20 +3301,118 @@
           <a:noFill/>
         </p:spPr>
         <p:txBody>
-          <a:bodyPr wrap="none">
+          <a:bodyPr wrap="square">
             <a:spAutoFit/>
           </a:bodyPr>
           <a:lstStyle/>
           <a:p>
-            <a:pPr algn="ctr">
-              <a:defRPr sz="900">
-                <a:solidFill>
-                  <a:srgbClr val="404040"/>
-                </a:solidFill>
-              </a:defRPr>
-            </a:pPr>
-            <a:r>
-              <a:t>Cours TIC 02  •  Diapositive 10/10</a:t>
+            <a:pPr algn="l">
+              <a:defRPr sz="2200" b="1">
+                <a:solidFill>
+                  <a:srgbClr val="1A5C33"/>
+                </a:solidFill>
+              </a:defRPr>
+            </a:pPr>
+            <a:r>
+              <a:t>2.2 Outils numériques pour le chercheur en DLE</a:t>
+            </a:r>
+          </a:p>
+        </p:txBody>
+      </p:sp>
+      <p:sp>
+        <p:nvSpPr>
+          <p:cNvPr id="4" name="TextBox 3"/>
+          <p:cNvSpPr txBox="1"/>
+          <p:nvPr/>
+        </p:nvSpPr>
+        <p:spPr>
+          <a:xfrm>
+            <a:off x="457200" y="1371600"/>
+            <a:ext cx="7772400" cy="4572000"/>
+          </a:xfrm>
+          <a:prstGeom prst="rect">
+            <a:avLst/>
+          </a:prstGeom>
+          <a:noFill/>
+        </p:spPr>
+        <p:txBody>
+          <a:bodyPr wrap="square">
+            <a:spAutoFit/>
+          </a:bodyPr>
+          <a:lstStyle/>
+          <a:p>
+            <a:pPr>
+              <a:spcAft>
+                <a:spcPts val="600"/>
+              </a:spcAft>
+              <a:defRPr sz="1400">
+                <a:solidFill>
+                  <a:srgbClr val="222222"/>
+                </a:solidFill>
+              </a:defRPr>
+            </a:pPr>
+            <a:r>
+              <a:t>• Systèmes d'exploitation: Windows (ligne de commande PowerShell), Linux/macOS (terminal bash)</a:t>
+            </a:r>
+          </a:p>
+          <a:p>
+            <a:pPr>
+              <a:spcAft>
+                <a:spcPts val="600"/>
+              </a:spcAft>
+              <a:defRPr sz="1400">
+                <a:solidFill>
+                  <a:srgbClr val="222222"/>
+                </a:solidFill>
+              </a:defRPr>
+            </a:pPr>
+            <a:r>
+              <a:t>• Environnements de travail: VS Code, Jupyter Notebook, RStudio</a:t>
+            </a:r>
+          </a:p>
+          <a:p>
+            <a:pPr>
+              <a:spcAft>
+                <a:spcPts val="600"/>
+              </a:spcAft>
+              <a:defRPr sz="1400">
+                <a:solidFill>
+                  <a:srgbClr val="222222"/>
+                </a:solidFill>
+              </a:defRPr>
+            </a:pPr>
+            <a:r>
+              <a:t>• Gestion de versions: Git / GitHub pour les projets de recherche</a:t>
+            </a:r>
+          </a:p>
+          <a:p>
+            <a:pPr>
+              <a:spcAft>
+                <a:spcPts val="600"/>
+              </a:spcAft>
+              <a:defRPr sz="1400">
+                <a:solidFill>
+                  <a:srgbClr val="222222"/>
+                </a:solidFill>
+              </a:defRPr>
+            </a:pPr>
+            <a:r>
+              <a:t>• Bases de données: SQLite, MySQL pour les données d'études longitudinales</a:t>
+            </a:r>
+          </a:p>
+          <a:p>
+            <a:pPr>
+              <a:spcAft>
+                <a:spcPts val="600"/>
+              </a:spcAft>
+              <a:defRPr sz="1400">
+                <a:solidFill>
+                  <a:srgbClr val="222222"/>
+                </a:solidFill>
+              </a:defRPr>
+            </a:pPr>
+            <a:r>
+              <a:t>• Standards d'interopérabilité: TEI (Text Encoding Initiative) pour les corpus, XML/JSON pour les données</a:t>
             </a:r>
           </a:p>
         </p:txBody>
@@ -3651,15 +3422,20 @@
   <p:clrMapOvr>
     <a:masterClrMapping/>
   </p:clrMapOvr>
-  <p:transition spd="med">
-    <p:fade/>
-  </p:transition>
 </p:sld>
 </file>
 
-<file path=ppt/slides/slide2.xml><?xml version="1.0" encoding="utf-8"?>
+<file path=ppt/slides/slide11.xml><?xml version="1.0" encoding="utf-8"?>
 <p:sld xmlns:a="http://schemas.openxmlformats.org/drawingml/2006/main" xmlns:p="http://schemas.openxmlformats.org/presentationml/2006/main" xmlns:r="http://schemas.openxmlformats.org/officeDocument/2006/relationships">
   <p:cSld>
+    <p:bg>
+      <p:bgPr>
+        <a:solidFill>
+          <a:srgbClr val="FFFFFF"/>
+        </a:solidFill>
+        <a:effectLst/>
+      </p:bgPr>
+    </p:bg>
     <p:spTree>
       <p:nvGrpSpPr>
         <p:cNvPr id="1" name=""/>
@@ -3669,83 +3445,57 @@
       <p:grpSpPr/>
       <p:sp>
         <p:nvSpPr>
-          <p:cNvPr id="2" name="Title 1"/>
-          <p:cNvSpPr>
-            <a:spLocks noGrp="1"/>
-          </p:cNvSpPr>
-          <p:nvPr>
-            <p:ph type="title"/>
-          </p:nvPr>
-        </p:nvSpPr>
-        <p:spPr/>
-        <p:txBody>
-          <a:bodyPr/>
-          <a:lstStyle/>
-          <a:p>
-            <a:r>
-              <a:t>Objectifs pédagogiques</a:t>
-            </a:r>
-          </a:p>
-        </p:txBody>
-      </p:sp>
-      <p:sp>
-        <p:nvSpPr>
-          <p:cNvPr id="3" name="Content Placeholder 2"/>
-          <p:cNvSpPr>
-            <a:spLocks noGrp="1"/>
-          </p:cNvSpPr>
-          <p:nvPr>
-            <p:ph idx="1"/>
-          </p:nvPr>
-        </p:nvSpPr>
-        <p:spPr/>
-        <p:txBody>
-          <a:bodyPr/>
-          <a:lstStyle/>
-          <a:p>
-            <a:pPr>
-              <a:defRPr sz="2000"/>
-            </a:pPr>
-            <a:r>
-              <a:t>🎯 Définir informatique, hardware, software</a:t>
-            </a:r>
-          </a:p>
-          <a:p>
-            <a:pPr>
-              <a:defRPr sz="2000"/>
-            </a:pPr>
-            <a:r>
-              <a:t>🎯 Modèle von Neumann</a:t>
-            </a:r>
-          </a:p>
-          <a:p>
-            <a:pPr>
-              <a:defRPr sz="2000"/>
-            </a:pPr>
-            <a:r>
-              <a:t>🎯 Identifier composants PC</a:t>
-            </a:r>
-          </a:p>
-          <a:p>
-            <a:pPr>
-              <a:defRPr sz="2000"/>
-            </a:pPr>
-            <a:r>
-              <a:t>🎯 Bonnes pratiques étudiantes</a:t>
-            </a:r>
-          </a:p>
-        </p:txBody>
-      </p:sp>
-      <p:sp>
-        <p:nvSpPr>
-          <p:cNvPr id="4" name="TextBox 3"/>
+          <p:cNvPr id="2" name="Rectangle 1"/>
+          <p:cNvSpPr/>
+          <p:nvPr/>
+        </p:nvSpPr>
+        <p:spPr>
+          <a:xfrm>
+            <a:off x="0" y="0"/>
+            <a:ext cx="109728" cy="6858000"/>
+          </a:xfrm>
+          <a:prstGeom prst="rect">
+            <a:avLst/>
+          </a:prstGeom>
+          <a:solidFill>
+            <a:srgbClr val="2C6E49"/>
+          </a:solidFill>
+          <a:ln>
+            <a:noFill/>
+          </a:ln>
+        </p:spPr>
+        <p:style>
+          <a:lnRef idx="1">
+            <a:schemeClr val="accent1"/>
+          </a:lnRef>
+          <a:fillRef idx="3">
+            <a:schemeClr val="accent1"/>
+          </a:fillRef>
+          <a:effectRef idx="2">
+            <a:schemeClr val="accent1"/>
+          </a:effectRef>
+          <a:fontRef idx="minor">
+            <a:schemeClr val="lt1"/>
+          </a:fontRef>
+        </p:style>
+        <p:txBody>
+          <a:bodyPr rtlCol="0" anchor="ctr"/>
+          <a:lstStyle/>
+          <a:p>
+            <a:pPr algn="ctr"/>
+          </a:p>
+        </p:txBody>
+      </p:sp>
+      <p:sp>
+        <p:nvSpPr>
+          <p:cNvPr id="3" name="TextBox 2"/>
           <p:cNvSpPr txBox="1"/>
           <p:nvPr/>
         </p:nvSpPr>
         <p:spPr>
           <a:xfrm>
-            <a:off x="365760" y="6446520"/>
-            <a:ext cx="8412480" cy="320040"/>
+            <a:off x="457200" y="365760"/>
+            <a:ext cx="8229600" cy="640080"/>
           </a:xfrm>
           <a:prstGeom prst="rect">
             <a:avLst/>
@@ -3753,20 +3503,103 @@
           <a:noFill/>
         </p:spPr>
         <p:txBody>
-          <a:bodyPr wrap="none">
+          <a:bodyPr wrap="square">
             <a:spAutoFit/>
           </a:bodyPr>
           <a:lstStyle/>
           <a:p>
-            <a:pPr algn="ctr">
-              <a:defRPr sz="900">
-                <a:solidFill>
-                  <a:srgbClr val="404040"/>
-                </a:solidFill>
-              </a:defRPr>
-            </a:pPr>
-            <a:r>
-              <a:t>Cours TIC 02  •  Diapositive 2/10</a:t>
+            <a:pPr algn="l">
+              <a:defRPr sz="2200" b="1">
+                <a:solidFill>
+                  <a:srgbClr val="1A5C33"/>
+                </a:solidFill>
+              </a:defRPr>
+            </a:pPr>
+            <a:r>
+              <a:t>2.3 Infrastructure disponible en Algérie</a:t>
+            </a:r>
+          </a:p>
+        </p:txBody>
+      </p:sp>
+      <p:sp>
+        <p:nvSpPr>
+          <p:cNvPr id="4" name="TextBox 3"/>
+          <p:cNvSpPr txBox="1"/>
+          <p:nvPr/>
+        </p:nvSpPr>
+        <p:spPr>
+          <a:xfrm>
+            <a:off x="457200" y="1371600"/>
+            <a:ext cx="7772400" cy="4572000"/>
+          </a:xfrm>
+          <a:prstGeom prst="rect">
+            <a:avLst/>
+          </a:prstGeom>
+          <a:noFill/>
+        </p:spPr>
+        <p:txBody>
+          <a:bodyPr wrap="square">
+            <a:spAutoFit/>
+          </a:bodyPr>
+          <a:lstStyle/>
+          <a:p>
+            <a:pPr>
+              <a:spcAft>
+                <a:spcPts val="600"/>
+              </a:spcAft>
+              <a:defRPr sz="1400">
+                <a:solidFill>
+                  <a:srgbClr val="222222"/>
+                </a:solidFill>
+              </a:defRPr>
+            </a:pPr>
+            <a:r>
+              <a:t>• Plateforme Moodle universitaire</a:t>
+            </a:r>
+          </a:p>
+          <a:p>
+            <a:pPr>
+              <a:spcAft>
+                <a:spcPts val="600"/>
+              </a:spcAft>
+              <a:defRPr sz="1400">
+                <a:solidFill>
+                  <a:srgbClr val="222222"/>
+                </a:solidFill>
+              </a:defRPr>
+            </a:pPr>
+            <a:r>
+              <a:t>• Accès SNDL aux bases de données internationales</a:t>
+            </a:r>
+          </a:p>
+          <a:p>
+            <a:pPr>
+              <a:spcAft>
+                <a:spcPts val="600"/>
+              </a:spcAft>
+              <a:defRPr sz="1400">
+                <a:solidFill>
+                  <a:srgbClr val="222222"/>
+                </a:solidFill>
+              </a:defRPr>
+            </a:pPr>
+            <a:r>
+              <a:t>• Bibliothèques numériques (theses-algerie.dz, scribum.univ-usto.dz)</a:t>
+            </a:r>
+          </a:p>
+          <a:p>
+            <a:pPr>
+              <a:spcAft>
+                <a:spcPts val="600"/>
+              </a:spcAft>
+              <a:defRPr sz="1400">
+                <a:solidFill>
+                  <a:srgbClr val="222222"/>
+                </a:solidFill>
+              </a:defRPr>
+            </a:pPr>
+            <a:r>
+              <a:t>• Serveurs institutionnels et formations en humanités numériques</a:t>
             </a:r>
           </a:p>
         </p:txBody>
@@ -3776,15 +3609,20 @@
   <p:clrMapOvr>
     <a:masterClrMapping/>
   </p:clrMapOvr>
-  <p:transition spd="med">
-    <p:fade/>
-  </p:transition>
 </p:sld>
 </file>
 
-<file path=ppt/slides/slide3.xml><?xml version="1.0" encoding="utf-8"?>
+<file path=ppt/slides/slide12.xml><?xml version="1.0" encoding="utf-8"?>
 <p:sld xmlns:a="http://schemas.openxmlformats.org/drawingml/2006/main" xmlns:p="http://schemas.openxmlformats.org/presentationml/2006/main" xmlns:r="http://schemas.openxmlformats.org/officeDocument/2006/relationships">
   <p:cSld>
+    <p:bg>
+      <p:bgPr>
+        <a:solidFill>
+          <a:srgbClr val="FFFFFF"/>
+        </a:solidFill>
+        <a:effectLst/>
+      </p:bgPr>
+    </p:bg>
     <p:spTree>
       <p:nvGrpSpPr>
         <p:cNvPr id="1" name=""/>
@@ -3794,83 +3632,57 @@
       <p:grpSpPr/>
       <p:sp>
         <p:nvSpPr>
-          <p:cNvPr id="2" name="Title 1"/>
-          <p:cNvSpPr>
-            <a:spLocks noGrp="1"/>
-          </p:cNvSpPr>
-          <p:nvPr>
-            <p:ph type="title"/>
-          </p:nvPr>
-        </p:nvSpPr>
-        <p:spPr/>
-        <p:txBody>
-          <a:bodyPr/>
-          <a:lstStyle/>
-          <a:p>
-            <a:r>
-              <a:t>Plan du cours (1h30)</a:t>
-            </a:r>
-          </a:p>
-        </p:txBody>
-      </p:sp>
-      <p:sp>
-        <p:nvSpPr>
-          <p:cNvPr id="3" name="Content Placeholder 2"/>
-          <p:cNvSpPr>
-            <a:spLocks noGrp="1"/>
-          </p:cNvSpPr>
-          <p:nvPr>
-            <p:ph idx="1"/>
-          </p:nvPr>
-        </p:nvSpPr>
-        <p:spPr/>
-        <p:txBody>
-          <a:bodyPr/>
-          <a:lstStyle/>
-          <a:p>
-            <a:pPr>
-              <a:defRPr sz="2000"/>
-            </a:pPr>
-            <a:r>
-              <a:t>📋 8 parties — 90 minutes</a:t>
-            </a:r>
-          </a:p>
-          <a:p>
-            <a:pPr>
-              <a:defRPr sz="2000"/>
-            </a:pPr>
-            <a:r>
-              <a:t>📋 Intro → Informatique → von Neumann</a:t>
-            </a:r>
-          </a:p>
-          <a:p>
-            <a:pPr>
-              <a:defRPr sz="2000"/>
-            </a:pPr>
-            <a:r>
-              <a:t>📋 Hardware → Software → Interaction</a:t>
-            </a:r>
-          </a:p>
-          <a:p>
-            <a:pPr>
-              <a:defRPr sz="2000"/>
-            </a:pPr>
-            <a:r>
-              <a:t>📋 Bonnes pratiques → Conclusion</a:t>
-            </a:r>
-          </a:p>
-        </p:txBody>
-      </p:sp>
-      <p:sp>
-        <p:nvSpPr>
-          <p:cNvPr id="4" name="TextBox 3"/>
+          <p:cNvPr id="2" name="Rectangle 1"/>
+          <p:cNvSpPr/>
+          <p:nvPr/>
+        </p:nvSpPr>
+        <p:spPr>
+          <a:xfrm>
+            <a:off x="0" y="0"/>
+            <a:ext cx="109728" cy="6858000"/>
+          </a:xfrm>
+          <a:prstGeom prst="rect">
+            <a:avLst/>
+          </a:prstGeom>
+          <a:solidFill>
+            <a:srgbClr val="2C6E49"/>
+          </a:solidFill>
+          <a:ln>
+            <a:noFill/>
+          </a:ln>
+        </p:spPr>
+        <p:style>
+          <a:lnRef idx="1">
+            <a:schemeClr val="accent1"/>
+          </a:lnRef>
+          <a:fillRef idx="3">
+            <a:schemeClr val="accent1"/>
+          </a:fillRef>
+          <a:effectRef idx="2">
+            <a:schemeClr val="accent1"/>
+          </a:effectRef>
+          <a:fontRef idx="minor">
+            <a:schemeClr val="lt1"/>
+          </a:fontRef>
+        </p:style>
+        <p:txBody>
+          <a:bodyPr rtlCol="0" anchor="ctr"/>
+          <a:lstStyle/>
+          <a:p>
+            <a:pPr algn="ctr"/>
+          </a:p>
+        </p:txBody>
+      </p:sp>
+      <p:sp>
+        <p:nvSpPr>
+          <p:cNvPr id="3" name="TextBox 2"/>
           <p:cNvSpPr txBox="1"/>
           <p:nvPr/>
         </p:nvSpPr>
         <p:spPr>
           <a:xfrm>
-            <a:off x="365760" y="6446520"/>
-            <a:ext cx="8412480" cy="320040"/>
+            <a:off x="457200" y="365760"/>
+            <a:ext cx="8229600" cy="640080"/>
           </a:xfrm>
           <a:prstGeom prst="rect">
             <a:avLst/>
@@ -3878,20 +3690,89 @@
           <a:noFill/>
         </p:spPr>
         <p:txBody>
-          <a:bodyPr wrap="none">
+          <a:bodyPr wrap="square">
             <a:spAutoFit/>
           </a:bodyPr>
           <a:lstStyle/>
           <a:p>
-            <a:pPr algn="ctr">
-              <a:defRPr sz="900">
-                <a:solidFill>
-                  <a:srgbClr val="404040"/>
-                </a:solidFill>
-              </a:defRPr>
-            </a:pPr>
-            <a:r>
-              <a:t>Cours TIC 02  •  Diapositive 3/10</a:t>
+            <a:pPr algn="l">
+              <a:defRPr sz="2200" b="1">
+                <a:solidFill>
+                  <a:srgbClr val="1A5C33"/>
+                </a:solidFill>
+              </a:defRPr>
+            </a:pPr>
+            <a:r>
+              <a:t>3.1 Définition et intérêt pour la DLE</a:t>
+            </a:r>
+          </a:p>
+        </p:txBody>
+      </p:sp>
+      <p:sp>
+        <p:nvSpPr>
+          <p:cNvPr id="4" name="TextBox 3"/>
+          <p:cNvSpPr txBox="1"/>
+          <p:nvPr/>
+        </p:nvSpPr>
+        <p:spPr>
+          <a:xfrm>
+            <a:off x="457200" y="1371600"/>
+            <a:ext cx="7772400" cy="4572000"/>
+          </a:xfrm>
+          <a:prstGeom prst="rect">
+            <a:avLst/>
+          </a:prstGeom>
+          <a:noFill/>
+        </p:spPr>
+        <p:txBody>
+          <a:bodyPr wrap="square">
+            <a:spAutoFit/>
+          </a:bodyPr>
+          <a:lstStyle/>
+          <a:p>
+            <a:pPr>
+              <a:spcAft>
+                <a:spcPts val="600"/>
+              </a:spcAft>
+              <a:defRPr sz="1400">
+                <a:solidFill>
+                  <a:srgbClr val="222222"/>
+                </a:solidFill>
+              </a:defRPr>
+            </a:pPr>
+            <a:r>
+              <a:t>• Lalinguistique de corpusest l'étude de la langue à partir d'ensembles de textes authentiques (corpus) collectés et analysés informatiquement. Pour le chercheur en DLE, le corpus permet d'étudier les productions d'apprenants, les discours d'enseignants, les manuels et les interactions en ligne.</a:t>
+            </a:r>
+          </a:p>
+          <a:p>
+            <a:pPr>
+              <a:spcAft>
+                <a:spcPts val="600"/>
+              </a:spcAft>
+              <a:defRPr sz="1400">
+                <a:solidFill>
+                  <a:srgbClr val="222222"/>
+                </a:solidFill>
+              </a:defRPr>
+            </a:pPr>
+            <a:r>
+              <a:t>• Types de corpus en DLE :- Corpus d'apprenants (ex. : FRIDA, CEFLE)</a:t>
+            </a:r>
+            <a:br/>
+            <a:r>
+              <a:t>- Corpus oraux (ex. : CLAPI, ESLO)</a:t>
+            </a:r>
+            <a:br/>
+            <a:r>
+              <a:t>- Corpus de manuels et supports pédagogiques</a:t>
+            </a:r>
+            <a:br/>
+            <a:r>
+              <a:t>- Corpus d'interactions en ligne (forums, chats, réseaux sociaux)</a:t>
+            </a:r>
+            <a:br/>
+            <a:r>
+              <a:t>- Corpus parallèles (traduction)</a:t>
             </a:r>
           </a:p>
         </p:txBody>
@@ -3901,15 +3782,20 @@
   <p:clrMapOvr>
     <a:masterClrMapping/>
   </p:clrMapOvr>
-  <p:transition spd="med">
-    <p:fade/>
-  </p:transition>
 </p:sld>
 </file>
 
-<file path=ppt/slides/slide4.xml><?xml version="1.0" encoding="utf-8"?>
+<file path=ppt/slides/slide13.xml><?xml version="1.0" encoding="utf-8"?>
 <p:sld xmlns:a="http://schemas.openxmlformats.org/drawingml/2006/main" xmlns:p="http://schemas.openxmlformats.org/presentationml/2006/main" xmlns:r="http://schemas.openxmlformats.org/officeDocument/2006/relationships">
   <p:cSld>
+    <p:bg>
+      <p:bgPr>
+        <a:solidFill>
+          <a:srgbClr val="E8F0E9"/>
+        </a:solidFill>
+        <a:effectLst/>
+      </p:bgPr>
+    </p:bg>
     <p:spTree>
       <p:nvGrpSpPr>
         <p:cNvPr id="1" name=""/>
@@ -3919,83 +3805,14 @@
       <p:grpSpPr/>
       <p:sp>
         <p:nvSpPr>
-          <p:cNvPr id="2" name="Title 1"/>
-          <p:cNvSpPr>
-            <a:spLocks noGrp="1"/>
-          </p:cNvSpPr>
-          <p:nvPr>
-            <p:ph type="title"/>
-          </p:nvPr>
-        </p:nvSpPr>
-        <p:spPr/>
-        <p:txBody>
-          <a:bodyPr/>
-          <a:lstStyle/>
-          <a:p>
-            <a:r>
-              <a:t>Qu'est-ce que l'informatique ?</a:t>
-            </a:r>
-          </a:p>
-        </p:txBody>
-      </p:sp>
-      <p:sp>
-        <p:nvSpPr>
-          <p:cNvPr id="3" name="Content Placeholder 2"/>
-          <p:cNvSpPr>
-            <a:spLocks noGrp="1"/>
-          </p:cNvSpPr>
-          <p:nvPr>
-            <p:ph idx="1"/>
-          </p:nvPr>
-        </p:nvSpPr>
-        <p:spPr/>
-        <p:txBody>
-          <a:bodyPr/>
-          <a:lstStyle/>
-          <a:p>
-            <a:pPr>
-              <a:defRPr sz="2000"/>
-            </a:pPr>
-            <a:r>
-              <a:t>💡 Traitement automatique</a:t>
-            </a:r>
-          </a:p>
-          <a:p>
-            <a:pPr>
-              <a:defRPr sz="2000"/>
-            </a:pPr>
-            <a:r>
-              <a:t>💡 Hardware + Software</a:t>
-            </a:r>
-          </a:p>
-          <a:p>
-            <a:pPr>
-              <a:defRPr sz="2000"/>
-            </a:pPr>
-            <a:r>
-              <a:t>💡 Approche utilisateur</a:t>
-            </a:r>
-          </a:p>
-          <a:p>
-            <a:pPr>
-              <a:defRPr sz="2000"/>
-            </a:pPr>
-            <a:r>
-              <a:t>💡 Science et pratique</a:t>
-            </a:r>
-          </a:p>
-        </p:txBody>
-      </p:sp>
-      <p:sp>
-        <p:nvSpPr>
-          <p:cNvPr id="4" name="TextBox 3"/>
+          <p:cNvPr id="2" name="TextBox 1"/>
           <p:cNvSpPr txBox="1"/>
           <p:nvPr/>
         </p:nvSpPr>
         <p:spPr>
           <a:xfrm>
-            <a:off x="365760" y="6446520"/>
-            <a:ext cx="8412480" cy="320040"/>
+            <a:off x="548640" y="365760"/>
+            <a:ext cx="7772400" cy="640080"/>
           </a:xfrm>
           <a:prstGeom prst="rect">
             <a:avLst/>
@@ -4003,20 +3820,130 @@
           <a:noFill/>
         </p:spPr>
         <p:txBody>
-          <a:bodyPr wrap="none">
+          <a:bodyPr wrap="square">
             <a:spAutoFit/>
           </a:bodyPr>
           <a:lstStyle/>
           <a:p>
             <a:pPr algn="ctr">
-              <a:defRPr sz="900">
-                <a:solidFill>
-                  <a:srgbClr val="404040"/>
-                </a:solidFill>
-              </a:defRPr>
-            </a:pPr>
-            <a:r>
-              <a:t>Cours TIC 02  •  Diapositive 4/10</a:t>
+              <a:defRPr sz="2600" b="1">
+                <a:solidFill>
+                  <a:srgbClr val="1A5C33"/>
+                </a:solidFill>
+              </a:defRPr>
+            </a:pPr>
+            <a:r>
+              <a:t>📝 Points clés à retenir</a:t>
+            </a:r>
+          </a:p>
+        </p:txBody>
+      </p:sp>
+      <p:sp>
+        <p:nvSpPr>
+          <p:cNvPr id="3" name="TextBox 2"/>
+          <p:cNvSpPr txBox="1"/>
+          <p:nvPr/>
+        </p:nvSpPr>
+        <p:spPr>
+          <a:xfrm>
+            <a:off x="548640" y="1828800"/>
+            <a:ext cx="7772400" cy="4572000"/>
+          </a:xfrm>
+          <a:prstGeom prst="rect">
+            <a:avLst/>
+          </a:prstGeom>
+          <a:noFill/>
+        </p:spPr>
+        <p:txBody>
+          <a:bodyPr wrap="square">
+            <a:spAutoFit/>
+          </a:bodyPr>
+          <a:lstStyle/>
+          <a:p>
+            <a:pPr>
+              <a:spcAft>
+                <a:spcPts val="600"/>
+              </a:spcAft>
+              <a:defRPr sz="1600">
+                <a:solidFill>
+                  <a:srgbClr val="222222"/>
+                </a:solidFill>
+              </a:defRPr>
+            </a:pPr>
+            <a:r>
+              <a:t>• Public visé :Étudiants Master 2 DLE inscrits au mémoire — parcours TICE et recherche numérique en didactique des langues.</a:t>
+            </a:r>
+          </a:p>
+          <a:p>
+            <a:pPr>
+              <a:spcAft>
+                <a:spcPts val="600"/>
+              </a:spcAft>
+              <a:defRPr sz="1600">
+                <a:solidFill>
+                  <a:srgbClr val="222222"/>
+                </a:solidFill>
+              </a:defRPr>
+            </a:pPr>
+            <a:r>
+              <a:t>• Savoirs :- Comprendre l'infrastructure informatique nécessaire à la recherche en DLE (serveurs, bases de données, cloud computing)</a:t>
+            </a:r>
+            <a:br/>
+            <a:r>
+              <a:t>- Connaître les outils de linguistique de corpus pour l'analyse de productions langagières</a:t>
+            </a:r>
+            <a:br/>
+            <a:r>
+              <a:t>- Maîtriser les concepts fondamentaux du TAL (Traitement Automatique des Langues) appliqués à la didactique</a:t>
+            </a:r>
+            <a:br/>
+            <a:r>
+              <a:t>- Situer l'IA et l'apprentissage automatique dans le champ du CALL (ICALL)</a:t>
+            </a:r>
+          </a:p>
+          <a:p>
+            <a:pPr>
+              <a:spcAft>
+                <a:spcPts val="600"/>
+              </a:spcAft>
+              <a:defRPr sz="1600">
+                <a:solidFill>
+                  <a:srgbClr val="222222"/>
+                </a:solidFill>
+              </a:defRPr>
+            </a:pPr>
+            <a:r>
+              <a:t>• Baker, P. (2006).Using Corpora in Discourse Analysis. Continuum.</a:t>
+            </a:r>
+          </a:p>
+          <a:p>
+            <a:pPr>
+              <a:spcAft>
+                <a:spcPts val="600"/>
+              </a:spcAft>
+              <a:defRPr sz="1600">
+                <a:solidFill>
+                  <a:srgbClr val="222222"/>
+                </a:solidFill>
+              </a:defRPr>
+            </a:pPr>
+            <a:r>
+              <a:t>• Le développement de l'informatique pour la recherche en sciences du langage et en didactique s'inscrit dans plusieurs cadres :</a:t>
+            </a:r>
+          </a:p>
+          <a:p>
+            <a:pPr>
+              <a:spcAft>
+                <a:spcPts val="600"/>
+              </a:spcAft>
+              <a:defRPr sz="1600">
+                <a:solidFill>
+                  <a:srgbClr val="222222"/>
+                </a:solidFill>
+              </a:defRPr>
+            </a:pPr>
+            <a:r>
+              <a:t>• Introduction : Pourquoi l'informatique pour la recherche en DLE ?</a:t>
             </a:r>
           </a:p>
         </p:txBody>
@@ -4026,15 +3953,20 @@
   <p:clrMapOvr>
     <a:masterClrMapping/>
   </p:clrMapOvr>
-  <p:transition spd="med">
-    <p:fade/>
-  </p:transition>
 </p:sld>
 </file>
 
-<file path=ppt/slides/slide5.xml><?xml version="1.0" encoding="utf-8"?>
+<file path=ppt/slides/slide14.xml><?xml version="1.0" encoding="utf-8"?>
 <p:sld xmlns:a="http://schemas.openxmlformats.org/drawingml/2006/main" xmlns:p="http://schemas.openxmlformats.org/presentationml/2006/main" xmlns:r="http://schemas.openxmlformats.org/officeDocument/2006/relationships">
   <p:cSld>
+    <p:bg>
+      <p:bgPr>
+        <a:solidFill>
+          <a:srgbClr val="FFFFFF"/>
+        </a:solidFill>
+        <a:effectLst/>
+      </p:bgPr>
+    </p:bg>
     <p:spTree>
       <p:nvGrpSpPr>
         <p:cNvPr id="1" name=""/>
@@ -4044,83 +3976,14 @@
       <p:grpSpPr/>
       <p:sp>
         <p:nvSpPr>
-          <p:cNvPr id="2" name="Title 1"/>
-          <p:cNvSpPr>
-            <a:spLocks noGrp="1"/>
-          </p:cNvSpPr>
-          <p:nvPr>
-            <p:ph type="title"/>
-          </p:nvPr>
-        </p:nvSpPr>
-        <p:spPr/>
-        <p:txBody>
-          <a:bodyPr/>
-          <a:lstStyle/>
-          <a:p>
-            <a:r>
-              <a:t>Modèle de von Neumann</a:t>
-            </a:r>
-          </a:p>
-        </p:txBody>
-      </p:sp>
-      <p:sp>
-        <p:nvSpPr>
-          <p:cNvPr id="3" name="Content Placeholder 2"/>
-          <p:cNvSpPr>
-            <a:spLocks noGrp="1"/>
-          </p:cNvSpPr>
-          <p:nvPr>
-            <p:ph idx="1"/>
-          </p:nvPr>
-        </p:nvSpPr>
-        <p:spPr/>
-        <p:txBody>
-          <a:bodyPr/>
-          <a:lstStyle/>
-          <a:p>
-            <a:pPr>
-              <a:defRPr sz="2000"/>
-            </a:pPr>
-            <a:r>
-              <a:t>📖 Entrée → Traitement</a:t>
-            </a:r>
-          </a:p>
-          <a:p>
-            <a:pPr>
-              <a:defRPr sz="2000"/>
-            </a:pPr>
-            <a:r>
-              <a:t>📖 RAM volatile</a:t>
-            </a:r>
-          </a:p>
-          <a:p>
-            <a:pPr>
-              <a:defRPr sz="2000"/>
-            </a:pPr>
-            <a:r>
-              <a:t>📖 Sortie → Stockage</a:t>
-            </a:r>
-          </a:p>
-          <a:p>
-            <a:pPr>
-              <a:defRPr sz="2000"/>
-            </a:pPr>
-            <a:r>
-              <a:t>📖 Schéma fonctionnel</a:t>
-            </a:r>
-          </a:p>
-        </p:txBody>
-      </p:sp>
-      <p:sp>
-        <p:nvSpPr>
-          <p:cNvPr id="4" name="TextBox 3"/>
+          <p:cNvPr id="2" name="TextBox 1"/>
           <p:cNvSpPr txBox="1"/>
           <p:nvPr/>
         </p:nvSpPr>
         <p:spPr>
           <a:xfrm>
-            <a:off x="365760" y="6446520"/>
-            <a:ext cx="8412480" cy="320040"/>
+            <a:off x="548640" y="365760"/>
+            <a:ext cx="7772400" cy="640080"/>
           </a:xfrm>
           <a:prstGeom prst="rect">
             <a:avLst/>
@@ -4128,20 +3991,118 @@
           <a:noFill/>
         </p:spPr>
         <p:txBody>
-          <a:bodyPr wrap="none">
+          <a:bodyPr wrap="square">
             <a:spAutoFit/>
           </a:bodyPr>
           <a:lstStyle/>
           <a:p>
             <a:pPr algn="ctr">
-              <a:defRPr sz="900">
-                <a:solidFill>
-                  <a:srgbClr val="404040"/>
-                </a:solidFill>
-              </a:defRPr>
-            </a:pPr>
-            <a:r>
-              <a:t>Cours TIC 02  •  Diapositive 5/10</a:t>
+              <a:defRPr sz="2600" b="1">
+                <a:solidFill>
+                  <a:srgbClr val="1A5C33"/>
+                </a:solidFill>
+              </a:defRPr>
+            </a:pPr>
+            <a:r>
+              <a:t>✏️ Exercices d'application</a:t>
+            </a:r>
+          </a:p>
+        </p:txBody>
+      </p:sp>
+      <p:sp>
+        <p:nvSpPr>
+          <p:cNvPr id="3" name="TextBox 2"/>
+          <p:cNvSpPr txBox="1"/>
+          <p:nvPr/>
+        </p:nvSpPr>
+        <p:spPr>
+          <a:xfrm>
+            <a:off x="548640" y="1828800"/>
+            <a:ext cx="7772400" cy="4572000"/>
+          </a:xfrm>
+          <a:prstGeom prst="rect">
+            <a:avLst/>
+          </a:prstGeom>
+          <a:noFill/>
+        </p:spPr>
+        <p:txBody>
+          <a:bodyPr wrap="square">
+            <a:spAutoFit/>
+          </a:bodyPr>
+          <a:lstStyle/>
+          <a:p>
+            <a:pPr>
+              <a:spcAft>
+                <a:spcPts val="600"/>
+              </a:spcAft>
+              <a:defRPr sz="1500">
+                <a:solidFill>
+                  <a:srgbClr val="222222"/>
+                </a:solidFill>
+              </a:defRPr>
+            </a:pPr>
+            <a:r>
+              <a:t>• Définir les concepts principaux du cours</a:t>
+            </a:r>
+          </a:p>
+          <a:p>
+            <a:pPr>
+              <a:spcAft>
+                <a:spcPts val="600"/>
+              </a:spcAft>
+              <a:defRPr sz="1500">
+                <a:solidFill>
+                  <a:srgbClr val="222222"/>
+                </a:solidFill>
+              </a:defRPr>
+            </a:pPr>
+            <a:r>
+              <a:t>• Identifier les applications pratiques</a:t>
+            </a:r>
+          </a:p>
+          <a:p>
+            <a:pPr>
+              <a:spcAft>
+                <a:spcPts val="600"/>
+              </a:spcAft>
+              <a:defRPr sz="1500">
+                <a:solidFill>
+                  <a:srgbClr val="222222"/>
+                </a:solidFill>
+              </a:defRPr>
+            </a:pPr>
+            <a:r>
+              <a:t>• Résoudre les exercices du TD</a:t>
+            </a:r>
+          </a:p>
+          <a:p>
+            <a:pPr>
+              <a:spcAft>
+                <a:spcPts val="600"/>
+              </a:spcAft>
+              <a:defRPr sz="1500">
+                <a:solidFill>
+                  <a:srgbClr val="222222"/>
+                </a:solidFill>
+              </a:defRPr>
+            </a:pPr>
+            <a:r>
+              <a:t>• Synthétiser les points clés en un paragraphe</a:t>
+            </a:r>
+          </a:p>
+          <a:p>
+            <a:pPr>
+              <a:spcAft>
+                <a:spcPts val="600"/>
+              </a:spcAft>
+              <a:defRPr sz="1500">
+                <a:solidFill>
+                  <a:srgbClr val="222222"/>
+                </a:solidFill>
+              </a:defRPr>
+            </a:pPr>
+            <a:r>
+              <a:t>• Préparer une courte présentation orale</a:t>
             </a:r>
           </a:p>
         </p:txBody>
@@ -4151,15 +4112,20 @@
   <p:clrMapOvr>
     <a:masterClrMapping/>
   </p:clrMapOvr>
-  <p:transition spd="med">
-    <p:fade/>
-  </p:transition>
 </p:sld>
 </file>
 
-<file path=ppt/slides/slide6.xml><?xml version="1.0" encoding="utf-8"?>
+<file path=ppt/slides/slide15.xml><?xml version="1.0" encoding="utf-8"?>
 <p:sld xmlns:a="http://schemas.openxmlformats.org/drawingml/2006/main" xmlns:p="http://schemas.openxmlformats.org/presentationml/2006/main" xmlns:r="http://schemas.openxmlformats.org/officeDocument/2006/relationships">
   <p:cSld>
+    <p:bg>
+      <p:bgPr>
+        <a:solidFill>
+          <a:srgbClr val="1A5C33"/>
+        </a:solidFill>
+        <a:effectLst/>
+      </p:bgPr>
+    </p:bg>
     <p:spTree>
       <p:nvGrpSpPr>
         <p:cNvPr id="1" name=""/>
@@ -4169,83 +4135,14 @@
       <p:grpSpPr/>
       <p:sp>
         <p:nvSpPr>
-          <p:cNvPr id="2" name="Title 1"/>
-          <p:cNvSpPr>
-            <a:spLocks noGrp="1"/>
-          </p:cNvSpPr>
-          <p:nvPr>
-            <p:ph type="title"/>
-          </p:nvPr>
-        </p:nvSpPr>
-        <p:spPr/>
-        <p:txBody>
-          <a:bodyPr/>
-          <a:lstStyle/>
-          <a:p>
-            <a:r>
-              <a:t>Composants Hardware</a:t>
-            </a:r>
-          </a:p>
-        </p:txBody>
-      </p:sp>
-      <p:sp>
-        <p:nvSpPr>
-          <p:cNvPr id="3" name="Content Placeholder 2"/>
-          <p:cNvSpPr>
-            <a:spLocks noGrp="1"/>
-          </p:cNvSpPr>
-          <p:nvPr>
-            <p:ph idx="1"/>
-          </p:nvPr>
-        </p:nvSpPr>
-        <p:spPr/>
-        <p:txBody>
-          <a:bodyPr/>
-          <a:lstStyle/>
-          <a:p>
-            <a:pPr>
-              <a:defRPr sz="2000"/>
-            </a:pPr>
-            <a:r>
-              <a:t>🖥️ CPU, carte mère, RAM</a:t>
-            </a:r>
-          </a:p>
-          <a:p>
-            <a:pPr>
-              <a:defRPr sz="2000"/>
-            </a:pPr>
-            <a:r>
-              <a:t>🖥️ SSD / HDD</a:t>
-            </a:r>
-          </a:p>
-          <a:p>
-            <a:pPr>
-              <a:defRPr sz="2000"/>
-            </a:pPr>
-            <a:r>
-              <a:t>🖥️ Périphériques entrée/sortie</a:t>
-            </a:r>
-          </a:p>
-          <a:p>
-            <a:pPr>
-              <a:defRPr sz="2000"/>
-            </a:pPr>
-            <a:r>
-              <a:t>🖥️ Schéma PC</a:t>
-            </a:r>
-          </a:p>
-        </p:txBody>
-      </p:sp>
-      <p:sp>
-        <p:nvSpPr>
-          <p:cNvPr id="4" name="TextBox 3"/>
+          <p:cNvPr id="2" name="TextBox 1"/>
           <p:cNvSpPr txBox="1"/>
           <p:nvPr/>
         </p:nvSpPr>
         <p:spPr>
           <a:xfrm>
-            <a:off x="365760" y="6446520"/>
-            <a:ext cx="8412480" cy="320040"/>
+            <a:off x="731520" y="1371600"/>
+            <a:ext cx="7680960" cy="914400"/>
           </a:xfrm>
           <a:prstGeom prst="rect">
             <a:avLst/>
@@ -4253,20 +4150,67 @@
           <a:noFill/>
         </p:spPr>
         <p:txBody>
-          <a:bodyPr wrap="none">
+          <a:bodyPr wrap="square">
             <a:spAutoFit/>
           </a:bodyPr>
           <a:lstStyle/>
           <a:p>
             <a:pPr algn="ctr">
-              <a:defRPr sz="900">
-                <a:solidFill>
-                  <a:srgbClr val="404040"/>
-                </a:solidFill>
-              </a:defRPr>
-            </a:pPr>
-            <a:r>
-              <a:t>Cours TIC 02  •  Diapositive 6/10</a:t>
+              <a:defRPr sz="2800" b="1">
+                <a:solidFill>
+                  <a:srgbClr val="FFFFFF"/>
+                </a:solidFill>
+              </a:defRPr>
+            </a:pPr>
+            <a:r>
+              <a:t>🎓 Conclusion</a:t>
+            </a:r>
+          </a:p>
+        </p:txBody>
+      </p:sp>
+      <p:sp>
+        <p:nvSpPr>
+          <p:cNvPr id="3" name="TextBox 2"/>
+          <p:cNvSpPr txBox="1"/>
+          <p:nvPr/>
+        </p:nvSpPr>
+        <p:spPr>
+          <a:xfrm>
+            <a:off x="731520" y="2743200"/>
+            <a:ext cx="7680960" cy="1828800"/>
+          </a:xfrm>
+          <a:prstGeom prst="rect">
+            <a:avLst/>
+          </a:prstGeom>
+          <a:noFill/>
+        </p:spPr>
+        <p:txBody>
+          <a:bodyPr wrap="square">
+            <a:spAutoFit/>
+          </a:bodyPr>
+          <a:lstStyle/>
+          <a:p>
+            <a:pPr algn="ctr">
+              <a:defRPr sz="1800" b="0">
+                <a:solidFill>
+                  <a:srgbClr val="C5D9C7"/>
+                </a:solidFill>
+              </a:defRPr>
+            </a:pPr>
+            <a:r>
+              <a:t>Dr. BELACEL Madani</a:t>
+            </a:r>
+            <a:br/>
+            <a:r>
+              <a:t>Maître de Conférences B</a:t>
+            </a:r>
+            <a:br/>
+            <a:r>
+              <a:t>Université de Mostaganem</a:t>
+            </a:r>
+            <a:br/>
+            <a:r>
+              <a:t>madani.belacel@univ-mosta.dz</a:t>
             </a:r>
           </a:p>
         </p:txBody>
@@ -4276,15 +4220,20 @@
   <p:clrMapOvr>
     <a:masterClrMapping/>
   </p:clrMapOvr>
-  <p:transition spd="med">
-    <p:fade/>
-  </p:transition>
 </p:sld>
 </file>
 
-<file path=ppt/slides/slide7.xml><?xml version="1.0" encoding="utf-8"?>
+<file path=ppt/slides/slide2.xml><?xml version="1.0" encoding="utf-8"?>
 <p:sld xmlns:a="http://schemas.openxmlformats.org/drawingml/2006/main" xmlns:p="http://schemas.openxmlformats.org/presentationml/2006/main" xmlns:r="http://schemas.openxmlformats.org/officeDocument/2006/relationships">
   <p:cSld>
+    <p:bg>
+      <p:bgPr>
+        <a:solidFill>
+          <a:srgbClr val="FFFFFF"/>
+        </a:solidFill>
+        <a:effectLst/>
+      </p:bgPr>
+    </p:bg>
     <p:spTree>
       <p:nvGrpSpPr>
         <p:cNvPr id="1" name=""/>
@@ -4294,83 +4243,14 @@
       <p:grpSpPr/>
       <p:sp>
         <p:nvSpPr>
-          <p:cNvPr id="2" name="Title 1"/>
-          <p:cNvSpPr>
-            <a:spLocks noGrp="1"/>
-          </p:cNvSpPr>
-          <p:nvPr>
-            <p:ph type="title"/>
-          </p:nvPr>
-        </p:nvSpPr>
-        <p:spPr/>
-        <p:txBody>
-          <a:bodyPr/>
-          <a:lstStyle/>
-          <a:p>
-            <a:r>
-              <a:t>Logiciels et OS</a:t>
-            </a:r>
-          </a:p>
-        </p:txBody>
-      </p:sp>
-      <p:sp>
-        <p:nvSpPr>
-          <p:cNvPr id="3" name="Content Placeholder 2"/>
-          <p:cNvSpPr>
-            <a:spLocks noGrp="1"/>
-          </p:cNvSpPr>
-          <p:nvPr>
-            <p:ph idx="1"/>
-          </p:nvPr>
-        </p:nvSpPr>
-        <p:spPr/>
-        <p:txBody>
-          <a:bodyPr/>
-          <a:lstStyle/>
-          <a:p>
-            <a:pPr>
-              <a:defRPr sz="2000"/>
-            </a:pPr>
-            <a:r>
-              <a:t>💾 Windows, Linux, macOS</a:t>
-            </a:r>
-          </a:p>
-          <a:p>
-            <a:pPr>
-              <a:defRPr sz="2000"/>
-            </a:pPr>
-            <a:r>
-              <a:t>💾 Applications bureautiques</a:t>
-            </a:r>
-          </a:p>
-          <a:p>
-            <a:pPr>
-              <a:defRPr sz="2000"/>
-            </a:pPr>
-            <a:r>
-              <a:t>💾 Utilitaires</a:t>
-            </a:r>
-          </a:p>
-          <a:p>
-            <a:pPr>
-              <a:defRPr sz="2000"/>
-            </a:pPr>
-            <a:r>
-              <a:t>💾 Hardware vs Software</a:t>
-            </a:r>
-          </a:p>
-        </p:txBody>
-      </p:sp>
-      <p:sp>
-        <p:nvSpPr>
-          <p:cNvPr id="4" name="TextBox 3"/>
+          <p:cNvPr id="2" name="TextBox 1"/>
           <p:cNvSpPr txBox="1"/>
           <p:nvPr/>
         </p:nvSpPr>
         <p:spPr>
           <a:xfrm>
-            <a:off x="365760" y="6446520"/>
-            <a:ext cx="8412480" cy="320040"/>
+            <a:off x="548640" y="365760"/>
+            <a:ext cx="7772400" cy="640080"/>
           </a:xfrm>
           <a:prstGeom prst="rect">
             <a:avLst/>
@@ -4378,20 +4258,151 @@
           <a:noFill/>
         </p:spPr>
         <p:txBody>
-          <a:bodyPr wrap="none">
+          <a:bodyPr wrap="square">
             <a:spAutoFit/>
           </a:bodyPr>
           <a:lstStyle/>
           <a:p>
-            <a:pPr algn="ctr">
-              <a:defRPr sz="900">
-                <a:solidFill>
-                  <a:srgbClr val="404040"/>
-                </a:solidFill>
-              </a:defRPr>
-            </a:pPr>
-            <a:r>
-              <a:t>Cours TIC 02  •  Diapositive 7/10</a:t>
+            <a:pPr algn="l">
+              <a:defRPr sz="2600" b="1">
+                <a:solidFill>
+                  <a:srgbClr val="1A5C33"/>
+                </a:solidFill>
+              </a:defRPr>
+            </a:pPr>
+            <a:r>
+              <a:t>🎯 Objectifs pédagogiques</a:t>
+            </a:r>
+          </a:p>
+        </p:txBody>
+      </p:sp>
+      <p:sp>
+        <p:nvSpPr>
+          <p:cNvPr id="3" name="TextBox 2"/>
+          <p:cNvSpPr txBox="1"/>
+          <p:nvPr/>
+        </p:nvSpPr>
+        <p:spPr>
+          <a:xfrm>
+            <a:off x="548640" y="1828800"/>
+            <a:ext cx="7772400" cy="4572000"/>
+          </a:xfrm>
+          <a:prstGeom prst="rect">
+            <a:avLst/>
+          </a:prstGeom>
+          <a:noFill/>
+        </p:spPr>
+        <p:txBody>
+          <a:bodyPr wrap="square">
+            <a:spAutoFit/>
+          </a:bodyPr>
+          <a:lstStyle/>
+          <a:p>
+            <a:pPr>
+              <a:spcAft>
+                <a:spcPts val="600"/>
+              </a:spcAft>
+              <a:defRPr sz="1500">
+                <a:solidFill>
+                  <a:srgbClr val="222222"/>
+                </a:solidFill>
+              </a:defRPr>
+            </a:pPr>
+            <a:r>
+              <a:t>• Savoirs :- Comprendre l'infrastructure informatique nécessaire à la recherche en DLE (serveurs, bases de données, cloud computing)</a:t>
+            </a:r>
+            <a:br/>
+            <a:r>
+              <a:t>- Connaître les outils de linguistique de corpus pour l'analyse de productions langagières</a:t>
+            </a:r>
+            <a:br/>
+            <a:r>
+              <a:t>- Maîtriser les concepts fondamentaux du TAL (Traitement Automatique des Langues) appliqués à la didactique</a:t>
+            </a:r>
+            <a:br/>
+            <a:r>
+              <a:t>- Situer l'IA et l'apprentissage automatique dans le champ du CALL (ICALL)</a:t>
+            </a:r>
+          </a:p>
+          <a:p>
+            <a:pPr>
+              <a:spcAft>
+                <a:spcPts val="600"/>
+              </a:spcAft>
+              <a:defRPr sz="1500">
+                <a:solidFill>
+                  <a:srgbClr val="222222"/>
+                </a:solidFill>
+              </a:defRPr>
+            </a:pPr>
+            <a:r>
+              <a:t>• Savoir-faire :- Utiliser des outils d'annotation et d'analyse de corpus (AntConc, TXM, TreeTagger)</a:t>
+            </a:r>
+            <a:br/>
+            <a:r>
+              <a:t>- Exploiter des APIs de TAL (Python NLTK, spaCy) pour l'analyse linguistique</a:t>
+            </a:r>
+            <a:br/>
+            <a:r>
+              <a:t>- Concevoir un protocole de collecte et de traitement de données numériques pour la recherche</a:t>
+            </a:r>
+            <a:br/>
+            <a:r>
+              <a:t>- Appliquer des méthodes de recherche numérique (web scraping, analyse de réseaux, textométrie)</a:t>
+            </a:r>
+            <a:br/>
+            <a:r>
+              <a:t>- Rédiger une section méthodologique pour le mémoire décrivant les outils computationnels employés</a:t>
+            </a:r>
+          </a:p>
+          <a:p>
+            <a:pPr>
+              <a:spcAft>
+                <a:spcPts val="600"/>
+              </a:spcAft>
+              <a:defRPr sz="1500">
+                <a:solidFill>
+                  <a:srgbClr val="222222"/>
+                </a:solidFill>
+              </a:defRPr>
+            </a:pPr>
+            <a:r>
+              <a:t>• Savoir-être :- Adopter une approche critique des outils computationnels — comprendre leurs limites et biais</a:t>
+            </a:r>
+            <a:br/>
+            <a:r>
+              <a:t>- Respecter les principes éthiques dans le traitement numérique des données langagières</a:t>
+            </a:r>
+            <a:br/>
+            <a:r>
+              <a:t>- Développer une culture interdisciplinaire (didactique, linguistique, informatique)</a:t>
+            </a:r>
+          </a:p>
+          <a:p>
+            <a:pPr>
+              <a:spcAft>
+                <a:spcPts val="600"/>
+              </a:spcAft>
+              <a:defRPr sz="1500">
+                <a:solidFill>
+                  <a:srgbClr val="222222"/>
+                </a:solidFill>
+              </a:defRPr>
+            </a:pPr>
+            <a:r>
+              <a:t>• Mode d'évaluation :- Projet d'analyse de corpus (compte rendu méthodologique) : 40 %</a:t>
+            </a:r>
+            <a:br/>
+            <a:r>
+              <a:t>- Présentation orale d'un outil TAL pour la DLE : 30 %</a:t>
+            </a:r>
+            <a:br/>
+            <a:r>
+              <a:t>- QCM de validation : 20 %</a:t>
+            </a:r>
+            <a:br/>
+            <a:r>
+              <a:t>- Participation active : 10 %</a:t>
             </a:r>
           </a:p>
         </p:txBody>
@@ -4401,15 +4412,20 @@
   <p:clrMapOvr>
     <a:masterClrMapping/>
   </p:clrMapOvr>
-  <p:transition spd="med">
-    <p:fade/>
-  </p:transition>
 </p:sld>
 </file>
 
-<file path=ppt/slides/slide8.xml><?xml version="1.0" encoding="utf-8"?>
+<file path=ppt/slides/slide3.xml><?xml version="1.0" encoding="utf-8"?>
 <p:sld xmlns:a="http://schemas.openxmlformats.org/drawingml/2006/main" xmlns:p="http://schemas.openxmlformats.org/presentationml/2006/main" xmlns:r="http://schemas.openxmlformats.org/officeDocument/2006/relationships">
   <p:cSld>
+    <p:bg>
+      <p:bgPr>
+        <a:solidFill>
+          <a:srgbClr val="FFFFFF"/>
+        </a:solidFill>
+        <a:effectLst/>
+      </p:bgPr>
+    </p:bg>
     <p:spTree>
       <p:nvGrpSpPr>
         <p:cNvPr id="1" name=""/>
@@ -4419,83 +4435,14 @@
       <p:grpSpPr/>
       <p:sp>
         <p:nvSpPr>
-          <p:cNvPr id="2" name="Title 1"/>
-          <p:cNvSpPr>
-            <a:spLocks noGrp="1"/>
-          </p:cNvSpPr>
-          <p:nvPr>
-            <p:ph type="title"/>
-          </p:nvPr>
-        </p:nvSpPr>
-        <p:spPr/>
-        <p:txBody>
-          <a:bodyPr/>
-          <a:lstStyle/>
-          <a:p>
-            <a:r>
-              <a:t>Interaction HW / SW</a:t>
-            </a:r>
-          </a:p>
-        </p:txBody>
-      </p:sp>
-      <p:sp>
-        <p:nvSpPr>
-          <p:cNvPr id="3" name="Content Placeholder 2"/>
-          <p:cNvSpPr>
-            <a:spLocks noGrp="1"/>
-          </p:cNvSpPr>
-          <p:nvPr>
-            <p:ph idx="1"/>
-          </p:nvPr>
-        </p:nvSpPr>
-        <p:spPr/>
-        <p:txBody>
-          <a:bodyPr/>
-          <a:lstStyle/>
-          <a:p>
-            <a:pPr>
-              <a:defRPr sz="2000"/>
-            </a:pPr>
-            <a:r>
-              <a:t>⚙️ Exemple frappe clavier</a:t>
-            </a:r>
-          </a:p>
-          <a:p>
-            <a:pPr>
-              <a:defRPr sz="2000"/>
-            </a:pPr>
-            <a:r>
-              <a:t>⚙️ OS intermédiaire</a:t>
-            </a:r>
-          </a:p>
-          <a:p>
-            <a:pPr>
-              <a:defRPr sz="2000"/>
-            </a:pPr>
-            <a:r>
-              <a:t>⚙️ Interdépendance</a:t>
-            </a:r>
-          </a:p>
-          <a:p>
-            <a:pPr>
-              <a:defRPr sz="2000"/>
-            </a:pPr>
-            <a:r>
-              <a:t>⚙️ Dépannage simple</a:t>
-            </a:r>
-          </a:p>
-        </p:txBody>
-      </p:sp>
-      <p:sp>
-        <p:nvSpPr>
-          <p:cNvPr id="4" name="TextBox 3"/>
+          <p:cNvPr id="2" name="TextBox 1"/>
           <p:cNvSpPr txBox="1"/>
           <p:nvPr/>
         </p:nvSpPr>
         <p:spPr>
           <a:xfrm>
-            <a:off x="365760" y="6446520"/>
-            <a:ext cx="8412480" cy="320040"/>
+            <a:off x="548640" y="365760"/>
+            <a:ext cx="7772400" cy="640080"/>
           </a:xfrm>
           <a:prstGeom prst="rect">
             <a:avLst/>
@@ -4503,20 +4450,193 @@
           <a:noFill/>
         </p:spPr>
         <p:txBody>
-          <a:bodyPr wrap="none">
+          <a:bodyPr wrap="square">
             <a:spAutoFit/>
           </a:bodyPr>
           <a:lstStyle/>
           <a:p>
-            <a:pPr algn="ctr">
-              <a:defRPr sz="900">
-                <a:solidFill>
-                  <a:srgbClr val="404040"/>
-                </a:solidFill>
-              </a:defRPr>
-            </a:pPr>
-            <a:r>
-              <a:t>Cours TIC 02  •  Diapositive 8/10</a:t>
+            <a:pPr algn="l">
+              <a:defRPr sz="2600" b="1">
+                <a:solidFill>
+                  <a:srgbClr val="1A5C33"/>
+                </a:solidFill>
+              </a:defRPr>
+            </a:pPr>
+            <a:r>
+              <a:t>📋 Plan du cours</a:t>
+            </a:r>
+          </a:p>
+        </p:txBody>
+      </p:sp>
+      <p:sp>
+        <p:nvSpPr>
+          <p:cNvPr id="3" name="TextBox 2"/>
+          <p:cNvSpPr txBox="1"/>
+          <p:nvPr/>
+        </p:nvSpPr>
+        <p:spPr>
+          <a:xfrm>
+            <a:off x="548640" y="1828800"/>
+            <a:ext cx="7772400" cy="4572000"/>
+          </a:xfrm>
+          <a:prstGeom prst="rect">
+            <a:avLst/>
+          </a:prstGeom>
+          <a:noFill/>
+        </p:spPr>
+        <p:txBody>
+          <a:bodyPr wrap="square">
+            <a:spAutoFit/>
+          </a:bodyPr>
+          <a:lstStyle/>
+          <a:p>
+            <a:pPr>
+              <a:spcAft>
+                <a:spcPts val="600"/>
+              </a:spcAft>
+              <a:defRPr sz="1600">
+                <a:solidFill>
+                  <a:srgbClr val="222222"/>
+                </a:solidFill>
+              </a:defRPr>
+            </a:pPr>
+            <a:r>
+              <a:t>• Fiche cours — Plateforme e-learning (Moodle)</a:t>
+            </a:r>
+          </a:p>
+          <a:p>
+            <a:pPr>
+              <a:spcAft>
+                <a:spcPts val="600"/>
+              </a:spcAft>
+              <a:defRPr sz="1600">
+                <a:solidFill>
+                  <a:srgbClr val="222222"/>
+                </a:solidFill>
+              </a:defRPr>
+            </a:pPr>
+            <a:r>
+              <a:t>• Objectifs de l'enseignement</a:t>
+            </a:r>
+          </a:p>
+          <a:p>
+            <a:pPr>
+              <a:spcAft>
+                <a:spcPts val="600"/>
+              </a:spcAft>
+              <a:defRPr sz="1600">
+                <a:solidFill>
+                  <a:srgbClr val="222222"/>
+                </a:solidFill>
+              </a:defRPr>
+            </a:pPr>
+            <a:r>
+              <a:t>• Références bibliographiques principales</a:t>
+            </a:r>
+          </a:p>
+          <a:p>
+            <a:pPr>
+              <a:spcAft>
+                <a:spcPts val="600"/>
+              </a:spcAft>
+              <a:defRPr sz="1600">
+                <a:solidFill>
+                  <a:srgbClr val="222222"/>
+                </a:solidFill>
+              </a:defRPr>
+            </a:pPr>
+            <a:r>
+              <a:t>• Contexte réglementaire algérien</a:t>
+            </a:r>
+          </a:p>
+          <a:p>
+            <a:pPr>
+              <a:spcAft>
+                <a:spcPts val="600"/>
+              </a:spcAft>
+              <a:defRPr sz="1600">
+                <a:solidFill>
+                  <a:srgbClr val="222222"/>
+                </a:solidFill>
+              </a:defRPr>
+            </a:pPr>
+            <a:r>
+              <a:t>• Plan du Cours</a:t>
+            </a:r>
+          </a:p>
+          <a:p>
+            <a:pPr>
+              <a:spcAft>
+                <a:spcPts val="600"/>
+              </a:spcAft>
+              <a:defRPr sz="1600">
+                <a:solidFill>
+                  <a:srgbClr val="222222"/>
+                </a:solidFill>
+              </a:defRPr>
+            </a:pPr>
+            <a:r>
+              <a:t>• 1.1 Le tournant numérique en didactique des langues</a:t>
+            </a:r>
+          </a:p>
+          <a:p>
+            <a:pPr>
+              <a:spcAft>
+                <a:spcPts val="600"/>
+              </a:spcAft>
+              <a:defRPr sz="1600">
+                <a:solidFill>
+                  <a:srgbClr val="222222"/>
+                </a:solidFill>
+              </a:defRPr>
+            </a:pPr>
+            <a:r>
+              <a:t>• 2.2 Outils numériques pour le chercheur en DLE</a:t>
+            </a:r>
+          </a:p>
+          <a:p>
+            <a:pPr>
+              <a:spcAft>
+                <a:spcPts val="600"/>
+              </a:spcAft>
+              <a:defRPr sz="1600">
+                <a:solidFill>
+                  <a:srgbClr val="222222"/>
+                </a:solidFill>
+              </a:defRPr>
+            </a:pPr>
+            <a:r>
+              <a:t>• 2.3 Infrastructure disponible en Algérie</a:t>
+            </a:r>
+          </a:p>
+          <a:p>
+            <a:pPr>
+              <a:spcAft>
+                <a:spcPts val="600"/>
+              </a:spcAft>
+              <a:defRPr sz="1600">
+                <a:solidFill>
+                  <a:srgbClr val="222222"/>
+                </a:solidFill>
+              </a:defRPr>
+            </a:pPr>
+            <a:r>
+              <a:t>• 3.1 Définition et intérêt pour la DLE</a:t>
+            </a:r>
+          </a:p>
+          <a:p>
+            <a:pPr>
+              <a:spcAft>
+                <a:spcPts val="600"/>
+              </a:spcAft>
+              <a:defRPr sz="1600">
+                <a:solidFill>
+                  <a:srgbClr val="222222"/>
+                </a:solidFill>
+              </a:defRPr>
+            </a:pPr>
+            <a:r>
+              <a:t>• 3.3 Méthodologie d'analyse de corpus pour le mémoire M2</a:t>
             </a:r>
           </a:p>
         </p:txBody>
@@ -4526,15 +4646,20 @@
   <p:clrMapOvr>
     <a:masterClrMapping/>
   </p:clrMapOvr>
-  <p:transition spd="med">
-    <p:fade/>
-  </p:transition>
 </p:sld>
 </file>
 
-<file path=ppt/slides/slide9.xml><?xml version="1.0" encoding="utf-8"?>
+<file path=ppt/slides/slide4.xml><?xml version="1.0" encoding="utf-8"?>
 <p:sld xmlns:a="http://schemas.openxmlformats.org/drawingml/2006/main" xmlns:p="http://schemas.openxmlformats.org/presentationml/2006/main" xmlns:r="http://schemas.openxmlformats.org/officeDocument/2006/relationships">
   <p:cSld>
+    <p:bg>
+      <p:bgPr>
+        <a:solidFill>
+          <a:srgbClr val="FFFFFF"/>
+        </a:solidFill>
+        <a:effectLst/>
+      </p:bgPr>
+    </p:bg>
     <p:spTree>
       <p:nvGrpSpPr>
         <p:cNvPr id="1" name=""/>
@@ -4544,83 +4669,57 @@
       <p:grpSpPr/>
       <p:sp>
         <p:nvSpPr>
-          <p:cNvPr id="2" name="Title 1"/>
-          <p:cNvSpPr>
-            <a:spLocks noGrp="1"/>
-          </p:cNvSpPr>
-          <p:nvPr>
-            <p:ph type="title"/>
-          </p:nvPr>
-        </p:nvSpPr>
-        <p:spPr/>
-        <p:txBody>
-          <a:bodyPr/>
-          <a:lstStyle/>
-          <a:p>
-            <a:r>
-              <a:t>Bonnes pratiques</a:t>
-            </a:r>
-          </a:p>
-        </p:txBody>
-      </p:sp>
-      <p:sp>
-        <p:nvSpPr>
-          <p:cNvPr id="3" name="Content Placeholder 2"/>
-          <p:cNvSpPr>
-            <a:spLocks noGrp="1"/>
-          </p:cNvSpPr>
-          <p:nvPr>
-            <p:ph idx="1"/>
-          </p:nvPr>
-        </p:nvSpPr>
-        <p:spPr/>
-        <p:txBody>
-          <a:bodyPr/>
-          <a:lstStyle/>
-          <a:p>
-            <a:pPr>
-              <a:defRPr sz="2000"/>
-            </a:pPr>
-            <a:r>
-              <a:t>✔️ Ctrl+S + Cloud</a:t>
-            </a:r>
-          </a:p>
-          <a:p>
-            <a:pPr>
-              <a:defRPr sz="2000"/>
-            </a:pPr>
-            <a:r>
-              <a:t>✔️ Organisation dossiers</a:t>
-            </a:r>
-          </a:p>
-          <a:p>
-            <a:pPr>
-              <a:defRPr sz="2000"/>
-            </a:pPr>
-            <a:r>
-              <a:t>✔️ Mises à jour</a:t>
-            </a:r>
-          </a:p>
-          <a:p>
-            <a:pPr>
-              <a:defRPr sz="2000"/>
-            </a:pPr>
-            <a:r>
-              <a:t>✔️ Antivirus actif</a:t>
-            </a:r>
-          </a:p>
-        </p:txBody>
-      </p:sp>
-      <p:sp>
-        <p:nvSpPr>
-          <p:cNvPr id="4" name="TextBox 3"/>
+          <p:cNvPr id="2" name="Rectangle 1"/>
+          <p:cNvSpPr/>
+          <p:nvPr/>
+        </p:nvSpPr>
+        <p:spPr>
+          <a:xfrm>
+            <a:off x="0" y="0"/>
+            <a:ext cx="109728" cy="6858000"/>
+          </a:xfrm>
+          <a:prstGeom prst="rect">
+            <a:avLst/>
+          </a:prstGeom>
+          <a:solidFill>
+            <a:srgbClr val="2C6E49"/>
+          </a:solidFill>
+          <a:ln>
+            <a:noFill/>
+          </a:ln>
+        </p:spPr>
+        <p:style>
+          <a:lnRef idx="1">
+            <a:schemeClr val="accent1"/>
+          </a:lnRef>
+          <a:fillRef idx="3">
+            <a:schemeClr val="accent1"/>
+          </a:fillRef>
+          <a:effectRef idx="2">
+            <a:schemeClr val="accent1"/>
+          </a:effectRef>
+          <a:fontRef idx="minor">
+            <a:schemeClr val="lt1"/>
+          </a:fontRef>
+        </p:style>
+        <p:txBody>
+          <a:bodyPr rtlCol="0" anchor="ctr"/>
+          <a:lstStyle/>
+          <a:p>
+            <a:pPr algn="ctr"/>
+          </a:p>
+        </p:txBody>
+      </p:sp>
+      <p:sp>
+        <p:nvSpPr>
+          <p:cNvPr id="3" name="TextBox 2"/>
           <p:cNvSpPr txBox="1"/>
           <p:nvPr/>
         </p:nvSpPr>
         <p:spPr>
           <a:xfrm>
-            <a:off x="365760" y="6446520"/>
-            <a:ext cx="8412480" cy="320040"/>
+            <a:off x="457200" y="365760"/>
+            <a:ext cx="8229600" cy="640080"/>
           </a:xfrm>
           <a:prstGeom prst="rect">
             <a:avLst/>
@@ -4628,20 +4727,73 @@
           <a:noFill/>
         </p:spPr>
         <p:txBody>
-          <a:bodyPr wrap="none">
+          <a:bodyPr wrap="square">
             <a:spAutoFit/>
           </a:bodyPr>
           <a:lstStyle/>
           <a:p>
-            <a:pPr algn="ctr">
-              <a:defRPr sz="900">
-                <a:solidFill>
-                  <a:srgbClr val="404040"/>
-                </a:solidFill>
-              </a:defRPr>
-            </a:pPr>
-            <a:r>
-              <a:t>Cours TIC 02  •  Diapositive 9/10</a:t>
+            <a:pPr algn="l">
+              <a:defRPr sz="2200" b="1">
+                <a:solidFill>
+                  <a:srgbClr val="1A5C33"/>
+                </a:solidFill>
+              </a:defRPr>
+            </a:pPr>
+            <a:r>
+              <a:t>Fiche cours — Plateforme e-learning (Moodle)</a:t>
+            </a:r>
+          </a:p>
+        </p:txBody>
+      </p:sp>
+      <p:sp>
+        <p:nvSpPr>
+          <p:cNvPr id="4" name="TextBox 3"/>
+          <p:cNvSpPr txBox="1"/>
+          <p:nvPr/>
+        </p:nvSpPr>
+        <p:spPr>
+          <a:xfrm>
+            <a:off x="457200" y="1371600"/>
+            <a:ext cx="7772400" cy="4572000"/>
+          </a:xfrm>
+          <a:prstGeom prst="rect">
+            <a:avLst/>
+          </a:prstGeom>
+          <a:noFill/>
+        </p:spPr>
+        <p:txBody>
+          <a:bodyPr wrap="square">
+            <a:spAutoFit/>
+          </a:bodyPr>
+          <a:lstStyle/>
+          <a:p>
+            <a:pPr>
+              <a:spcAft>
+                <a:spcPts val="600"/>
+              </a:spcAft>
+              <a:defRPr sz="1400">
+                <a:solidFill>
+                  <a:srgbClr val="222222"/>
+                </a:solidFill>
+              </a:defRPr>
+            </a:pPr>
+            <a:r>
+              <a:t>• Public visé :Étudiants Master 2 DLE inscrits au mémoire — parcours TICE et recherche numérique en didactique des langues.</a:t>
+            </a:r>
+          </a:p>
+          <a:p>
+            <a:pPr>
+              <a:spcAft>
+                <a:spcPts val="600"/>
+              </a:spcAft>
+              <a:defRPr sz="1400">
+                <a:solidFill>
+                  <a:srgbClr val="222222"/>
+                </a:solidFill>
+              </a:defRPr>
+            </a:pPr>
+            <a:r>
+              <a:t>• Prérequis académiques :Cours TIC 01 (Introduction aux TIC) ; notions de base en statistique descriptive ; maîtrise des environnements numériques de travail.</a:t>
             </a:r>
           </a:p>
         </p:txBody>
@@ -4651,9 +4803,1094 @@
   <p:clrMapOvr>
     <a:masterClrMapping/>
   </p:clrMapOvr>
-  <p:transition spd="med">
-    <p:fade/>
-  </p:transition>
+</p:sld>
+</file>
+
+<file path=ppt/slides/slide5.xml><?xml version="1.0" encoding="utf-8"?>
+<p:sld xmlns:a="http://schemas.openxmlformats.org/drawingml/2006/main" xmlns:p="http://schemas.openxmlformats.org/presentationml/2006/main" xmlns:r="http://schemas.openxmlformats.org/officeDocument/2006/relationships">
+  <p:cSld>
+    <p:bg>
+      <p:bgPr>
+        <a:solidFill>
+          <a:srgbClr val="FFFFFF"/>
+        </a:solidFill>
+        <a:effectLst/>
+      </p:bgPr>
+    </p:bg>
+    <p:spTree>
+      <p:nvGrpSpPr>
+        <p:cNvPr id="1" name=""/>
+        <p:cNvGrpSpPr/>
+        <p:nvPr/>
+      </p:nvGrpSpPr>
+      <p:grpSpPr/>
+      <p:sp>
+        <p:nvSpPr>
+          <p:cNvPr id="2" name="Rectangle 1"/>
+          <p:cNvSpPr/>
+          <p:nvPr/>
+        </p:nvSpPr>
+        <p:spPr>
+          <a:xfrm>
+            <a:off x="0" y="0"/>
+            <a:ext cx="109728" cy="6858000"/>
+          </a:xfrm>
+          <a:prstGeom prst="rect">
+            <a:avLst/>
+          </a:prstGeom>
+          <a:solidFill>
+            <a:srgbClr val="2C6E49"/>
+          </a:solidFill>
+          <a:ln>
+            <a:noFill/>
+          </a:ln>
+        </p:spPr>
+        <p:style>
+          <a:lnRef idx="1">
+            <a:schemeClr val="accent1"/>
+          </a:lnRef>
+          <a:fillRef idx="3">
+            <a:schemeClr val="accent1"/>
+          </a:fillRef>
+          <a:effectRef idx="2">
+            <a:schemeClr val="accent1"/>
+          </a:effectRef>
+          <a:fontRef idx="minor">
+            <a:schemeClr val="lt1"/>
+          </a:fontRef>
+        </p:style>
+        <p:txBody>
+          <a:bodyPr rtlCol="0" anchor="ctr"/>
+          <a:lstStyle/>
+          <a:p>
+            <a:pPr algn="ctr"/>
+          </a:p>
+        </p:txBody>
+      </p:sp>
+      <p:sp>
+        <p:nvSpPr>
+          <p:cNvPr id="3" name="TextBox 2"/>
+          <p:cNvSpPr txBox="1"/>
+          <p:nvPr/>
+        </p:nvSpPr>
+        <p:spPr>
+          <a:xfrm>
+            <a:off x="457200" y="365760"/>
+            <a:ext cx="8229600" cy="640080"/>
+          </a:xfrm>
+          <a:prstGeom prst="rect">
+            <a:avLst/>
+          </a:prstGeom>
+          <a:noFill/>
+        </p:spPr>
+        <p:txBody>
+          <a:bodyPr wrap="square">
+            <a:spAutoFit/>
+          </a:bodyPr>
+          <a:lstStyle/>
+          <a:p>
+            <a:pPr algn="l">
+              <a:defRPr sz="2200" b="1">
+                <a:solidFill>
+                  <a:srgbClr val="1A5C33"/>
+                </a:solidFill>
+              </a:defRPr>
+            </a:pPr>
+            <a:r>
+              <a:t>Objectifs de l'enseignement</a:t>
+            </a:r>
+          </a:p>
+        </p:txBody>
+      </p:sp>
+      <p:sp>
+        <p:nvSpPr>
+          <p:cNvPr id="4" name="TextBox 3"/>
+          <p:cNvSpPr txBox="1"/>
+          <p:nvPr/>
+        </p:nvSpPr>
+        <p:spPr>
+          <a:xfrm>
+            <a:off x="457200" y="1371600"/>
+            <a:ext cx="7772400" cy="4572000"/>
+          </a:xfrm>
+          <a:prstGeom prst="rect">
+            <a:avLst/>
+          </a:prstGeom>
+          <a:noFill/>
+        </p:spPr>
+        <p:txBody>
+          <a:bodyPr wrap="square">
+            <a:spAutoFit/>
+          </a:bodyPr>
+          <a:lstStyle/>
+          <a:p>
+            <a:pPr>
+              <a:spcAft>
+                <a:spcPts val="600"/>
+              </a:spcAft>
+              <a:defRPr sz="1400">
+                <a:solidFill>
+                  <a:srgbClr val="222222"/>
+                </a:solidFill>
+              </a:defRPr>
+            </a:pPr>
+            <a:r>
+              <a:t>• Savoirs :- Comprendre l'infrastructure informatique nécessaire à la recherche en DLE (serveurs, bases de données, cloud computing)</a:t>
+            </a:r>
+            <a:br/>
+            <a:r>
+              <a:t>- Connaître les outils de linguistique de corpus pour l'analyse de productions langagières</a:t>
+            </a:r>
+            <a:br/>
+            <a:r>
+              <a:t>- Maîtriser les concepts fondamentaux du TAL (Traitement Automatique des Langues) appliqués à la didactique</a:t>
+            </a:r>
+            <a:br/>
+            <a:r>
+              <a:t>- Situer l'IA et l'apprentissage automatique dans le champ du CALL (ICALL)</a:t>
+            </a:r>
+          </a:p>
+          <a:p>
+            <a:pPr>
+              <a:spcAft>
+                <a:spcPts val="600"/>
+              </a:spcAft>
+              <a:defRPr sz="1400">
+                <a:solidFill>
+                  <a:srgbClr val="222222"/>
+                </a:solidFill>
+              </a:defRPr>
+            </a:pPr>
+            <a:r>
+              <a:t>• Savoir-faire :- Utiliser des outils d'annotation et d'analyse de corpus (AntConc, TXM, TreeTagger)</a:t>
+            </a:r>
+            <a:br/>
+            <a:r>
+              <a:t>- Exploiter des APIs de TAL (Python NLTK, spaCy) pour l'analyse linguistique</a:t>
+            </a:r>
+            <a:br/>
+            <a:r>
+              <a:t>- Concevoir un protocole de collecte et de traitement de données numériques pour la recherche</a:t>
+            </a:r>
+            <a:br/>
+            <a:r>
+              <a:t>- Appliquer des méthodes de recherche numérique (web scraping, analyse de réseaux, textométrie)</a:t>
+            </a:r>
+            <a:br/>
+            <a:r>
+              <a:t>- Rédiger une section méthodologique pour le mémoire décrivant les outils computationnels employés</a:t>
+            </a:r>
+          </a:p>
+          <a:p>
+            <a:pPr>
+              <a:spcAft>
+                <a:spcPts val="600"/>
+              </a:spcAft>
+              <a:defRPr sz="1400">
+                <a:solidFill>
+                  <a:srgbClr val="222222"/>
+                </a:solidFill>
+              </a:defRPr>
+            </a:pPr>
+            <a:r>
+              <a:t>• Savoir-être :- Adopter une approche critique des outils computationnels — comprendre leurs limites et biais</a:t>
+            </a:r>
+            <a:br/>
+            <a:r>
+              <a:t>- Respecter les principes éthiques dans le traitement numérique des données langagières</a:t>
+            </a:r>
+            <a:br/>
+            <a:r>
+              <a:t>- Développer une culture interdisciplinaire (didactique, linguistique, informatique)</a:t>
+            </a:r>
+          </a:p>
+          <a:p>
+            <a:pPr>
+              <a:spcAft>
+                <a:spcPts val="600"/>
+              </a:spcAft>
+              <a:defRPr sz="1400">
+                <a:solidFill>
+                  <a:srgbClr val="222222"/>
+                </a:solidFill>
+              </a:defRPr>
+            </a:pPr>
+            <a:r>
+              <a:t>• Mode d'évaluation :- Projet d'analyse de corpus (compte rendu méthodologique) : 40 %</a:t>
+            </a:r>
+            <a:br/>
+            <a:r>
+              <a:t>- Présentation orale d'un outil TAL pour la DLE : 30 %</a:t>
+            </a:r>
+            <a:br/>
+            <a:r>
+              <a:t>- QCM de validation : 20 %</a:t>
+            </a:r>
+            <a:br/>
+            <a:r>
+              <a:t>- Participation active : 10 %</a:t>
+            </a:r>
+          </a:p>
+        </p:txBody>
+      </p:sp>
+    </p:spTree>
+  </p:cSld>
+  <p:clrMapOvr>
+    <a:masterClrMapping/>
+  </p:clrMapOvr>
+</p:sld>
+</file>
+
+<file path=ppt/slides/slide6.xml><?xml version="1.0" encoding="utf-8"?>
+<p:sld xmlns:a="http://schemas.openxmlformats.org/drawingml/2006/main" xmlns:p="http://schemas.openxmlformats.org/presentationml/2006/main" xmlns:r="http://schemas.openxmlformats.org/officeDocument/2006/relationships">
+  <p:cSld>
+    <p:bg>
+      <p:bgPr>
+        <a:solidFill>
+          <a:srgbClr val="FFFFFF"/>
+        </a:solidFill>
+        <a:effectLst/>
+      </p:bgPr>
+    </p:bg>
+    <p:spTree>
+      <p:nvGrpSpPr>
+        <p:cNvPr id="1" name=""/>
+        <p:cNvGrpSpPr/>
+        <p:nvPr/>
+      </p:nvGrpSpPr>
+      <p:grpSpPr/>
+      <p:sp>
+        <p:nvSpPr>
+          <p:cNvPr id="2" name="Rectangle 1"/>
+          <p:cNvSpPr/>
+          <p:nvPr/>
+        </p:nvSpPr>
+        <p:spPr>
+          <a:xfrm>
+            <a:off x="0" y="0"/>
+            <a:ext cx="109728" cy="6858000"/>
+          </a:xfrm>
+          <a:prstGeom prst="rect">
+            <a:avLst/>
+          </a:prstGeom>
+          <a:solidFill>
+            <a:srgbClr val="2C6E49"/>
+          </a:solidFill>
+          <a:ln>
+            <a:noFill/>
+          </a:ln>
+        </p:spPr>
+        <p:style>
+          <a:lnRef idx="1">
+            <a:schemeClr val="accent1"/>
+          </a:lnRef>
+          <a:fillRef idx="3">
+            <a:schemeClr val="accent1"/>
+          </a:fillRef>
+          <a:effectRef idx="2">
+            <a:schemeClr val="accent1"/>
+          </a:effectRef>
+          <a:fontRef idx="minor">
+            <a:schemeClr val="lt1"/>
+          </a:fontRef>
+        </p:style>
+        <p:txBody>
+          <a:bodyPr rtlCol="0" anchor="ctr"/>
+          <a:lstStyle/>
+          <a:p>
+            <a:pPr algn="ctr"/>
+          </a:p>
+        </p:txBody>
+      </p:sp>
+      <p:sp>
+        <p:nvSpPr>
+          <p:cNvPr id="3" name="TextBox 2"/>
+          <p:cNvSpPr txBox="1"/>
+          <p:nvPr/>
+        </p:nvSpPr>
+        <p:spPr>
+          <a:xfrm>
+            <a:off x="457200" y="365760"/>
+            <a:ext cx="8229600" cy="640080"/>
+          </a:xfrm>
+          <a:prstGeom prst="rect">
+            <a:avLst/>
+          </a:prstGeom>
+          <a:noFill/>
+        </p:spPr>
+        <p:txBody>
+          <a:bodyPr wrap="square">
+            <a:spAutoFit/>
+          </a:bodyPr>
+          <a:lstStyle/>
+          <a:p>
+            <a:pPr algn="l">
+              <a:defRPr sz="2200" b="1">
+                <a:solidFill>
+                  <a:srgbClr val="1A5C33"/>
+                </a:solidFill>
+              </a:defRPr>
+            </a:pPr>
+            <a:r>
+              <a:t>Références bibliographiques principales</a:t>
+            </a:r>
+          </a:p>
+        </p:txBody>
+      </p:sp>
+      <p:sp>
+        <p:nvSpPr>
+          <p:cNvPr id="4" name="TextBox 3"/>
+          <p:cNvSpPr txBox="1"/>
+          <p:nvPr/>
+        </p:nvSpPr>
+        <p:spPr>
+          <a:xfrm>
+            <a:off x="457200" y="1371600"/>
+            <a:ext cx="7772400" cy="4572000"/>
+          </a:xfrm>
+          <a:prstGeom prst="rect">
+            <a:avLst/>
+          </a:prstGeom>
+          <a:noFill/>
+        </p:spPr>
+        <p:txBody>
+          <a:bodyPr wrap="square">
+            <a:spAutoFit/>
+          </a:bodyPr>
+          <a:lstStyle/>
+          <a:p>
+            <a:pPr>
+              <a:spcAft>
+                <a:spcPts val="600"/>
+              </a:spcAft>
+              <a:defRPr sz="1400">
+                <a:solidFill>
+                  <a:srgbClr val="222222"/>
+                </a:solidFill>
+              </a:defRPr>
+            </a:pPr>
+            <a:r>
+              <a:t>• Baker, P. (2006).Using Corpora in Discourse Analysis. Continuum.</a:t>
+            </a:r>
+          </a:p>
+          <a:p>
+            <a:pPr>
+              <a:spcAft>
+                <a:spcPts val="600"/>
+              </a:spcAft>
+              <a:defRPr sz="1400">
+                <a:solidFill>
+                  <a:srgbClr val="222222"/>
+                </a:solidFill>
+              </a:defRPr>
+            </a:pPr>
+            <a:r>
+              <a:t>• Manning, C. D., &amp; Schütze, H. (1999).Foundations of Statistical Natural Language Processing. MIT Press.</a:t>
+            </a:r>
+          </a:p>
+          <a:p>
+            <a:pPr>
+              <a:spcAft>
+                <a:spcPts val="600"/>
+              </a:spcAft>
+              <a:defRPr sz="1400">
+                <a:solidFill>
+                  <a:srgbClr val="222222"/>
+                </a:solidFill>
+              </a:defRPr>
+            </a:pPr>
+            <a:r>
+              <a:t>• Heift, T., &amp; Schulze, M. (2007).Errors and Intelligence in Computer-Assisted Language Learning. Routledge.</a:t>
+            </a:r>
+          </a:p>
+          <a:p>
+            <a:pPr>
+              <a:spcAft>
+                <a:spcPts val="600"/>
+              </a:spcAft>
+              <a:defRPr sz="1400">
+                <a:solidFill>
+                  <a:srgbClr val="222222"/>
+                </a:solidFill>
+              </a:defRPr>
+            </a:pPr>
+            <a:r>
+              <a:t>• Biber, D., Conrad, S., &amp; Reppen, R. (1998).Corpus Linguistics: Investigating Language Structure and Use. Cambridge.</a:t>
+            </a:r>
+          </a:p>
+          <a:p>
+            <a:pPr>
+              <a:spcAft>
+                <a:spcPts val="600"/>
+              </a:spcAft>
+              <a:defRPr sz="1400">
+                <a:solidFill>
+                  <a:srgbClr val="222222"/>
+                </a:solidFill>
+              </a:defRPr>
+            </a:pPr>
+            <a:r>
+              <a:t>• Boulton, A., &amp; Cobb, T. (2017). Corpus use in language learning: A meta-analysis.Language Learning, 67(2), 348-393.</a:t>
+            </a:r>
+          </a:p>
+        </p:txBody>
+      </p:sp>
+    </p:spTree>
+  </p:cSld>
+  <p:clrMapOvr>
+    <a:masterClrMapping/>
+  </p:clrMapOvr>
+</p:sld>
+</file>
+
+<file path=ppt/slides/slide7.xml><?xml version="1.0" encoding="utf-8"?>
+<p:sld xmlns:a="http://schemas.openxmlformats.org/drawingml/2006/main" xmlns:p="http://schemas.openxmlformats.org/presentationml/2006/main" xmlns:r="http://schemas.openxmlformats.org/officeDocument/2006/relationships">
+  <p:cSld>
+    <p:bg>
+      <p:bgPr>
+        <a:solidFill>
+          <a:srgbClr val="FFFFFF"/>
+        </a:solidFill>
+        <a:effectLst/>
+      </p:bgPr>
+    </p:bg>
+    <p:spTree>
+      <p:nvGrpSpPr>
+        <p:cNvPr id="1" name=""/>
+        <p:cNvGrpSpPr/>
+        <p:nvPr/>
+      </p:nvGrpSpPr>
+      <p:grpSpPr/>
+      <p:sp>
+        <p:nvSpPr>
+          <p:cNvPr id="2" name="Rectangle 1"/>
+          <p:cNvSpPr/>
+          <p:nvPr/>
+        </p:nvSpPr>
+        <p:spPr>
+          <a:xfrm>
+            <a:off x="0" y="0"/>
+            <a:ext cx="109728" cy="6858000"/>
+          </a:xfrm>
+          <a:prstGeom prst="rect">
+            <a:avLst/>
+          </a:prstGeom>
+          <a:solidFill>
+            <a:srgbClr val="2C6E49"/>
+          </a:solidFill>
+          <a:ln>
+            <a:noFill/>
+          </a:ln>
+        </p:spPr>
+        <p:style>
+          <a:lnRef idx="1">
+            <a:schemeClr val="accent1"/>
+          </a:lnRef>
+          <a:fillRef idx="3">
+            <a:schemeClr val="accent1"/>
+          </a:fillRef>
+          <a:effectRef idx="2">
+            <a:schemeClr val="accent1"/>
+          </a:effectRef>
+          <a:fontRef idx="minor">
+            <a:schemeClr val="lt1"/>
+          </a:fontRef>
+        </p:style>
+        <p:txBody>
+          <a:bodyPr rtlCol="0" anchor="ctr"/>
+          <a:lstStyle/>
+          <a:p>
+            <a:pPr algn="ctr"/>
+          </a:p>
+        </p:txBody>
+      </p:sp>
+      <p:sp>
+        <p:nvSpPr>
+          <p:cNvPr id="3" name="TextBox 2"/>
+          <p:cNvSpPr txBox="1"/>
+          <p:nvPr/>
+        </p:nvSpPr>
+        <p:spPr>
+          <a:xfrm>
+            <a:off x="457200" y="365760"/>
+            <a:ext cx="8229600" cy="640080"/>
+          </a:xfrm>
+          <a:prstGeom prst="rect">
+            <a:avLst/>
+          </a:prstGeom>
+          <a:noFill/>
+        </p:spPr>
+        <p:txBody>
+          <a:bodyPr wrap="square">
+            <a:spAutoFit/>
+          </a:bodyPr>
+          <a:lstStyle/>
+          <a:p>
+            <a:pPr algn="l">
+              <a:defRPr sz="2200" b="1">
+                <a:solidFill>
+                  <a:srgbClr val="1A5C33"/>
+                </a:solidFill>
+              </a:defRPr>
+            </a:pPr>
+            <a:r>
+              <a:t>Contexte réglementaire algérien</a:t>
+            </a:r>
+          </a:p>
+        </p:txBody>
+      </p:sp>
+      <p:sp>
+        <p:nvSpPr>
+          <p:cNvPr id="4" name="TextBox 3"/>
+          <p:cNvSpPr txBox="1"/>
+          <p:nvPr/>
+        </p:nvSpPr>
+        <p:spPr>
+          <a:xfrm>
+            <a:off x="457200" y="1371600"/>
+            <a:ext cx="7772400" cy="4572000"/>
+          </a:xfrm>
+          <a:prstGeom prst="rect">
+            <a:avLst/>
+          </a:prstGeom>
+          <a:noFill/>
+        </p:spPr>
+        <p:txBody>
+          <a:bodyPr wrap="square">
+            <a:spAutoFit/>
+          </a:bodyPr>
+          <a:lstStyle/>
+          <a:p>
+            <a:pPr>
+              <a:spcAft>
+                <a:spcPts val="600"/>
+              </a:spcAft>
+              <a:defRPr sz="1400">
+                <a:solidFill>
+                  <a:srgbClr val="222222"/>
+                </a:solidFill>
+              </a:defRPr>
+            </a:pPr>
+            <a:r>
+              <a:t>• Le développement de l'informatique pour la recherche en sciences du langage et en didactique s'inscrit dans plusieurs cadres :</a:t>
+            </a:r>
+          </a:p>
+          <a:p>
+            <a:pPr>
+              <a:spcAft>
+                <a:spcPts val="600"/>
+              </a:spcAft>
+              <a:defRPr sz="1400">
+                <a:solidFill>
+                  <a:srgbClr val="222222"/>
+                </a:solidFill>
+              </a:defRPr>
+            </a:pPr>
+            <a:r>
+              <a:t>• Arrêté ministériel n° 933 (2016): Création de la Commission Nationale des TIC et de l'Édition Numérique dans l'Enseignement Supérieur.</a:t>
+            </a:r>
+          </a:p>
+          <a:p>
+            <a:pPr>
+              <a:spcAft>
+                <a:spcPts val="600"/>
+              </a:spcAft>
+              <a:defRPr sz="1400">
+                <a:solidFill>
+                  <a:srgbClr val="222222"/>
+                </a:solidFill>
+              </a:defRPr>
+            </a:pPr>
+            <a:r>
+              <a:t>• Stratégie nationale du numérique (2020-2030): Déploiement d'infrastructures cloud et de centres de calcul dans les universités algériennes.</a:t>
+            </a:r>
+          </a:p>
+          <a:p>
+            <a:pPr>
+              <a:spcAft>
+                <a:spcPts val="600"/>
+              </a:spcAft>
+              <a:defRPr sz="1400">
+                <a:solidFill>
+                  <a:srgbClr val="222222"/>
+                </a:solidFill>
+              </a:defRPr>
+            </a:pPr>
+            <a:r>
+              <a:t>• Projet de numérisation du MESRS (2021-2025): Mise en place de plates-formes de recherche numérique (e-recherche, bibliothèques numériques).</a:t>
+            </a:r>
+          </a:p>
+          <a:p>
+            <a:pPr>
+              <a:spcAft>
+                <a:spcPts val="600"/>
+              </a:spcAft>
+              <a:defRPr sz="1400">
+                <a:solidFill>
+                  <a:srgbClr val="222222"/>
+                </a:solidFill>
+              </a:defRPr>
+            </a:pPr>
+            <a:r>
+              <a:t>• Loi 18-07 relative à la protection des données personnelles: Cadre juridique pour la collecte et le traitement des données de recherche.</a:t>
+            </a:r>
+          </a:p>
+          <a:p>
+            <a:pPr>
+              <a:spcAft>
+                <a:spcPts val="600"/>
+              </a:spcAft>
+              <a:defRPr sz="1400">
+                <a:solidFill>
+                  <a:srgbClr val="222222"/>
+                </a:solidFill>
+              </a:defRPr>
+            </a:pPr>
+            <a:r>
+              <a:t>• Accès aux bases de données: Abonnement national aux ressources électroniques (SNDL, EBSCO, Cairn, OpenEdition) via le MESRS.</a:t>
+            </a:r>
+          </a:p>
+          <a:p>
+            <a:pPr>
+              <a:spcAft>
+                <a:spcPts val="600"/>
+              </a:spcAft>
+              <a:defRPr sz="1400">
+                <a:solidFill>
+                  <a:srgbClr val="222222"/>
+                </a:solidFill>
+              </a:defRPr>
+            </a:pPr>
+            <a:r>
+              <a:t>• Partenariats internationaux: Programmes Erasmus+ et PRIMA pour l'équipement et la formation en humanités numériques.</a:t>
+            </a:r>
+          </a:p>
+          <a:p>
+            <a:pPr>
+              <a:spcAft>
+                <a:spcPts val="600"/>
+              </a:spcAft>
+              <a:defRPr sz="1400">
+                <a:solidFill>
+                  <a:srgbClr val="222222"/>
+                </a:solidFill>
+              </a:defRPr>
+            </a:pPr>
+            <a:r>
+              <a:t>• Implication pour le chercheur M2 DLE :La recherche en didactique des langues mobilise désormais des outils computationnels. Le mémoire peut inclure une analyse outillée par ordinateur (corpus, TAL) qui nécessite une infrastructure et des compétences informatiques adaptées.</a:t>
+            </a:r>
+          </a:p>
+        </p:txBody>
+      </p:sp>
+    </p:spTree>
+  </p:cSld>
+  <p:clrMapOvr>
+    <a:masterClrMapping/>
+  </p:clrMapOvr>
+</p:sld>
+</file>
+
+<file path=ppt/slides/slide8.xml><?xml version="1.0" encoding="utf-8"?>
+<p:sld xmlns:a="http://schemas.openxmlformats.org/drawingml/2006/main" xmlns:p="http://schemas.openxmlformats.org/presentationml/2006/main" xmlns:r="http://schemas.openxmlformats.org/officeDocument/2006/relationships">
+  <p:cSld>
+    <p:bg>
+      <p:bgPr>
+        <a:solidFill>
+          <a:srgbClr val="FFFFFF"/>
+        </a:solidFill>
+        <a:effectLst/>
+      </p:bgPr>
+    </p:bg>
+    <p:spTree>
+      <p:nvGrpSpPr>
+        <p:cNvPr id="1" name=""/>
+        <p:cNvGrpSpPr/>
+        <p:nvPr/>
+      </p:nvGrpSpPr>
+      <p:grpSpPr/>
+      <p:sp>
+        <p:nvSpPr>
+          <p:cNvPr id="2" name="Rectangle 1"/>
+          <p:cNvSpPr/>
+          <p:nvPr/>
+        </p:nvSpPr>
+        <p:spPr>
+          <a:xfrm>
+            <a:off x="0" y="0"/>
+            <a:ext cx="109728" cy="6858000"/>
+          </a:xfrm>
+          <a:prstGeom prst="rect">
+            <a:avLst/>
+          </a:prstGeom>
+          <a:solidFill>
+            <a:srgbClr val="2C6E49"/>
+          </a:solidFill>
+          <a:ln>
+            <a:noFill/>
+          </a:ln>
+        </p:spPr>
+        <p:style>
+          <a:lnRef idx="1">
+            <a:schemeClr val="accent1"/>
+          </a:lnRef>
+          <a:fillRef idx="3">
+            <a:schemeClr val="accent1"/>
+          </a:fillRef>
+          <a:effectRef idx="2">
+            <a:schemeClr val="accent1"/>
+          </a:effectRef>
+          <a:fontRef idx="minor">
+            <a:schemeClr val="lt1"/>
+          </a:fontRef>
+        </p:style>
+        <p:txBody>
+          <a:bodyPr rtlCol="0" anchor="ctr"/>
+          <a:lstStyle/>
+          <a:p>
+            <a:pPr algn="ctr"/>
+          </a:p>
+        </p:txBody>
+      </p:sp>
+      <p:sp>
+        <p:nvSpPr>
+          <p:cNvPr id="3" name="TextBox 2"/>
+          <p:cNvSpPr txBox="1"/>
+          <p:nvPr/>
+        </p:nvSpPr>
+        <p:spPr>
+          <a:xfrm>
+            <a:off x="457200" y="365760"/>
+            <a:ext cx="8229600" cy="640080"/>
+          </a:xfrm>
+          <a:prstGeom prst="rect">
+            <a:avLst/>
+          </a:prstGeom>
+          <a:noFill/>
+        </p:spPr>
+        <p:txBody>
+          <a:bodyPr wrap="square">
+            <a:spAutoFit/>
+          </a:bodyPr>
+          <a:lstStyle/>
+          <a:p>
+            <a:pPr algn="l">
+              <a:defRPr sz="2200" b="1">
+                <a:solidFill>
+                  <a:srgbClr val="1A5C33"/>
+                </a:solidFill>
+              </a:defRPr>
+            </a:pPr>
+            <a:r>
+              <a:t>Plan du Cours</a:t>
+            </a:r>
+          </a:p>
+        </p:txBody>
+      </p:sp>
+      <p:sp>
+        <p:nvSpPr>
+          <p:cNvPr id="4" name="TextBox 3"/>
+          <p:cNvSpPr txBox="1"/>
+          <p:nvPr/>
+        </p:nvSpPr>
+        <p:spPr>
+          <a:xfrm>
+            <a:off x="457200" y="1371600"/>
+            <a:ext cx="7772400" cy="4572000"/>
+          </a:xfrm>
+          <a:prstGeom prst="rect">
+            <a:avLst/>
+          </a:prstGeom>
+          <a:noFill/>
+        </p:spPr>
+        <p:txBody>
+          <a:bodyPr wrap="square">
+            <a:spAutoFit/>
+          </a:bodyPr>
+          <a:lstStyle/>
+          <a:p>
+            <a:pPr>
+              <a:spcAft>
+                <a:spcPts val="600"/>
+              </a:spcAft>
+              <a:defRPr sz="1400">
+                <a:solidFill>
+                  <a:srgbClr val="222222"/>
+                </a:solidFill>
+              </a:defRPr>
+            </a:pPr>
+            <a:r>
+              <a:t>• Introduction : Pourquoi l'informatique pour la recherche en DLE ?</a:t>
+            </a:r>
+          </a:p>
+          <a:p>
+            <a:pPr>
+              <a:spcAft>
+                <a:spcPts val="600"/>
+              </a:spcAft>
+              <a:defRPr sz="1400">
+                <a:solidFill>
+                  <a:srgbClr val="222222"/>
+                </a:solidFill>
+              </a:defRPr>
+            </a:pPr>
+            <a:r>
+              <a:t>• Infrastructure de recherche numérique pour les sciences du langage</a:t>
+            </a:r>
+          </a:p>
+          <a:p>
+            <a:pPr>
+              <a:spcAft>
+                <a:spcPts val="600"/>
+              </a:spcAft>
+              <a:defRPr sz="1400">
+                <a:solidFill>
+                  <a:srgbClr val="222222"/>
+                </a:solidFill>
+              </a:defRPr>
+            </a:pPr>
+            <a:r>
+              <a:t>• Linguistique de corpus : outils et méthodes pour la DLE</a:t>
+            </a:r>
+          </a:p>
+          <a:p>
+            <a:pPr>
+              <a:spcAft>
+                <a:spcPts val="600"/>
+              </a:spcAft>
+              <a:defRPr sz="1400">
+                <a:solidFill>
+                  <a:srgbClr val="222222"/>
+                </a:solidFill>
+              </a:defRPr>
+            </a:pPr>
+            <a:r>
+              <a:t>• Traitement Automatique des Langues (TAL) appliqué à la didactique</a:t>
+            </a:r>
+          </a:p>
+          <a:p>
+            <a:pPr>
+              <a:spcAft>
+                <a:spcPts val="600"/>
+              </a:spcAft>
+              <a:defRPr sz="1400">
+                <a:solidFill>
+                  <a:srgbClr val="222222"/>
+                </a:solidFill>
+              </a:defRPr>
+            </a:pPr>
+            <a:r>
+              <a:t>• Intelligence Artificielle et apprentissage des langues (ICALL)</a:t>
+            </a:r>
+          </a:p>
+          <a:p>
+            <a:pPr>
+              <a:spcAft>
+                <a:spcPts val="600"/>
+              </a:spcAft>
+              <a:defRPr sz="1400">
+                <a:solidFill>
+                  <a:srgbClr val="222222"/>
+                </a:solidFill>
+              </a:defRPr>
+            </a:pPr>
+            <a:r>
+              <a:t>• Traitement de données pour la recherche en didactique</a:t>
+            </a:r>
+          </a:p>
+          <a:p>
+            <a:pPr>
+              <a:spcAft>
+                <a:spcPts val="600"/>
+              </a:spcAft>
+              <a:defRPr sz="1400">
+                <a:solidFill>
+                  <a:srgbClr val="222222"/>
+                </a:solidFill>
+              </a:defRPr>
+            </a:pPr>
+            <a:r>
+              <a:t>• Méthodes de recherche numériques en sciences du langage</a:t>
+            </a:r>
+          </a:p>
+          <a:p>
+            <a:pPr>
+              <a:spcAft>
+                <a:spcPts val="600"/>
+              </a:spcAft>
+              <a:defRPr sz="1400">
+                <a:solidFill>
+                  <a:srgbClr val="222222"/>
+                </a:solidFill>
+              </a:defRPr>
+            </a:pPr>
+            <a:r>
+              <a:t>• Conclusion : perspectives pour le mémoire M2</a:t>
+            </a:r>
+          </a:p>
+        </p:txBody>
+      </p:sp>
+    </p:spTree>
+  </p:cSld>
+  <p:clrMapOvr>
+    <a:masterClrMapping/>
+  </p:clrMapOvr>
+</p:sld>
+</file>
+
+<file path=ppt/slides/slide9.xml><?xml version="1.0" encoding="utf-8"?>
+<p:sld xmlns:a="http://schemas.openxmlformats.org/drawingml/2006/main" xmlns:p="http://schemas.openxmlformats.org/presentationml/2006/main" xmlns:r="http://schemas.openxmlformats.org/officeDocument/2006/relationships">
+  <p:cSld>
+    <p:bg>
+      <p:bgPr>
+        <a:solidFill>
+          <a:srgbClr val="FFFFFF"/>
+        </a:solidFill>
+        <a:effectLst/>
+      </p:bgPr>
+    </p:bg>
+    <p:spTree>
+      <p:nvGrpSpPr>
+        <p:cNvPr id="1" name=""/>
+        <p:cNvGrpSpPr/>
+        <p:nvPr/>
+      </p:nvGrpSpPr>
+      <p:grpSpPr/>
+      <p:sp>
+        <p:nvSpPr>
+          <p:cNvPr id="2" name="Rectangle 1"/>
+          <p:cNvSpPr/>
+          <p:nvPr/>
+        </p:nvSpPr>
+        <p:spPr>
+          <a:xfrm>
+            <a:off x="0" y="0"/>
+            <a:ext cx="109728" cy="6858000"/>
+          </a:xfrm>
+          <a:prstGeom prst="rect">
+            <a:avLst/>
+          </a:prstGeom>
+          <a:solidFill>
+            <a:srgbClr val="2C6E49"/>
+          </a:solidFill>
+          <a:ln>
+            <a:noFill/>
+          </a:ln>
+        </p:spPr>
+        <p:style>
+          <a:lnRef idx="1">
+            <a:schemeClr val="accent1"/>
+          </a:lnRef>
+          <a:fillRef idx="3">
+            <a:schemeClr val="accent1"/>
+          </a:fillRef>
+          <a:effectRef idx="2">
+            <a:schemeClr val="accent1"/>
+          </a:effectRef>
+          <a:fontRef idx="minor">
+            <a:schemeClr val="lt1"/>
+          </a:fontRef>
+        </p:style>
+        <p:txBody>
+          <a:bodyPr rtlCol="0" anchor="ctr"/>
+          <a:lstStyle/>
+          <a:p>
+            <a:pPr algn="ctr"/>
+          </a:p>
+        </p:txBody>
+      </p:sp>
+      <p:sp>
+        <p:nvSpPr>
+          <p:cNvPr id="3" name="TextBox 2"/>
+          <p:cNvSpPr txBox="1"/>
+          <p:nvPr/>
+        </p:nvSpPr>
+        <p:spPr>
+          <a:xfrm>
+            <a:off x="457200" y="365760"/>
+            <a:ext cx="8229600" cy="640080"/>
+          </a:xfrm>
+          <a:prstGeom prst="rect">
+            <a:avLst/>
+          </a:prstGeom>
+          <a:noFill/>
+        </p:spPr>
+        <p:txBody>
+          <a:bodyPr wrap="square">
+            <a:spAutoFit/>
+          </a:bodyPr>
+          <a:lstStyle/>
+          <a:p>
+            <a:pPr algn="l">
+              <a:defRPr sz="2200" b="1">
+                <a:solidFill>
+                  <a:srgbClr val="1A5C33"/>
+                </a:solidFill>
+              </a:defRPr>
+            </a:pPr>
+            <a:r>
+              <a:t>1.1 Le tournant numérique en didactique des langues</a:t>
+            </a:r>
+          </a:p>
+        </p:txBody>
+      </p:sp>
+      <p:sp>
+        <p:nvSpPr>
+          <p:cNvPr id="4" name="TextBox 3"/>
+          <p:cNvSpPr txBox="1"/>
+          <p:nvPr/>
+        </p:nvSpPr>
+        <p:spPr>
+          <a:xfrm>
+            <a:off x="457200" y="1371600"/>
+            <a:ext cx="7772400" cy="4572000"/>
+          </a:xfrm>
+          <a:prstGeom prst="rect">
+            <a:avLst/>
+          </a:prstGeom>
+          <a:noFill/>
+        </p:spPr>
+        <p:txBody>
+          <a:bodyPr wrap="square">
+            <a:spAutoFit/>
+          </a:bodyPr>
+          <a:lstStyle/>
+          <a:p>
+            <a:pPr>
+              <a:spcAft>
+                <a:spcPts val="600"/>
+              </a:spcAft>
+              <a:defRPr sz="1400">
+                <a:solidFill>
+                  <a:srgbClr val="222222"/>
+                </a:solidFill>
+              </a:defRPr>
+            </a:pPr>
+            <a:r>
+              <a:t>• La recherche en didactique des langues a connu une transformation profonde avec l'avènement du numérique. L'informatique n'est plus seulement un outil pédagogique — elle est devenue uninstrument de rechercheà part entière : analyse de corpus, fouille de textes, modélisation computationnelle de l'acquisition, traitement de données massives d'apprentissage.</a:t>
+            </a:r>
+          </a:p>
+          <a:p>
+            <a:pPr>
+              <a:spcAft>
+                <a:spcPts val="600"/>
+              </a:spcAft>
+              <a:defRPr sz="1400">
+                <a:solidFill>
+                  <a:srgbClr val="222222"/>
+                </a:solidFill>
+              </a:defRPr>
+            </a:pPr>
+            <a:r>
+              <a:t>• Objectif du cours :Fournir aux étudiants M2 DLE les connaissances et compétences nécessaires pour intégrer les outils informatiques dans leur projet de recherche, de la collecte à l'analyse des données.</a:t>
+            </a:r>
+          </a:p>
+        </p:txBody>
+      </p:sp>
+    </p:spTree>
+  </p:cSld>
+  <p:clrMapOvr>
+    <a:masterClrMapping/>
+  </p:clrMapOvr>
 </p:sld>
 </file>
 
@@ -4975,319 +6212,4 @@
   </a:objectDefaults>
   <a:extraClrSchemeLst/>
 </a:theme>
-</file>
-
-<file path=ppt/theme/theme2.xml><?xml version="1.0" encoding="utf-8"?>
-<a:theme xmlns:a="http://schemas.openxmlformats.org/drawingml/2006/main" name="Thème Office">
-  <a:themeElements>
-    <a:clrScheme name="Office">
-      <a:dk1>
-        <a:sysClr val="windowText" lastClr="000000"/>
-      </a:dk1>
-      <a:lt1>
-        <a:sysClr val="window" lastClr="FFFFFF"/>
-      </a:lt1>
-      <a:dk2>
-        <a:srgbClr val="0E2841"/>
-      </a:dk2>
-      <a:lt2>
-        <a:srgbClr val="E8E8E8"/>
-      </a:lt2>
-      <a:accent1>
-        <a:srgbClr val="156082"/>
-      </a:accent1>
-      <a:accent2>
-        <a:srgbClr val="E97132"/>
-      </a:accent2>
-      <a:accent3>
-        <a:srgbClr val="196B24"/>
-      </a:accent3>
-      <a:accent4>
-        <a:srgbClr val="0F9ED5"/>
-      </a:accent4>
-      <a:accent5>
-        <a:srgbClr val="A02B93"/>
-      </a:accent5>
-      <a:accent6>
-        <a:srgbClr val="4EA72E"/>
-      </a:accent6>
-      <a:hlink>
-        <a:srgbClr val="467886"/>
-      </a:hlink>
-      <a:folHlink>
-        <a:srgbClr val="96607D"/>
-      </a:folHlink>
-    </a:clrScheme>
-    <a:fontScheme name="Office">
-      <a:majorFont>
-        <a:latin typeface="Aptos Display" panose="02110004020202020204"/>
-        <a:ea typeface=""/>
-        <a:cs typeface=""/>
-        <a:font script="Jpan" typeface="游ゴシック Light"/>
-        <a:font script="Hang" typeface="맑은 고딕"/>
-        <a:font script="Hans" typeface="等线 Light"/>
-        <a:font script="Hant" typeface="新細明體"/>
-        <a:font script="Arab" typeface="Times New Roman"/>
-        <a:font script="Hebr" typeface="Times New Roman"/>
-        <a:font script="Thai" typeface="Angsana New"/>
-        <a:font script="Ethi" typeface="Nyala"/>
-        <a:font script="Beng" typeface="Vrinda"/>
-        <a:font script="Gujr" typeface="Shruti"/>
-        <a:font script="Khmr" typeface="MoolBoran"/>
-        <a:font script="Knda" typeface="Tunga"/>
-        <a:font script="Guru" typeface="Raavi"/>
-        <a:font script="Cans" typeface="Euphemia"/>
-        <a:font script="Cher" typeface="Plantagenet Cherokee"/>
-        <a:font script="Yiii" typeface="Microsoft Yi Baiti"/>
-        <a:font script="Tibt" typeface="Microsoft Himalaya"/>
-        <a:font script="Thaa" typeface="MV Boli"/>
-        <a:font script="Deva" typeface="Mangal"/>
-        <a:font script="Telu" typeface="Gautami"/>
-        <a:font script="Taml" typeface="Latha"/>
-        <a:font script="Syrc" typeface="Estrangelo Edessa"/>
-        <a:font script="Orya" typeface="Kalinga"/>
-        <a:font script="Mlym" typeface="Kartika"/>
-        <a:font script="Laoo" typeface="DokChampa"/>
-        <a:font script="Sinh" typeface="Iskoola Pota"/>
-        <a:font script="Mong" typeface="Mongolian Baiti"/>
-        <a:font script="Viet" typeface="Times New Roman"/>
-        <a:font script="Uigh" typeface="Microsoft Uighur"/>
-        <a:font script="Geor" typeface="Sylfaen"/>
-        <a:font script="Armn" typeface="Arial"/>
-        <a:font script="Bugi" typeface="Leelawadee UI"/>
-        <a:font script="Bopo" typeface="Microsoft JhengHei"/>
-        <a:font script="Java" typeface="Javanese Text"/>
-        <a:font script="Lisu" typeface="Segoe UI"/>
-        <a:font script="Mymr" typeface="Myanmar Text"/>
-        <a:font script="Nkoo" typeface="Ebrima"/>
-        <a:font script="Olck" typeface="Nirmala UI"/>
-        <a:font script="Osma" typeface="Ebrima"/>
-        <a:font script="Phag" typeface="Phagspa"/>
-        <a:font script="Syrn" typeface="Estrangelo Edessa"/>
-        <a:font script="Syrj" typeface="Estrangelo Edessa"/>
-        <a:font script="Syre" typeface="Estrangelo Edessa"/>
-        <a:font script="Sora" typeface="Nirmala UI"/>
-        <a:font script="Tale" typeface="Microsoft Tai Le"/>
-        <a:font script="Talu" typeface="Microsoft New Tai Lue"/>
-        <a:font script="Tfng" typeface="Ebrima"/>
-      </a:majorFont>
-      <a:minorFont>
-        <a:latin typeface="Aptos" panose="02110004020202020204"/>
-        <a:ea typeface=""/>
-        <a:cs typeface=""/>
-        <a:font script="Jpan" typeface="游ゴシック"/>
-        <a:font script="Hang" typeface="맑은 고딕"/>
-        <a:font script="Hans" typeface="等线"/>
-        <a:font script="Hant" typeface="新細明體"/>
-        <a:font script="Arab" typeface="Arial"/>
-        <a:font script="Hebr" typeface="Arial"/>
-        <a:font script="Thai" typeface="Cordia New"/>
-        <a:font script="Ethi" typeface="Nyala"/>
-        <a:font script="Beng" typeface="Vrinda"/>
-        <a:font script="Gujr" typeface="Shruti"/>
-        <a:font script="Khmr" typeface="DaunPenh"/>
-        <a:font script="Knda" typeface="Tunga"/>
-        <a:font script="Guru" typeface="Raavi"/>
-        <a:font script="Cans" typeface="Euphemia"/>
-        <a:font script="Cher" typeface="Plantagenet Cherokee"/>
-        <a:font script="Yiii" typeface="Microsoft Yi Baiti"/>
-        <a:font script="Tibt" typeface="Microsoft Himalaya"/>
-        <a:font script="Thaa" typeface="MV Boli"/>
-        <a:font script="Deva" typeface="Mangal"/>
-        <a:font script="Telu" typeface="Gautami"/>
-        <a:font script="Taml" typeface="Latha"/>
-        <a:font script="Syrc" typeface="Estrangelo Edessa"/>
-        <a:font script="Orya" typeface="Kalinga"/>
-        <a:font script="Mlym" typeface="Kartika"/>
-        <a:font script="Laoo" typeface="DokChampa"/>
-        <a:font script="Sinh" typeface="Iskoola Pota"/>
-        <a:font script="Mong" typeface="Mongolian Baiti"/>
-        <a:font script="Viet" typeface="Arial"/>
-        <a:font script="Uigh" typeface="Microsoft Uighur"/>
-        <a:font script="Geor" typeface="Sylfaen"/>
-        <a:font script="Armn" typeface="Arial"/>
-        <a:font script="Bugi" typeface="Leelawadee UI"/>
-        <a:font script="Bopo" typeface="Microsoft JhengHei"/>
-        <a:font script="Java" typeface="Javanese Text"/>
-        <a:font script="Lisu" typeface="Segoe UI"/>
-        <a:font script="Mymr" typeface="Myanmar Text"/>
-        <a:font script="Nkoo" typeface="Ebrima"/>
-        <a:font script="Olck" typeface="Nirmala UI"/>
-        <a:font script="Osma" typeface="Ebrima"/>
-        <a:font script="Phag" typeface="Phagspa"/>
-        <a:font script="Syrn" typeface="Estrangelo Edessa"/>
-        <a:font script="Syrj" typeface="Estrangelo Edessa"/>
-        <a:font script="Syre" typeface="Estrangelo Edessa"/>
-        <a:font script="Sora" typeface="Nirmala UI"/>
-        <a:font script="Tale" typeface="Microsoft Tai Le"/>
-        <a:font script="Talu" typeface="Microsoft New Tai Lue"/>
-        <a:font script="Tfng" typeface="Ebrima"/>
-      </a:minorFont>
-    </a:fontScheme>
-    <a:fmtScheme name="Office">
-      <a:fillStyleLst>
-        <a:solidFill>
-          <a:schemeClr val="phClr"/>
-        </a:solidFill>
-        <a:gradFill rotWithShape="1">
-          <a:gsLst>
-            <a:gs pos="0">
-              <a:schemeClr val="phClr">
-                <a:lumMod val="110000"/>
-                <a:satMod val="105000"/>
-                <a:tint val="67000"/>
-              </a:schemeClr>
-            </a:gs>
-            <a:gs pos="50000">
-              <a:schemeClr val="phClr">
-                <a:lumMod val="105000"/>
-                <a:satMod val="103000"/>
-                <a:tint val="73000"/>
-              </a:schemeClr>
-            </a:gs>
-            <a:gs pos="100000">
-              <a:schemeClr val="phClr">
-                <a:lumMod val="105000"/>
-                <a:satMod val="109000"/>
-                <a:tint val="81000"/>
-              </a:schemeClr>
-            </a:gs>
-          </a:gsLst>
-          <a:lin ang="5400000" scaled="0"/>
-        </a:gradFill>
-        <a:gradFill rotWithShape="1">
-          <a:gsLst>
-            <a:gs pos="0">
-              <a:schemeClr val="phClr">
-                <a:satMod val="103000"/>
-                <a:lumMod val="102000"/>
-                <a:tint val="94000"/>
-              </a:schemeClr>
-            </a:gs>
-            <a:gs pos="50000">
-              <a:schemeClr val="phClr">
-                <a:satMod val="110000"/>
-                <a:lumMod val="100000"/>
-                <a:shade val="100000"/>
-              </a:schemeClr>
-            </a:gs>
-            <a:gs pos="100000">
-              <a:schemeClr val="phClr">
-                <a:lumMod val="99000"/>
-                <a:satMod val="120000"/>
-                <a:shade val="78000"/>
-              </a:schemeClr>
-            </a:gs>
-          </a:gsLst>
-          <a:lin ang="5400000" scaled="0"/>
-        </a:gradFill>
-      </a:fillStyleLst>
-      <a:lnStyleLst>
-        <a:ln w="12700" cap="flat" cmpd="sng" algn="ctr">
-          <a:solidFill>
-            <a:schemeClr val="phClr"/>
-          </a:solidFill>
-          <a:prstDash val="solid"/>
-          <a:miter lim="800000"/>
-        </a:ln>
-        <a:ln w="19050" cap="flat" cmpd="sng" algn="ctr">
-          <a:solidFill>
-            <a:schemeClr val="phClr"/>
-          </a:solidFill>
-          <a:prstDash val="solid"/>
-          <a:miter lim="800000"/>
-        </a:ln>
-        <a:ln w="25400" cap="flat" cmpd="sng" algn="ctr">
-          <a:solidFill>
-            <a:schemeClr val="phClr"/>
-          </a:solidFill>
-          <a:prstDash val="solid"/>
-          <a:miter lim="800000"/>
-        </a:ln>
-      </a:lnStyleLst>
-      <a:effectStyleLst>
-        <a:effectStyle>
-          <a:effectLst/>
-        </a:effectStyle>
-        <a:effectStyle>
-          <a:effectLst/>
-        </a:effectStyle>
-        <a:effectStyle>
-          <a:effectLst>
-            <a:outerShdw blurRad="57150" dist="19050" dir="5400000" algn="ctr" rotWithShape="0">
-              <a:srgbClr val="000000">
-                <a:alpha val="63000"/>
-              </a:srgbClr>
-            </a:outerShdw>
-          </a:effectLst>
-        </a:effectStyle>
-      </a:effectStyleLst>
-      <a:bgFillStyleLst>
-        <a:solidFill>
-          <a:schemeClr val="phClr"/>
-        </a:solidFill>
-        <a:solidFill>
-          <a:schemeClr val="phClr">
-            <a:tint val="95000"/>
-            <a:satMod val="170000"/>
-          </a:schemeClr>
-        </a:solidFill>
-        <a:gradFill rotWithShape="1">
-          <a:gsLst>
-            <a:gs pos="0">
-              <a:schemeClr val="phClr">
-                <a:tint val="93000"/>
-                <a:satMod val="150000"/>
-                <a:shade val="98000"/>
-                <a:lumMod val="102000"/>
-              </a:schemeClr>
-            </a:gs>
-            <a:gs pos="50000">
-              <a:schemeClr val="phClr">
-                <a:tint val="98000"/>
-                <a:satMod val="130000"/>
-                <a:shade val="90000"/>
-                <a:lumMod val="103000"/>
-              </a:schemeClr>
-            </a:gs>
-            <a:gs pos="100000">
-              <a:schemeClr val="phClr">
-                <a:shade val="63000"/>
-                <a:satMod val="120000"/>
-              </a:schemeClr>
-            </a:gs>
-          </a:gsLst>
-          <a:lin ang="5400000" scaled="0"/>
-        </a:gradFill>
-      </a:bgFillStyleLst>
-    </a:fmtScheme>
-  </a:themeElements>
-  <a:objectDefaults>
-    <a:lnDef>
-      <a:spPr/>
-      <a:bodyPr/>
-      <a:lstStyle/>
-      <a:style>
-        <a:lnRef idx="2">
-          <a:schemeClr val="accent1"/>
-        </a:lnRef>
-        <a:fillRef idx="0">
-          <a:schemeClr val="accent1"/>
-        </a:fillRef>
-        <a:effectRef idx="1">
-          <a:schemeClr val="accent1"/>
-        </a:effectRef>
-        <a:fontRef idx="minor">
-          <a:schemeClr val="tx1"/>
-        </a:fontRef>
-      </a:style>
-    </a:lnDef>
-  </a:objectDefaults>
-  <a:extraClrSchemeLst/>
-  <a:extLst>
-    <a:ext uri="{05A4C25C-085E-4340-85A3-A5531E510DB2}">
-      <thm15:themeFamily xmlns:thm15="http://schemas.microsoft.com/office/thememl/2012/main" name="Office Theme" id="{2E142A2C-CD16-42D6-873A-C26D2A0506FA}" vid="{1BDDFF52-6CD6-40A5-AB3C-68EB2F1E4D0A}"/>
-    </a:ext>
-  </a:extLst>
-</a:theme>
 </file>
--- a/cours/Module TIC/Département Français/Master 2 - DLE/Cours_TIC_02_Informatique_et_Ordinateur_FR.pptx
+++ b/cours/Module TIC/Département Français/Master 2 - DLE/Cours_TIC_02_Informatique_et_Ordinateur_FR.pptx
@@ -2850,7 +2850,7 @@
           <a:solidFill>
             <a:schemeClr val="tx1"/>
           </a:solidFill>
-          <a:latin typeface="+mj-lt"/>
+          <a:latin typeface="Poppins"/>
           <a:ea typeface="+mj-ea"/>
           <a:cs typeface="+mj-cs"/>
         </a:defRPr>
@@ -2867,7 +2867,7 @@
           <a:solidFill>
             <a:schemeClr val="tx1"/>
           </a:solidFill>
-          <a:latin typeface="+mn-lt"/>
+          <a:latin typeface="Poppins"/>
           <a:ea typeface="+mn-ea"/>
           <a:cs typeface="+mn-cs"/>
         </a:defRPr>
@@ -2882,7 +2882,7 @@
           <a:solidFill>
             <a:schemeClr val="tx1"/>
           </a:solidFill>
-          <a:latin typeface="+mn-lt"/>
+          <a:latin typeface="Poppins"/>
           <a:ea typeface="+mn-ea"/>
           <a:cs typeface="+mn-cs"/>
         </a:defRPr>
@@ -2897,7 +2897,7 @@
           <a:solidFill>
             <a:schemeClr val="tx1"/>
           </a:solidFill>
-          <a:latin typeface="+mn-lt"/>
+          <a:latin typeface="Poppins"/>
           <a:ea typeface="+mn-ea"/>
           <a:cs typeface="+mn-cs"/>
         </a:defRPr>
@@ -2912,7 +2912,7 @@
           <a:solidFill>
             <a:schemeClr val="tx1"/>
           </a:solidFill>
-          <a:latin typeface="+mn-lt"/>
+          <a:latin typeface="Poppins"/>
           <a:ea typeface="+mn-ea"/>
           <a:cs typeface="+mn-cs"/>
         </a:defRPr>
@@ -2927,7 +2927,7 @@
           <a:solidFill>
             <a:schemeClr val="tx1"/>
           </a:solidFill>
-          <a:latin typeface="+mn-lt"/>
+          <a:latin typeface="Poppins"/>
           <a:ea typeface="+mn-ea"/>
           <a:cs typeface="+mn-cs"/>
         </a:defRPr>
@@ -2942,7 +2942,7 @@
           <a:solidFill>
             <a:schemeClr val="tx1"/>
           </a:solidFill>
-          <a:latin typeface="+mn-lt"/>
+          <a:latin typeface="Poppins"/>
           <a:ea typeface="+mn-ea"/>
           <a:cs typeface="+mn-cs"/>
         </a:defRPr>
@@ -2957,7 +2957,7 @@
           <a:solidFill>
             <a:schemeClr val="tx1"/>
           </a:solidFill>
-          <a:latin typeface="+mn-lt"/>
+          <a:latin typeface="Poppins"/>
           <a:ea typeface="+mn-ea"/>
           <a:cs typeface="+mn-cs"/>
         </a:defRPr>
@@ -2972,7 +2972,7 @@
           <a:solidFill>
             <a:schemeClr val="tx1"/>
           </a:solidFill>
-          <a:latin typeface="+mn-lt"/>
+          <a:latin typeface="Poppins"/>
           <a:ea typeface="+mn-ea"/>
           <a:cs typeface="+mn-cs"/>
         </a:defRPr>
@@ -2987,7 +2987,7 @@
           <a:solidFill>
             <a:schemeClr val="tx1"/>
           </a:solidFill>
-          <a:latin typeface="+mn-lt"/>
+          <a:latin typeface="Poppins"/>
           <a:ea typeface="+mn-ea"/>
           <a:cs typeface="+mn-cs"/>
         </a:defRPr>
@@ -3002,7 +3002,7 @@
           <a:solidFill>
             <a:schemeClr val="tx1"/>
           </a:solidFill>
-          <a:latin typeface="+mn-lt"/>
+          <a:latin typeface="Poppins"/>
           <a:ea typeface="+mn-ea"/>
           <a:cs typeface="+mn-cs"/>
         </a:defRPr>
@@ -3012,7 +3012,7 @@
           <a:solidFill>
             <a:schemeClr val="tx1"/>
           </a:solidFill>
-          <a:latin typeface="+mn-lt"/>
+          <a:latin typeface="Poppins"/>
           <a:ea typeface="+mn-ea"/>
           <a:cs typeface="+mn-cs"/>
         </a:defRPr>
@@ -3022,7 +3022,7 @@
           <a:solidFill>
             <a:schemeClr val="tx1"/>
           </a:solidFill>
-          <a:latin typeface="+mn-lt"/>
+          <a:latin typeface="Poppins"/>
           <a:ea typeface="+mn-ea"/>
           <a:cs typeface="+mn-cs"/>
         </a:defRPr>
@@ -3032,7 +3032,7 @@
           <a:solidFill>
             <a:schemeClr val="tx1"/>
           </a:solidFill>
-          <a:latin typeface="+mn-lt"/>
+          <a:latin typeface="Poppins"/>
           <a:ea typeface="+mn-ea"/>
           <a:cs typeface="+mn-cs"/>
         </a:defRPr>
@@ -3042,7 +3042,7 @@
           <a:solidFill>
             <a:schemeClr val="tx1"/>
           </a:solidFill>
-          <a:latin typeface="+mn-lt"/>
+          <a:latin typeface="Poppins"/>
           <a:ea typeface="+mn-ea"/>
           <a:cs typeface="+mn-cs"/>
         </a:defRPr>
@@ -3052,7 +3052,7 @@
           <a:solidFill>
             <a:schemeClr val="tx1"/>
           </a:solidFill>
-          <a:latin typeface="+mn-lt"/>
+          <a:latin typeface="Poppins"/>
           <a:ea typeface="+mn-ea"/>
           <a:cs typeface="+mn-cs"/>
         </a:defRPr>
@@ -3062,7 +3062,7 @@
           <a:solidFill>
             <a:schemeClr val="tx1"/>
           </a:solidFill>
-          <a:latin typeface="+mn-lt"/>
+          <a:latin typeface="Poppins"/>
           <a:ea typeface="+mn-ea"/>
           <a:cs typeface="+mn-cs"/>
         </a:defRPr>
@@ -3072,7 +3072,7 @@
           <a:solidFill>
             <a:schemeClr val="tx1"/>
           </a:solidFill>
-          <a:latin typeface="+mn-lt"/>
+          <a:latin typeface="Poppins"/>
           <a:ea typeface="+mn-ea"/>
           <a:cs typeface="+mn-cs"/>
         </a:defRPr>
@@ -3082,7 +3082,7 @@
           <a:solidFill>
             <a:schemeClr val="tx1"/>
           </a:solidFill>
-          <a:latin typeface="+mn-lt"/>
+          <a:latin typeface="Poppins"/>
           <a:ea typeface="+mn-ea"/>
           <a:cs typeface="+mn-cs"/>
         </a:defRPr>
@@ -3097,9 +3097,7 @@
   <p:cSld>
     <p:bg>
       <p:bgPr>
-        <a:solidFill>
-          <a:srgbClr val="1A5C33"/>
-        </a:solidFill>
+        <a:solidFill>val="006847"/&gt;</a:solidFill>
         <a:effectLst/>
       </p:bgPr>
     </p:bg>
@@ -3134,9 +3132,7 @@
           <a:p>
             <a:pPr algn="ctr">
               <a:defRPr sz="3200" b="1">
-                <a:solidFill>
-                  <a:srgbClr val="FFFFFF"/>
-                </a:solidFill>
+                <a:solidFill>val="FFFFFF"/&gt;</a:solidFill>
               </a:defRPr>
             </a:pPr>
             <a:r>
@@ -3169,9 +3165,7 @@
           <a:p>
             <a:pPr algn="ctr">
               <a:defRPr sz="2000" b="0">
-                <a:solidFill>
-                  <a:srgbClr val="C5D9C7"/>
-                </a:solidFill>
+                <a:solidFill>val="DFE5EA"/&gt;</a:solidFill>
               </a:defRPr>
             </a:pPr>
             <a:r>
@@ -3204,13 +3198,52 @@
           <a:p>
             <a:pPr algn="ctr">
               <a:defRPr sz="1600" b="0">
+                <a:solidFill>val="B7C9BE"/&gt;</a:solidFill>
+              </a:defRPr>
+            </a:pPr>
+            <a:r>
+              <a:t>Université de Mostaganem — MCB</a:t>
+            </a:r>
+          </a:p>
+        </p:txBody>
+      </p:sp>
+      <p:sp>
+        <p:nvSpPr>
+          <p:cNvPr id="990001" name="Pied de page FLE"/>
+          <p:cNvSpPr>
+            <a:spLocks noGrp="1"/>
+          </p:cNvSpPr>
+          <p:nvPr/>
+        </p:nvSpPr>
+        <p:spPr>
+          <a:xfrm>
+            <a:off x="2880360" y="914400"/>
+            <a:ext cx="4572000" cy="274320"/>
+          </a:xfrm>
+          <a:prstGeom prst="rect">
+            <a:avLst/>
+          </a:prstGeom>
+        </p:spPr>
+        <p:txBody>
+          <a:bodyPr anchor="b"/>
+          <a:lstStyle/>
+          <a:p>
+            <a:pPr algn="r">
+              <a:defRPr sz="900">
                 <a:solidFill>
-                  <a:srgbClr val="A0CFA0"/>
+                  <a:srgbClr val="9AA7B6"/>
                 </a:solidFill>
-              </a:defRPr>
-            </a:pPr>
-            <a:r>
-              <a:t>Université de Mostaganem — MCB</a:t>
+                <a:latin typeface="Poppins"/>
+              </a:defRPr>
+            </a:pPr>
+            <a:r>
+              <a:rPr lang="fr-FR" sz="900">
+                <a:solidFill>
+                  <a:srgbClr val="9AA7B6"/>
+                </a:solidFill>
+                <a:latin typeface="Poppins"/>
+              </a:rPr>
+              <a:t>Université de Mostaganem — Dr. Madani BELACEL</a:t>
             </a:r>
           </a:p>
         </p:txBody>
@@ -3228,9 +3261,7 @@
   <p:cSld>
     <p:bg>
       <p:bgPr>
-        <a:solidFill>
-          <a:srgbClr val="FFFFFF"/>
-        </a:solidFill>
+        <a:solidFill>val="FFFFFF"/&gt;</a:solidFill>
         <a:effectLst/>
       </p:bgPr>
     </p:bg>
@@ -3255,9 +3286,7 @@
           <a:prstGeom prst="rect">
             <a:avLst/>
           </a:prstGeom>
-          <a:solidFill>
-            <a:srgbClr val="2C6E49"/>
-          </a:solidFill>
+          <a:solidFill>val="00875B"/&gt;</a:solidFill>
           <a:ln>
             <a:noFill/>
           </a:ln>
@@ -3308,9 +3337,7 @@
           <a:p>
             <a:pPr algn="l">
               <a:defRPr sz="2200" b="1">
-                <a:solidFill>
-                  <a:srgbClr val="1A5C33"/>
-                </a:solidFill>
+                <a:solidFill>val="006847"/&gt;</a:solidFill>
               </a:defRPr>
             </a:pPr>
             <a:r>
@@ -3346,9 +3373,7 @@
                 <a:spcPts val="600"/>
               </a:spcAft>
               <a:defRPr sz="1400">
-                <a:solidFill>
-                  <a:srgbClr val="222222"/>
-                </a:solidFill>
+                <a:solidFill>val="22344A"/&gt;</a:solidFill>
               </a:defRPr>
             </a:pPr>
             <a:r>
@@ -3361,9 +3386,7 @@
                 <a:spcPts val="600"/>
               </a:spcAft>
               <a:defRPr sz="1400">
-                <a:solidFill>
-                  <a:srgbClr val="222222"/>
-                </a:solidFill>
+                <a:solidFill>val="22344A"/&gt;</a:solidFill>
               </a:defRPr>
             </a:pPr>
             <a:r>
@@ -3376,9 +3399,7 @@
                 <a:spcPts val="600"/>
               </a:spcAft>
               <a:defRPr sz="1400">
-                <a:solidFill>
-                  <a:srgbClr val="222222"/>
-                </a:solidFill>
+                <a:solidFill>val="22344A"/&gt;</a:solidFill>
               </a:defRPr>
             </a:pPr>
             <a:r>
@@ -3391,9 +3412,7 @@
                 <a:spcPts val="600"/>
               </a:spcAft>
               <a:defRPr sz="1400">
-                <a:solidFill>
-                  <a:srgbClr val="222222"/>
-                </a:solidFill>
+                <a:solidFill>val="22344A"/&gt;</a:solidFill>
               </a:defRPr>
             </a:pPr>
             <a:r>
@@ -3406,13 +3425,52 @@
                 <a:spcPts val="600"/>
               </a:spcAft>
               <a:defRPr sz="1400">
+                <a:solidFill>val="22344A"/&gt;</a:solidFill>
+              </a:defRPr>
+            </a:pPr>
+            <a:r>
+              <a:t>• Standards d'interopérabilité: TEI (Text Encoding Initiative) pour les corpus, XML/JSON pour les données</a:t>
+            </a:r>
+          </a:p>
+        </p:txBody>
+      </p:sp>
+      <p:sp>
+        <p:nvSpPr>
+          <p:cNvPr id="990001" name="Pied de page FLE"/>
+          <p:cNvSpPr>
+            <a:spLocks noGrp="1"/>
+          </p:cNvSpPr>
+          <p:nvPr/>
+        </p:nvSpPr>
+        <p:spPr>
+          <a:xfrm>
+            <a:off x="-228600" y="6400800"/>
+            <a:ext cx="109728" cy="274320"/>
+          </a:xfrm>
+          <a:prstGeom prst="rect">
+            <a:avLst/>
+          </a:prstGeom>
+        </p:spPr>
+        <p:txBody>
+          <a:bodyPr anchor="b"/>
+          <a:lstStyle/>
+          <a:p>
+            <a:pPr algn="r">
+              <a:defRPr sz="900">
                 <a:solidFill>
-                  <a:srgbClr val="222222"/>
+                  <a:srgbClr val="9AA7B6"/>
                 </a:solidFill>
-              </a:defRPr>
-            </a:pPr>
-            <a:r>
-              <a:t>• Standards d'interopérabilité: TEI (Text Encoding Initiative) pour les corpus, XML/JSON pour les données</a:t>
+                <a:latin typeface="Poppins"/>
+              </a:defRPr>
+            </a:pPr>
+            <a:r>
+              <a:rPr lang="fr-FR" sz="900">
+                <a:solidFill>
+                  <a:srgbClr val="9AA7B6"/>
+                </a:solidFill>
+                <a:latin typeface="Poppins"/>
+              </a:rPr>
+              <a:t>Université de Mostaganem — Dr. Madani BELACEL</a:t>
             </a:r>
           </a:p>
         </p:txBody>
@@ -3430,9 +3488,7 @@
   <p:cSld>
     <p:bg>
       <p:bgPr>
-        <a:solidFill>
-          <a:srgbClr val="FFFFFF"/>
-        </a:solidFill>
+        <a:solidFill>val="FFFFFF"/&gt;</a:solidFill>
         <a:effectLst/>
       </p:bgPr>
     </p:bg>
@@ -3457,9 +3513,7 @@
           <a:prstGeom prst="rect">
             <a:avLst/>
           </a:prstGeom>
-          <a:solidFill>
-            <a:srgbClr val="2C6E49"/>
-          </a:solidFill>
+          <a:solidFill>val="00875B"/&gt;</a:solidFill>
           <a:ln>
             <a:noFill/>
           </a:ln>
@@ -3510,9 +3564,7 @@
           <a:p>
             <a:pPr algn="l">
               <a:defRPr sz="2200" b="1">
-                <a:solidFill>
-                  <a:srgbClr val="1A5C33"/>
-                </a:solidFill>
+                <a:solidFill>val="006847"/&gt;</a:solidFill>
               </a:defRPr>
             </a:pPr>
             <a:r>
@@ -3548,9 +3600,7 @@
                 <a:spcPts val="600"/>
               </a:spcAft>
               <a:defRPr sz="1400">
-                <a:solidFill>
-                  <a:srgbClr val="222222"/>
-                </a:solidFill>
+                <a:solidFill>val="22344A"/&gt;</a:solidFill>
               </a:defRPr>
             </a:pPr>
             <a:r>
@@ -3563,9 +3613,7 @@
                 <a:spcPts val="600"/>
               </a:spcAft>
               <a:defRPr sz="1400">
-                <a:solidFill>
-                  <a:srgbClr val="222222"/>
-                </a:solidFill>
+                <a:solidFill>val="22344A"/&gt;</a:solidFill>
               </a:defRPr>
             </a:pPr>
             <a:r>
@@ -3578,9 +3626,7 @@
                 <a:spcPts val="600"/>
               </a:spcAft>
               <a:defRPr sz="1400">
-                <a:solidFill>
-                  <a:srgbClr val="222222"/>
-                </a:solidFill>
+                <a:solidFill>val="22344A"/&gt;</a:solidFill>
               </a:defRPr>
             </a:pPr>
             <a:r>
@@ -3593,13 +3639,52 @@
                 <a:spcPts val="600"/>
               </a:spcAft>
               <a:defRPr sz="1400">
+                <a:solidFill>val="22344A"/&gt;</a:solidFill>
+              </a:defRPr>
+            </a:pPr>
+            <a:r>
+              <a:t>• Serveurs institutionnels et formations en humanités numériques</a:t>
+            </a:r>
+          </a:p>
+        </p:txBody>
+      </p:sp>
+      <p:sp>
+        <p:nvSpPr>
+          <p:cNvPr id="990001" name="Pied de page FLE"/>
+          <p:cNvSpPr>
+            <a:spLocks noGrp="1"/>
+          </p:cNvSpPr>
+          <p:nvPr/>
+        </p:nvSpPr>
+        <p:spPr>
+          <a:xfrm>
+            <a:off x="-228600" y="6400800"/>
+            <a:ext cx="109728" cy="274320"/>
+          </a:xfrm>
+          <a:prstGeom prst="rect">
+            <a:avLst/>
+          </a:prstGeom>
+        </p:spPr>
+        <p:txBody>
+          <a:bodyPr anchor="b"/>
+          <a:lstStyle/>
+          <a:p>
+            <a:pPr algn="r">
+              <a:defRPr sz="900">
                 <a:solidFill>
-                  <a:srgbClr val="222222"/>
+                  <a:srgbClr val="9AA7B6"/>
                 </a:solidFill>
-              </a:defRPr>
-            </a:pPr>
-            <a:r>
-              <a:t>• Serveurs institutionnels et formations en humanités numériques</a:t>
+                <a:latin typeface="Poppins"/>
+              </a:defRPr>
+            </a:pPr>
+            <a:r>
+              <a:rPr lang="fr-FR" sz="900">
+                <a:solidFill>
+                  <a:srgbClr val="9AA7B6"/>
+                </a:solidFill>
+                <a:latin typeface="Poppins"/>
+              </a:rPr>
+              <a:t>Université de Mostaganem — Dr. Madani BELACEL</a:t>
             </a:r>
           </a:p>
         </p:txBody>
@@ -3617,9 +3702,7 @@
   <p:cSld>
     <p:bg>
       <p:bgPr>
-        <a:solidFill>
-          <a:srgbClr val="FFFFFF"/>
-        </a:solidFill>
+        <a:solidFill>val="FFFFFF"/&gt;</a:solidFill>
         <a:effectLst/>
       </p:bgPr>
     </p:bg>
@@ -3644,9 +3727,7 @@
           <a:prstGeom prst="rect">
             <a:avLst/>
           </a:prstGeom>
-          <a:solidFill>
-            <a:srgbClr val="2C6E49"/>
-          </a:solidFill>
+          <a:solidFill>val="00875B"/&gt;</a:solidFill>
           <a:ln>
             <a:noFill/>
           </a:ln>
@@ -3697,9 +3778,7 @@
           <a:p>
             <a:pPr algn="l">
               <a:defRPr sz="2200" b="1">
-                <a:solidFill>
-                  <a:srgbClr val="1A5C33"/>
-                </a:solidFill>
+                <a:solidFill>val="006847"/&gt;</a:solidFill>
               </a:defRPr>
             </a:pPr>
             <a:r>
@@ -3735,9 +3814,7 @@
                 <a:spcPts val="600"/>
               </a:spcAft>
               <a:defRPr sz="1400">
-                <a:solidFill>
-                  <a:srgbClr val="222222"/>
-                </a:solidFill>
+                <a:solidFill>val="22344A"/&gt;</a:solidFill>
               </a:defRPr>
             </a:pPr>
             <a:r>
@@ -3750,29 +3827,68 @@
                 <a:spcPts val="600"/>
               </a:spcAft>
               <a:defRPr sz="1400">
+                <a:solidFill>val="22344A"/&gt;</a:solidFill>
+              </a:defRPr>
+            </a:pPr>
+            <a:r>
+              <a:t>• Types de corpus en DLE :- Corpus d'apprenants (ex. : FRIDA, CEFLE)</a:t>
+            </a:r>
+            <a:br/>
+            <a:r>
+              <a:t>- Corpus oraux (ex. : CLAPI, ESLO)</a:t>
+            </a:r>
+            <a:br/>
+            <a:r>
+              <a:t>- Corpus de manuels et supports pédagogiques</a:t>
+            </a:r>
+            <a:br/>
+            <a:r>
+              <a:t>- Corpus d'interactions en ligne (forums, chats, réseaux sociaux)</a:t>
+            </a:r>
+            <a:br/>
+            <a:r>
+              <a:t>- Corpus parallèles (traduction)</a:t>
+            </a:r>
+          </a:p>
+        </p:txBody>
+      </p:sp>
+      <p:sp>
+        <p:nvSpPr>
+          <p:cNvPr id="990001" name="Pied de page FLE"/>
+          <p:cNvSpPr>
+            <a:spLocks noGrp="1"/>
+          </p:cNvSpPr>
+          <p:nvPr/>
+        </p:nvSpPr>
+        <p:spPr>
+          <a:xfrm>
+            <a:off x="-228600" y="6400800"/>
+            <a:ext cx="109728" cy="274320"/>
+          </a:xfrm>
+          <a:prstGeom prst="rect">
+            <a:avLst/>
+          </a:prstGeom>
+        </p:spPr>
+        <p:txBody>
+          <a:bodyPr anchor="b"/>
+          <a:lstStyle/>
+          <a:p>
+            <a:pPr algn="r">
+              <a:defRPr sz="900">
                 <a:solidFill>
-                  <a:srgbClr val="222222"/>
+                  <a:srgbClr val="9AA7B6"/>
                 </a:solidFill>
-              </a:defRPr>
-            </a:pPr>
-            <a:r>
-              <a:t>• Types de corpus en DLE :- Corpus d'apprenants (ex. : FRIDA, CEFLE)</a:t>
-            </a:r>
-            <a:br/>
-            <a:r>
-              <a:t>- Corpus oraux (ex. : CLAPI, ESLO)</a:t>
-            </a:r>
-            <a:br/>
-            <a:r>
-              <a:t>- Corpus de manuels et supports pédagogiques</a:t>
-            </a:r>
-            <a:br/>
-            <a:r>
-              <a:t>- Corpus d'interactions en ligne (forums, chats, réseaux sociaux)</a:t>
-            </a:r>
-            <a:br/>
-            <a:r>
-              <a:t>- Corpus parallèles (traduction)</a:t>
+                <a:latin typeface="Poppins"/>
+              </a:defRPr>
+            </a:pPr>
+            <a:r>
+              <a:rPr lang="fr-FR" sz="900">
+                <a:solidFill>
+                  <a:srgbClr val="9AA7B6"/>
+                </a:solidFill>
+                <a:latin typeface="Poppins"/>
+              </a:rPr>
+              <a:t>Université de Mostaganem — Dr. Madani BELACEL</a:t>
             </a:r>
           </a:p>
         </p:txBody>
@@ -3790,9 +3906,7 @@
   <p:cSld>
     <p:bg>
       <p:bgPr>
-        <a:solidFill>
-          <a:srgbClr val="E8F0E9"/>
-        </a:solidFill>
+        <a:solidFill>val="F4F6F8"/&gt;</a:solidFill>
         <a:effectLst/>
       </p:bgPr>
     </p:bg>
@@ -3827,9 +3941,7 @@
           <a:p>
             <a:pPr algn="ctr">
               <a:defRPr sz="2600" b="1">
-                <a:solidFill>
-                  <a:srgbClr val="1A5C33"/>
-                </a:solidFill>
+                <a:solidFill>val="006847"/&gt;</a:solidFill>
               </a:defRPr>
             </a:pPr>
             <a:r>
@@ -3865,9 +3977,7 @@
                 <a:spcPts val="600"/>
               </a:spcAft>
               <a:defRPr sz="1600">
-                <a:solidFill>
-                  <a:srgbClr val="222222"/>
-                </a:solidFill>
+                <a:solidFill>val="22344A"/&gt;</a:solidFill>
               </a:defRPr>
             </a:pPr>
             <a:r>
@@ -3880,9 +3990,7 @@
                 <a:spcPts val="600"/>
               </a:spcAft>
               <a:defRPr sz="1600">
-                <a:solidFill>
-                  <a:srgbClr val="222222"/>
-                </a:solidFill>
+                <a:solidFill>val="22344A"/&gt;</a:solidFill>
               </a:defRPr>
             </a:pPr>
             <a:r>
@@ -3907,9 +4015,7 @@
                 <a:spcPts val="600"/>
               </a:spcAft>
               <a:defRPr sz="1600">
-                <a:solidFill>
-                  <a:srgbClr val="222222"/>
-                </a:solidFill>
+                <a:solidFill>val="22344A"/&gt;</a:solidFill>
               </a:defRPr>
             </a:pPr>
             <a:r>
@@ -3922,9 +4028,7 @@
                 <a:spcPts val="600"/>
               </a:spcAft>
               <a:defRPr sz="1600">
-                <a:solidFill>
-                  <a:srgbClr val="222222"/>
-                </a:solidFill>
+                <a:solidFill>val="22344A"/&gt;</a:solidFill>
               </a:defRPr>
             </a:pPr>
             <a:r>
@@ -3937,13 +4041,52 @@
                 <a:spcPts val="600"/>
               </a:spcAft>
               <a:defRPr sz="1600">
+                <a:solidFill>val="22344A"/&gt;</a:solidFill>
+              </a:defRPr>
+            </a:pPr>
+            <a:r>
+              <a:t>• Introduction : Pourquoi l'informatique pour la recherche en DLE ?</a:t>
+            </a:r>
+          </a:p>
+        </p:txBody>
+      </p:sp>
+      <p:sp>
+        <p:nvSpPr>
+          <p:cNvPr id="990001" name="Pied de page FLE"/>
+          <p:cNvSpPr>
+            <a:spLocks noGrp="1"/>
+          </p:cNvSpPr>
+          <p:nvPr/>
+        </p:nvSpPr>
+        <p:spPr>
+          <a:xfrm>
+            <a:off x="2971800" y="182880"/>
+            <a:ext cx="4572000" cy="274320"/>
+          </a:xfrm>
+          <a:prstGeom prst="rect">
+            <a:avLst/>
+          </a:prstGeom>
+        </p:spPr>
+        <p:txBody>
+          <a:bodyPr anchor="b"/>
+          <a:lstStyle/>
+          <a:p>
+            <a:pPr algn="r">
+              <a:defRPr sz="900">
                 <a:solidFill>
-                  <a:srgbClr val="222222"/>
+                  <a:srgbClr val="9AA7B6"/>
                 </a:solidFill>
-              </a:defRPr>
-            </a:pPr>
-            <a:r>
-              <a:t>• Introduction : Pourquoi l'informatique pour la recherche en DLE ?</a:t>
+                <a:latin typeface="Poppins"/>
+              </a:defRPr>
+            </a:pPr>
+            <a:r>
+              <a:rPr lang="fr-FR" sz="900">
+                <a:solidFill>
+                  <a:srgbClr val="9AA7B6"/>
+                </a:solidFill>
+                <a:latin typeface="Poppins"/>
+              </a:rPr>
+              <a:t>Université de Mostaganem — Dr. Madani BELACEL</a:t>
             </a:r>
           </a:p>
         </p:txBody>
@@ -3961,9 +4104,7 @@
   <p:cSld>
     <p:bg>
       <p:bgPr>
-        <a:solidFill>
-          <a:srgbClr val="FFFFFF"/>
-        </a:solidFill>
+        <a:solidFill>val="FFFFFF"/&gt;</a:solidFill>
         <a:effectLst/>
       </p:bgPr>
     </p:bg>
@@ -3998,9 +4139,7 @@
           <a:p>
             <a:pPr algn="ctr">
               <a:defRPr sz="2600" b="1">
-                <a:solidFill>
-                  <a:srgbClr val="1A5C33"/>
-                </a:solidFill>
+                <a:solidFill>val="006847"/&gt;</a:solidFill>
               </a:defRPr>
             </a:pPr>
             <a:r>
@@ -4036,9 +4175,7 @@
                 <a:spcPts val="600"/>
               </a:spcAft>
               <a:defRPr sz="1500">
-                <a:solidFill>
-                  <a:srgbClr val="222222"/>
-                </a:solidFill>
+                <a:solidFill>val="22344A"/&gt;</a:solidFill>
               </a:defRPr>
             </a:pPr>
             <a:r>
@@ -4051,9 +4188,7 @@
                 <a:spcPts val="600"/>
               </a:spcAft>
               <a:defRPr sz="1500">
-                <a:solidFill>
-                  <a:srgbClr val="222222"/>
-                </a:solidFill>
+                <a:solidFill>val="22344A"/&gt;</a:solidFill>
               </a:defRPr>
             </a:pPr>
             <a:r>
@@ -4066,9 +4201,7 @@
                 <a:spcPts val="600"/>
               </a:spcAft>
               <a:defRPr sz="1500">
-                <a:solidFill>
-                  <a:srgbClr val="222222"/>
-                </a:solidFill>
+                <a:solidFill>val="22344A"/&gt;</a:solidFill>
               </a:defRPr>
             </a:pPr>
             <a:r>
@@ -4081,9 +4214,7 @@
                 <a:spcPts val="600"/>
               </a:spcAft>
               <a:defRPr sz="1500">
-                <a:solidFill>
-                  <a:srgbClr val="222222"/>
-                </a:solidFill>
+                <a:solidFill>val="22344A"/&gt;</a:solidFill>
               </a:defRPr>
             </a:pPr>
             <a:r>
@@ -4096,13 +4227,52 @@
                 <a:spcPts val="600"/>
               </a:spcAft>
               <a:defRPr sz="1500">
+                <a:solidFill>val="22344A"/&gt;</a:solidFill>
+              </a:defRPr>
+            </a:pPr>
+            <a:r>
+              <a:t>• Préparer une courte présentation orale</a:t>
+            </a:r>
+          </a:p>
+        </p:txBody>
+      </p:sp>
+      <p:sp>
+        <p:nvSpPr>
+          <p:cNvPr id="990001" name="Pied de page FLE"/>
+          <p:cNvSpPr>
+            <a:spLocks noGrp="1"/>
+          </p:cNvSpPr>
+          <p:nvPr/>
+        </p:nvSpPr>
+        <p:spPr>
+          <a:xfrm>
+            <a:off x="2971800" y="182880"/>
+            <a:ext cx="4572000" cy="274320"/>
+          </a:xfrm>
+          <a:prstGeom prst="rect">
+            <a:avLst/>
+          </a:prstGeom>
+        </p:spPr>
+        <p:txBody>
+          <a:bodyPr anchor="b"/>
+          <a:lstStyle/>
+          <a:p>
+            <a:pPr algn="r">
+              <a:defRPr sz="900">
                 <a:solidFill>
-                  <a:srgbClr val="222222"/>
+                  <a:srgbClr val="9AA7B6"/>
                 </a:solidFill>
-              </a:defRPr>
-            </a:pPr>
-            <a:r>
-              <a:t>• Préparer une courte présentation orale</a:t>
+                <a:latin typeface="Poppins"/>
+              </a:defRPr>
+            </a:pPr>
+            <a:r>
+              <a:rPr lang="fr-FR" sz="900">
+                <a:solidFill>
+                  <a:srgbClr val="9AA7B6"/>
+                </a:solidFill>
+                <a:latin typeface="Poppins"/>
+              </a:rPr>
+              <a:t>Université de Mostaganem — Dr. Madani BELACEL</a:t>
             </a:r>
           </a:p>
         </p:txBody>
@@ -4120,9 +4290,7 @@
   <p:cSld>
     <p:bg>
       <p:bgPr>
-        <a:solidFill>
-          <a:srgbClr val="1A5C33"/>
-        </a:solidFill>
+        <a:solidFill>val="006847"/&gt;</a:solidFill>
         <a:effectLst/>
       </p:bgPr>
     </p:bg>
@@ -4157,9 +4325,7 @@
           <a:p>
             <a:pPr algn="ctr">
               <a:defRPr sz="2800" b="1">
-                <a:solidFill>
-                  <a:srgbClr val="FFFFFF"/>
-                </a:solidFill>
+                <a:solidFill>val="FFFFFF"/&gt;</a:solidFill>
               </a:defRPr>
             </a:pPr>
             <a:r>
@@ -4192,25 +4358,64 @@
           <a:p>
             <a:pPr algn="ctr">
               <a:defRPr sz="1800" b="0">
+                <a:solidFill>val="DFE5EA"/&gt;</a:solidFill>
+              </a:defRPr>
+            </a:pPr>
+            <a:r>
+              <a:t>Dr. BELACEL Madani</a:t>
+            </a:r>
+            <a:br/>
+            <a:r>
+              <a:t>Maître de Conférences B</a:t>
+            </a:r>
+            <a:br/>
+            <a:r>
+              <a:t>Université de Mostaganem</a:t>
+            </a:r>
+            <a:br/>
+            <a:r>
+              <a:t>madani.belacel@univ-mosta.dz</a:t>
+            </a:r>
+          </a:p>
+        </p:txBody>
+      </p:sp>
+      <p:sp>
+        <p:nvSpPr>
+          <p:cNvPr id="990001" name="Pied de page FLE"/>
+          <p:cNvSpPr>
+            <a:spLocks noGrp="1"/>
+          </p:cNvSpPr>
+          <p:nvPr/>
+        </p:nvSpPr>
+        <p:spPr>
+          <a:xfrm>
+            <a:off x="2880360" y="457200"/>
+            <a:ext cx="4572000" cy="274320"/>
+          </a:xfrm>
+          <a:prstGeom prst="rect">
+            <a:avLst/>
+          </a:prstGeom>
+        </p:spPr>
+        <p:txBody>
+          <a:bodyPr anchor="b"/>
+          <a:lstStyle/>
+          <a:p>
+            <a:pPr algn="r">
+              <a:defRPr sz="900">
                 <a:solidFill>
-                  <a:srgbClr val="C5D9C7"/>
+                  <a:srgbClr val="9AA7B6"/>
                 </a:solidFill>
-              </a:defRPr>
-            </a:pPr>
-            <a:r>
-              <a:t>Dr. BELACEL Madani</a:t>
-            </a:r>
-            <a:br/>
-            <a:r>
-              <a:t>Maître de Conférences B</a:t>
-            </a:r>
-            <a:br/>
-            <a:r>
-              <a:t>Université de Mostaganem</a:t>
-            </a:r>
-            <a:br/>
-            <a:r>
-              <a:t>madani.belacel@univ-mosta.dz</a:t>
+                <a:latin typeface="Poppins"/>
+              </a:defRPr>
+            </a:pPr>
+            <a:r>
+              <a:rPr lang="fr-FR" sz="900">
+                <a:solidFill>
+                  <a:srgbClr val="9AA7B6"/>
+                </a:solidFill>
+                <a:latin typeface="Poppins"/>
+              </a:rPr>
+              <a:t>Université de Mostaganem — Dr. Madani BELACEL</a:t>
             </a:r>
           </a:p>
         </p:txBody>
@@ -4228,9 +4433,7 @@
   <p:cSld>
     <p:bg>
       <p:bgPr>
-        <a:solidFill>
-          <a:srgbClr val="FFFFFF"/>
-        </a:solidFill>
+        <a:solidFill>val="FFFFFF"/&gt;</a:solidFill>
         <a:effectLst/>
       </p:bgPr>
     </p:bg>
@@ -4265,9 +4468,7 @@
           <a:p>
             <a:pPr algn="l">
               <a:defRPr sz="2600" b="1">
-                <a:solidFill>
-                  <a:srgbClr val="1A5C33"/>
-                </a:solidFill>
+                <a:solidFill>val="006847"/&gt;</a:solidFill>
               </a:defRPr>
             </a:pPr>
             <a:r>
@@ -4303,9 +4504,7 @@
                 <a:spcPts val="600"/>
               </a:spcAft>
               <a:defRPr sz="1500">
-                <a:solidFill>
-                  <a:srgbClr val="222222"/>
-                </a:solidFill>
+                <a:solidFill>val="22344A"/&gt;</a:solidFill>
               </a:defRPr>
             </a:pPr>
             <a:r>
@@ -4330,9 +4529,7 @@
                 <a:spcPts val="600"/>
               </a:spcAft>
               <a:defRPr sz="1500">
-                <a:solidFill>
-                  <a:srgbClr val="222222"/>
-                </a:solidFill>
+                <a:solidFill>val="22344A"/&gt;</a:solidFill>
               </a:defRPr>
             </a:pPr>
             <a:r>
@@ -4361,9 +4558,7 @@
                 <a:spcPts val="600"/>
               </a:spcAft>
               <a:defRPr sz="1500">
-                <a:solidFill>
-                  <a:srgbClr val="222222"/>
-                </a:solidFill>
+                <a:solidFill>val="22344A"/&gt;</a:solidFill>
               </a:defRPr>
             </a:pPr>
             <a:r>
@@ -4384,25 +4579,64 @@
                 <a:spcPts val="600"/>
               </a:spcAft>
               <a:defRPr sz="1500">
+                <a:solidFill>val="22344A"/&gt;</a:solidFill>
+              </a:defRPr>
+            </a:pPr>
+            <a:r>
+              <a:t>• Mode d'évaluation :- Projet d'analyse de corpus (compte rendu méthodologique) : 40 %</a:t>
+            </a:r>
+            <a:br/>
+            <a:r>
+              <a:t>- Présentation orale d'un outil TAL pour la DLE : 30 %</a:t>
+            </a:r>
+            <a:br/>
+            <a:r>
+              <a:t>- QCM de validation : 20 %</a:t>
+            </a:r>
+            <a:br/>
+            <a:r>
+              <a:t>- Participation active : 10 %</a:t>
+            </a:r>
+          </a:p>
+        </p:txBody>
+      </p:sp>
+      <p:sp>
+        <p:nvSpPr>
+          <p:cNvPr id="990001" name="Pied de page FLE"/>
+          <p:cNvSpPr>
+            <a:spLocks noGrp="1"/>
+          </p:cNvSpPr>
+          <p:nvPr/>
+        </p:nvSpPr>
+        <p:spPr>
+          <a:xfrm>
+            <a:off x="2971800" y="182880"/>
+            <a:ext cx="4572000" cy="274320"/>
+          </a:xfrm>
+          <a:prstGeom prst="rect">
+            <a:avLst/>
+          </a:prstGeom>
+        </p:spPr>
+        <p:txBody>
+          <a:bodyPr anchor="b"/>
+          <a:lstStyle/>
+          <a:p>
+            <a:pPr algn="r">
+              <a:defRPr sz="900">
                 <a:solidFill>
-                  <a:srgbClr val="222222"/>
+                  <a:srgbClr val="9AA7B6"/>
                 </a:solidFill>
-              </a:defRPr>
-            </a:pPr>
-            <a:r>
-              <a:t>• Mode d'évaluation :- Projet d'analyse de corpus (compte rendu méthodologique) : 40 %</a:t>
-            </a:r>
-            <a:br/>
-            <a:r>
-              <a:t>- Présentation orale d'un outil TAL pour la DLE : 30 %</a:t>
-            </a:r>
-            <a:br/>
-            <a:r>
-              <a:t>- QCM de validation : 20 %</a:t>
-            </a:r>
-            <a:br/>
-            <a:r>
-              <a:t>- Participation active : 10 %</a:t>
+                <a:latin typeface="Poppins"/>
+              </a:defRPr>
+            </a:pPr>
+            <a:r>
+              <a:rPr lang="fr-FR" sz="900">
+                <a:solidFill>
+                  <a:srgbClr val="9AA7B6"/>
+                </a:solidFill>
+                <a:latin typeface="Poppins"/>
+              </a:rPr>
+              <a:t>Université de Mostaganem — Dr. Madani BELACEL</a:t>
             </a:r>
           </a:p>
         </p:txBody>
@@ -4420,9 +4654,7 @@
   <p:cSld>
     <p:bg>
       <p:bgPr>
-        <a:solidFill>
-          <a:srgbClr val="FFFFFF"/>
-        </a:solidFill>
+        <a:solidFill>val="FFFFFF"/&gt;</a:solidFill>
         <a:effectLst/>
       </p:bgPr>
     </p:bg>
@@ -4457,9 +4689,7 @@
           <a:p>
             <a:pPr algn="l">
               <a:defRPr sz="2600" b="1">
-                <a:solidFill>
-                  <a:srgbClr val="1A5C33"/>
-                </a:solidFill>
+                <a:solidFill>val="006847"/&gt;</a:solidFill>
               </a:defRPr>
             </a:pPr>
             <a:r>
@@ -4495,9 +4725,7 @@
                 <a:spcPts val="600"/>
               </a:spcAft>
               <a:defRPr sz="1600">
-                <a:solidFill>
-                  <a:srgbClr val="222222"/>
-                </a:solidFill>
+                <a:solidFill>val="22344A"/&gt;</a:solidFill>
               </a:defRPr>
             </a:pPr>
             <a:r>
@@ -4510,9 +4738,7 @@
                 <a:spcPts val="600"/>
               </a:spcAft>
               <a:defRPr sz="1600">
-                <a:solidFill>
-                  <a:srgbClr val="222222"/>
-                </a:solidFill>
+                <a:solidFill>val="22344A"/&gt;</a:solidFill>
               </a:defRPr>
             </a:pPr>
             <a:r>
@@ -4525,9 +4751,7 @@
                 <a:spcPts val="600"/>
               </a:spcAft>
               <a:defRPr sz="1600">
-                <a:solidFill>
-                  <a:srgbClr val="222222"/>
-                </a:solidFill>
+                <a:solidFill>val="22344A"/&gt;</a:solidFill>
               </a:defRPr>
             </a:pPr>
             <a:r>
@@ -4540,9 +4764,7 @@
                 <a:spcPts val="600"/>
               </a:spcAft>
               <a:defRPr sz="1600">
-                <a:solidFill>
-                  <a:srgbClr val="222222"/>
-                </a:solidFill>
+                <a:solidFill>val="22344A"/&gt;</a:solidFill>
               </a:defRPr>
             </a:pPr>
             <a:r>
@@ -4555,9 +4777,7 @@
                 <a:spcPts val="600"/>
               </a:spcAft>
               <a:defRPr sz="1600">
-                <a:solidFill>
-                  <a:srgbClr val="222222"/>
-                </a:solidFill>
+                <a:solidFill>val="22344A"/&gt;</a:solidFill>
               </a:defRPr>
             </a:pPr>
             <a:r>
@@ -4570,9 +4790,7 @@
                 <a:spcPts val="600"/>
               </a:spcAft>
               <a:defRPr sz="1600">
-                <a:solidFill>
-                  <a:srgbClr val="222222"/>
-                </a:solidFill>
+                <a:solidFill>val="22344A"/&gt;</a:solidFill>
               </a:defRPr>
             </a:pPr>
             <a:r>
@@ -4585,9 +4803,7 @@
                 <a:spcPts val="600"/>
               </a:spcAft>
               <a:defRPr sz="1600">
-                <a:solidFill>
-                  <a:srgbClr val="222222"/>
-                </a:solidFill>
+                <a:solidFill>val="22344A"/&gt;</a:solidFill>
               </a:defRPr>
             </a:pPr>
             <a:r>
@@ -4600,9 +4816,7 @@
                 <a:spcPts val="600"/>
               </a:spcAft>
               <a:defRPr sz="1600">
-                <a:solidFill>
-                  <a:srgbClr val="222222"/>
-                </a:solidFill>
+                <a:solidFill>val="22344A"/&gt;</a:solidFill>
               </a:defRPr>
             </a:pPr>
             <a:r>
@@ -4615,9 +4829,7 @@
                 <a:spcPts val="600"/>
               </a:spcAft>
               <a:defRPr sz="1600">
-                <a:solidFill>
-                  <a:srgbClr val="222222"/>
-                </a:solidFill>
+                <a:solidFill>val="22344A"/&gt;</a:solidFill>
               </a:defRPr>
             </a:pPr>
             <a:r>
@@ -4630,13 +4842,52 @@
                 <a:spcPts val="600"/>
               </a:spcAft>
               <a:defRPr sz="1600">
+                <a:solidFill>val="22344A"/&gt;</a:solidFill>
+              </a:defRPr>
+            </a:pPr>
+            <a:r>
+              <a:t>• 3.3 Méthodologie d'analyse de corpus pour le mémoire M2</a:t>
+            </a:r>
+          </a:p>
+        </p:txBody>
+      </p:sp>
+      <p:sp>
+        <p:nvSpPr>
+          <p:cNvPr id="990001" name="Pied de page FLE"/>
+          <p:cNvSpPr>
+            <a:spLocks noGrp="1"/>
+          </p:cNvSpPr>
+          <p:nvPr/>
+        </p:nvSpPr>
+        <p:spPr>
+          <a:xfrm>
+            <a:off x="2971800" y="182880"/>
+            <a:ext cx="4572000" cy="274320"/>
+          </a:xfrm>
+          <a:prstGeom prst="rect">
+            <a:avLst/>
+          </a:prstGeom>
+        </p:spPr>
+        <p:txBody>
+          <a:bodyPr anchor="b"/>
+          <a:lstStyle/>
+          <a:p>
+            <a:pPr algn="r">
+              <a:defRPr sz="900">
                 <a:solidFill>
-                  <a:srgbClr val="222222"/>
+                  <a:srgbClr val="9AA7B6"/>
                 </a:solidFill>
-              </a:defRPr>
-            </a:pPr>
-            <a:r>
-              <a:t>• 3.3 Méthodologie d'analyse de corpus pour le mémoire M2</a:t>
+                <a:latin typeface="Poppins"/>
+              </a:defRPr>
+            </a:pPr>
+            <a:r>
+              <a:rPr lang="fr-FR" sz="900">
+                <a:solidFill>
+                  <a:srgbClr val="9AA7B6"/>
+                </a:solidFill>
+                <a:latin typeface="Poppins"/>
+              </a:rPr>
+              <a:t>Université de Mostaganem — Dr. Madani BELACEL</a:t>
             </a:r>
           </a:p>
         </p:txBody>
@@ -4654,9 +4905,7 @@
   <p:cSld>
     <p:bg>
       <p:bgPr>
-        <a:solidFill>
-          <a:srgbClr val="FFFFFF"/>
-        </a:solidFill>
+        <a:solidFill>val="FFFFFF"/&gt;</a:solidFill>
         <a:effectLst/>
       </p:bgPr>
     </p:bg>
@@ -4681,9 +4930,7 @@
           <a:prstGeom prst="rect">
             <a:avLst/>
           </a:prstGeom>
-          <a:solidFill>
-            <a:srgbClr val="2C6E49"/>
-          </a:solidFill>
+          <a:solidFill>val="00875B"/&gt;</a:solidFill>
           <a:ln>
             <a:noFill/>
           </a:ln>
@@ -4734,9 +4981,7 @@
           <a:p>
             <a:pPr algn="l">
               <a:defRPr sz="2200" b="1">
-                <a:solidFill>
-                  <a:srgbClr val="1A5C33"/>
-                </a:solidFill>
+                <a:solidFill>val="006847"/&gt;</a:solidFill>
               </a:defRPr>
             </a:pPr>
             <a:r>
@@ -4772,9 +5017,7 @@
                 <a:spcPts val="600"/>
               </a:spcAft>
               <a:defRPr sz="1400">
-                <a:solidFill>
-                  <a:srgbClr val="222222"/>
-                </a:solidFill>
+                <a:solidFill>val="22344A"/&gt;</a:solidFill>
               </a:defRPr>
             </a:pPr>
             <a:r>
@@ -4787,13 +5030,52 @@
                 <a:spcPts val="600"/>
               </a:spcAft>
               <a:defRPr sz="1400">
+                <a:solidFill>val="22344A"/&gt;</a:solidFill>
+              </a:defRPr>
+            </a:pPr>
+            <a:r>
+              <a:t>• Prérequis académiques :Cours TIC 01 (Introduction aux TIC) ; notions de base en statistique descriptive ; maîtrise des environnements numériques de travail.</a:t>
+            </a:r>
+          </a:p>
+        </p:txBody>
+      </p:sp>
+      <p:sp>
+        <p:nvSpPr>
+          <p:cNvPr id="990001" name="Pied de page FLE"/>
+          <p:cNvSpPr>
+            <a:spLocks noGrp="1"/>
+          </p:cNvSpPr>
+          <p:nvPr/>
+        </p:nvSpPr>
+        <p:spPr>
+          <a:xfrm>
+            <a:off x="-228600" y="6400800"/>
+            <a:ext cx="109728" cy="274320"/>
+          </a:xfrm>
+          <a:prstGeom prst="rect">
+            <a:avLst/>
+          </a:prstGeom>
+        </p:spPr>
+        <p:txBody>
+          <a:bodyPr anchor="b"/>
+          <a:lstStyle/>
+          <a:p>
+            <a:pPr algn="r">
+              <a:defRPr sz="900">
                 <a:solidFill>
-                  <a:srgbClr val="222222"/>
+                  <a:srgbClr val="9AA7B6"/>
                 </a:solidFill>
-              </a:defRPr>
-            </a:pPr>
-            <a:r>
-              <a:t>• Prérequis académiques :Cours TIC 01 (Introduction aux TIC) ; notions de base en statistique descriptive ; maîtrise des environnements numériques de travail.</a:t>
+                <a:latin typeface="Poppins"/>
+              </a:defRPr>
+            </a:pPr>
+            <a:r>
+              <a:rPr lang="fr-FR" sz="900">
+                <a:solidFill>
+                  <a:srgbClr val="9AA7B6"/>
+                </a:solidFill>
+                <a:latin typeface="Poppins"/>
+              </a:rPr>
+              <a:t>Université de Mostaganem — Dr. Madani BELACEL</a:t>
             </a:r>
           </a:p>
         </p:txBody>
@@ -4811,9 +5093,7 @@
   <p:cSld>
     <p:bg>
       <p:bgPr>
-        <a:solidFill>
-          <a:srgbClr val="FFFFFF"/>
-        </a:solidFill>
+        <a:solidFill>val="FFFFFF"/&gt;</a:solidFill>
         <a:effectLst/>
       </p:bgPr>
     </p:bg>
@@ -4838,9 +5118,7 @@
           <a:prstGeom prst="rect">
             <a:avLst/>
           </a:prstGeom>
-          <a:solidFill>
-            <a:srgbClr val="2C6E49"/>
-          </a:solidFill>
+          <a:solidFill>val="00875B"/&gt;</a:solidFill>
           <a:ln>
             <a:noFill/>
           </a:ln>
@@ -4891,9 +5169,7 @@
           <a:p>
             <a:pPr algn="l">
               <a:defRPr sz="2200" b="1">
-                <a:solidFill>
-                  <a:srgbClr val="1A5C33"/>
-                </a:solidFill>
+                <a:solidFill>val="006847"/&gt;</a:solidFill>
               </a:defRPr>
             </a:pPr>
             <a:r>
@@ -4929,9 +5205,7 @@
                 <a:spcPts val="600"/>
               </a:spcAft>
               <a:defRPr sz="1400">
-                <a:solidFill>
-                  <a:srgbClr val="222222"/>
-                </a:solidFill>
+                <a:solidFill>val="22344A"/&gt;</a:solidFill>
               </a:defRPr>
             </a:pPr>
             <a:r>
@@ -4956,9 +5230,7 @@
                 <a:spcPts val="600"/>
               </a:spcAft>
               <a:defRPr sz="1400">
-                <a:solidFill>
-                  <a:srgbClr val="222222"/>
-                </a:solidFill>
+                <a:solidFill>val="22344A"/&gt;</a:solidFill>
               </a:defRPr>
             </a:pPr>
             <a:r>
@@ -4987,9 +5259,7 @@
                 <a:spcPts val="600"/>
               </a:spcAft>
               <a:defRPr sz="1400">
-                <a:solidFill>
-                  <a:srgbClr val="222222"/>
-                </a:solidFill>
+                <a:solidFill>val="22344A"/&gt;</a:solidFill>
               </a:defRPr>
             </a:pPr>
             <a:r>
@@ -5010,25 +5280,64 @@
                 <a:spcPts val="600"/>
               </a:spcAft>
               <a:defRPr sz="1400">
+                <a:solidFill>val="22344A"/&gt;</a:solidFill>
+              </a:defRPr>
+            </a:pPr>
+            <a:r>
+              <a:t>• Mode d'évaluation :- Projet d'analyse de corpus (compte rendu méthodologique) : 40 %</a:t>
+            </a:r>
+            <a:br/>
+            <a:r>
+              <a:t>- Présentation orale d'un outil TAL pour la DLE : 30 %</a:t>
+            </a:r>
+            <a:br/>
+            <a:r>
+              <a:t>- QCM de validation : 20 %</a:t>
+            </a:r>
+            <a:br/>
+            <a:r>
+              <a:t>- Participation active : 10 %</a:t>
+            </a:r>
+          </a:p>
+        </p:txBody>
+      </p:sp>
+      <p:sp>
+        <p:nvSpPr>
+          <p:cNvPr id="990001" name="Pied de page FLE"/>
+          <p:cNvSpPr>
+            <a:spLocks noGrp="1"/>
+          </p:cNvSpPr>
+          <p:nvPr/>
+        </p:nvSpPr>
+        <p:spPr>
+          <a:xfrm>
+            <a:off x="-228600" y="6400800"/>
+            <a:ext cx="109728" cy="274320"/>
+          </a:xfrm>
+          <a:prstGeom prst="rect">
+            <a:avLst/>
+          </a:prstGeom>
+        </p:spPr>
+        <p:txBody>
+          <a:bodyPr anchor="b"/>
+          <a:lstStyle/>
+          <a:p>
+            <a:pPr algn="r">
+              <a:defRPr sz="900">
                 <a:solidFill>
-                  <a:srgbClr val="222222"/>
+                  <a:srgbClr val="9AA7B6"/>
                 </a:solidFill>
-              </a:defRPr>
-            </a:pPr>
-            <a:r>
-              <a:t>• Mode d'évaluation :- Projet d'analyse de corpus (compte rendu méthodologique) : 40 %</a:t>
-            </a:r>
-            <a:br/>
-            <a:r>
-              <a:t>- Présentation orale d'un outil TAL pour la DLE : 30 %</a:t>
-            </a:r>
-            <a:br/>
-            <a:r>
-              <a:t>- QCM de validation : 20 %</a:t>
-            </a:r>
-            <a:br/>
-            <a:r>
-              <a:t>- Participation active : 10 %</a:t>
+                <a:latin typeface="Poppins"/>
+              </a:defRPr>
+            </a:pPr>
+            <a:r>
+              <a:rPr lang="fr-FR" sz="900">
+                <a:solidFill>
+                  <a:srgbClr val="9AA7B6"/>
+                </a:solidFill>
+                <a:latin typeface="Poppins"/>
+              </a:rPr>
+              <a:t>Université de Mostaganem — Dr. Madani BELACEL</a:t>
             </a:r>
           </a:p>
         </p:txBody>
@@ -5046,9 +5355,7 @@
   <p:cSld>
     <p:bg>
       <p:bgPr>
-        <a:solidFill>
-          <a:srgbClr val="FFFFFF"/>
-        </a:solidFill>
+        <a:solidFill>val="FFFFFF"/&gt;</a:solidFill>
         <a:effectLst/>
       </p:bgPr>
     </p:bg>
@@ -5073,9 +5380,7 @@
           <a:prstGeom prst="rect">
             <a:avLst/>
           </a:prstGeom>
-          <a:solidFill>
-            <a:srgbClr val="2C6E49"/>
-          </a:solidFill>
+          <a:solidFill>val="00875B"/&gt;</a:solidFill>
           <a:ln>
             <a:noFill/>
           </a:ln>
@@ -5126,9 +5431,7 @@
           <a:p>
             <a:pPr algn="l">
               <a:defRPr sz="2200" b="1">
-                <a:solidFill>
-                  <a:srgbClr val="1A5C33"/>
-                </a:solidFill>
+                <a:solidFill>val="006847"/&gt;</a:solidFill>
               </a:defRPr>
             </a:pPr>
             <a:r>
@@ -5164,9 +5467,7 @@
                 <a:spcPts val="600"/>
               </a:spcAft>
               <a:defRPr sz="1400">
-                <a:solidFill>
-                  <a:srgbClr val="222222"/>
-                </a:solidFill>
+                <a:solidFill>val="22344A"/&gt;</a:solidFill>
               </a:defRPr>
             </a:pPr>
             <a:r>
@@ -5179,9 +5480,7 @@
                 <a:spcPts val="600"/>
               </a:spcAft>
               <a:defRPr sz="1400">
-                <a:solidFill>
-                  <a:srgbClr val="222222"/>
-                </a:solidFill>
+                <a:solidFill>val="22344A"/&gt;</a:solidFill>
               </a:defRPr>
             </a:pPr>
             <a:r>
@@ -5194,9 +5493,7 @@
                 <a:spcPts val="600"/>
               </a:spcAft>
               <a:defRPr sz="1400">
-                <a:solidFill>
-                  <a:srgbClr val="222222"/>
-                </a:solidFill>
+                <a:solidFill>val="22344A"/&gt;</a:solidFill>
               </a:defRPr>
             </a:pPr>
             <a:r>
@@ -5209,9 +5506,7 @@
                 <a:spcPts val="600"/>
               </a:spcAft>
               <a:defRPr sz="1400">
-                <a:solidFill>
-                  <a:srgbClr val="222222"/>
-                </a:solidFill>
+                <a:solidFill>val="22344A"/&gt;</a:solidFill>
               </a:defRPr>
             </a:pPr>
             <a:r>
@@ -5224,13 +5519,52 @@
                 <a:spcPts val="600"/>
               </a:spcAft>
               <a:defRPr sz="1400">
+                <a:solidFill>val="22344A"/&gt;</a:solidFill>
+              </a:defRPr>
+            </a:pPr>
+            <a:r>
+              <a:t>• Boulton, A., &amp; Cobb, T. (2017). Corpus use in language learning: A meta-analysis.Language Learning, 67(2), 348-393.</a:t>
+            </a:r>
+          </a:p>
+        </p:txBody>
+      </p:sp>
+      <p:sp>
+        <p:nvSpPr>
+          <p:cNvPr id="990001" name="Pied de page FLE"/>
+          <p:cNvSpPr>
+            <a:spLocks noGrp="1"/>
+          </p:cNvSpPr>
+          <p:nvPr/>
+        </p:nvSpPr>
+        <p:spPr>
+          <a:xfrm>
+            <a:off x="-228600" y="6400800"/>
+            <a:ext cx="109728" cy="274320"/>
+          </a:xfrm>
+          <a:prstGeom prst="rect">
+            <a:avLst/>
+          </a:prstGeom>
+        </p:spPr>
+        <p:txBody>
+          <a:bodyPr anchor="b"/>
+          <a:lstStyle/>
+          <a:p>
+            <a:pPr algn="r">
+              <a:defRPr sz="900">
                 <a:solidFill>
-                  <a:srgbClr val="222222"/>
+                  <a:srgbClr val="9AA7B6"/>
                 </a:solidFill>
-              </a:defRPr>
-            </a:pPr>
-            <a:r>
-              <a:t>• Boulton, A., &amp; Cobb, T. (2017). Corpus use in language learning: A meta-analysis.Language Learning, 67(2), 348-393.</a:t>
+                <a:latin typeface="Poppins"/>
+              </a:defRPr>
+            </a:pPr>
+            <a:r>
+              <a:rPr lang="fr-FR" sz="900">
+                <a:solidFill>
+                  <a:srgbClr val="9AA7B6"/>
+                </a:solidFill>
+                <a:latin typeface="Poppins"/>
+              </a:rPr>
+              <a:t>Université de Mostaganem — Dr. Madani BELACEL</a:t>
             </a:r>
           </a:p>
         </p:txBody>
@@ -5248,9 +5582,7 @@
   <p:cSld>
     <p:bg>
       <p:bgPr>
-        <a:solidFill>
-          <a:srgbClr val="FFFFFF"/>
-        </a:solidFill>
+        <a:solidFill>val="FFFFFF"/&gt;</a:solidFill>
         <a:effectLst/>
       </p:bgPr>
     </p:bg>
@@ -5275,9 +5607,7 @@
           <a:prstGeom prst="rect">
             <a:avLst/>
           </a:prstGeom>
-          <a:solidFill>
-            <a:srgbClr val="2C6E49"/>
-          </a:solidFill>
+          <a:solidFill>val="00875B"/&gt;</a:solidFill>
           <a:ln>
             <a:noFill/>
           </a:ln>
@@ -5328,9 +5658,7 @@
           <a:p>
             <a:pPr algn="l">
               <a:defRPr sz="2200" b="1">
-                <a:solidFill>
-                  <a:srgbClr val="1A5C33"/>
-                </a:solidFill>
+                <a:solidFill>val="006847"/&gt;</a:solidFill>
               </a:defRPr>
             </a:pPr>
             <a:r>
@@ -5366,9 +5694,7 @@
                 <a:spcPts val="600"/>
               </a:spcAft>
               <a:defRPr sz="1400">
-                <a:solidFill>
-                  <a:srgbClr val="222222"/>
-                </a:solidFill>
+                <a:solidFill>val="22344A"/&gt;</a:solidFill>
               </a:defRPr>
             </a:pPr>
             <a:r>
@@ -5381,9 +5707,7 @@
                 <a:spcPts val="600"/>
               </a:spcAft>
               <a:defRPr sz="1400">
-                <a:solidFill>
-                  <a:srgbClr val="222222"/>
-                </a:solidFill>
+                <a:solidFill>val="22344A"/&gt;</a:solidFill>
               </a:defRPr>
             </a:pPr>
             <a:r>
@@ -5396,9 +5720,7 @@
                 <a:spcPts val="600"/>
               </a:spcAft>
               <a:defRPr sz="1400">
-                <a:solidFill>
-                  <a:srgbClr val="222222"/>
-                </a:solidFill>
+                <a:solidFill>val="22344A"/&gt;</a:solidFill>
               </a:defRPr>
             </a:pPr>
             <a:r>
@@ -5411,9 +5733,7 @@
                 <a:spcPts val="600"/>
               </a:spcAft>
               <a:defRPr sz="1400">
-                <a:solidFill>
-                  <a:srgbClr val="222222"/>
-                </a:solidFill>
+                <a:solidFill>val="22344A"/&gt;</a:solidFill>
               </a:defRPr>
             </a:pPr>
             <a:r>
@@ -5426,9 +5746,7 @@
                 <a:spcPts val="600"/>
               </a:spcAft>
               <a:defRPr sz="1400">
-                <a:solidFill>
-                  <a:srgbClr val="222222"/>
-                </a:solidFill>
+                <a:solidFill>val="22344A"/&gt;</a:solidFill>
               </a:defRPr>
             </a:pPr>
             <a:r>
@@ -5441,9 +5759,7 @@
                 <a:spcPts val="600"/>
               </a:spcAft>
               <a:defRPr sz="1400">
-                <a:solidFill>
-                  <a:srgbClr val="222222"/>
-                </a:solidFill>
+                <a:solidFill>val="22344A"/&gt;</a:solidFill>
               </a:defRPr>
             </a:pPr>
             <a:r>
@@ -5456,9 +5772,7 @@
                 <a:spcPts val="600"/>
               </a:spcAft>
               <a:defRPr sz="1400">
-                <a:solidFill>
-                  <a:srgbClr val="222222"/>
-                </a:solidFill>
+                <a:solidFill>val="22344A"/&gt;</a:solidFill>
               </a:defRPr>
             </a:pPr>
             <a:r>
@@ -5471,13 +5785,52 @@
                 <a:spcPts val="600"/>
               </a:spcAft>
               <a:defRPr sz="1400">
+                <a:solidFill>val="22344A"/&gt;</a:solidFill>
+              </a:defRPr>
+            </a:pPr>
+            <a:r>
+              <a:t>• Implication pour le chercheur M2 DLE :La recherche en didactique des langues mobilise désormais des outils computationnels. Le mémoire peut inclure une analyse outillée par ordinateur (corpus, TAL) qui nécessite une infrastructure et des compétences informatiques adaptées.</a:t>
+            </a:r>
+          </a:p>
+        </p:txBody>
+      </p:sp>
+      <p:sp>
+        <p:nvSpPr>
+          <p:cNvPr id="990001" name="Pied de page FLE"/>
+          <p:cNvSpPr>
+            <a:spLocks noGrp="1"/>
+          </p:cNvSpPr>
+          <p:nvPr/>
+        </p:nvSpPr>
+        <p:spPr>
+          <a:xfrm>
+            <a:off x="-228600" y="6400800"/>
+            <a:ext cx="109728" cy="274320"/>
+          </a:xfrm>
+          <a:prstGeom prst="rect">
+            <a:avLst/>
+          </a:prstGeom>
+        </p:spPr>
+        <p:txBody>
+          <a:bodyPr anchor="b"/>
+          <a:lstStyle/>
+          <a:p>
+            <a:pPr algn="r">
+              <a:defRPr sz="900">
                 <a:solidFill>
-                  <a:srgbClr val="222222"/>
+                  <a:srgbClr val="9AA7B6"/>
                 </a:solidFill>
-              </a:defRPr>
-            </a:pPr>
-            <a:r>
-              <a:t>• Implication pour le chercheur M2 DLE :La recherche en didactique des langues mobilise désormais des outils computationnels. Le mémoire peut inclure une analyse outillée par ordinateur (corpus, TAL) qui nécessite une infrastructure et des compétences informatiques adaptées.</a:t>
+                <a:latin typeface="Poppins"/>
+              </a:defRPr>
+            </a:pPr>
+            <a:r>
+              <a:rPr lang="fr-FR" sz="900">
+                <a:solidFill>
+                  <a:srgbClr val="9AA7B6"/>
+                </a:solidFill>
+                <a:latin typeface="Poppins"/>
+              </a:rPr>
+              <a:t>Université de Mostaganem — Dr. Madani BELACEL</a:t>
             </a:r>
           </a:p>
         </p:txBody>
@@ -5495,9 +5848,7 @@
   <p:cSld>
     <p:bg>
       <p:bgPr>
-        <a:solidFill>
-          <a:srgbClr val="FFFFFF"/>
-        </a:solidFill>
+        <a:solidFill>val="FFFFFF"/&gt;</a:solidFill>
         <a:effectLst/>
       </p:bgPr>
     </p:bg>
@@ -5522,9 +5873,7 @@
           <a:prstGeom prst="rect">
             <a:avLst/>
           </a:prstGeom>
-          <a:solidFill>
-            <a:srgbClr val="2C6E49"/>
-          </a:solidFill>
+          <a:solidFill>val="00875B"/&gt;</a:solidFill>
           <a:ln>
             <a:noFill/>
           </a:ln>
@@ -5575,9 +5924,7 @@
           <a:p>
             <a:pPr algn="l">
               <a:defRPr sz="2200" b="1">
-                <a:solidFill>
-                  <a:srgbClr val="1A5C33"/>
-                </a:solidFill>
+                <a:solidFill>val="006847"/&gt;</a:solidFill>
               </a:defRPr>
             </a:pPr>
             <a:r>
@@ -5613,9 +5960,7 @@
                 <a:spcPts val="600"/>
               </a:spcAft>
               <a:defRPr sz="1400">
-                <a:solidFill>
-                  <a:srgbClr val="222222"/>
-                </a:solidFill>
+                <a:solidFill>val="22344A"/&gt;</a:solidFill>
               </a:defRPr>
             </a:pPr>
             <a:r>
@@ -5628,9 +5973,7 @@
                 <a:spcPts val="600"/>
               </a:spcAft>
               <a:defRPr sz="1400">
-                <a:solidFill>
-                  <a:srgbClr val="222222"/>
-                </a:solidFill>
+                <a:solidFill>val="22344A"/&gt;</a:solidFill>
               </a:defRPr>
             </a:pPr>
             <a:r>
@@ -5643,9 +5986,7 @@
                 <a:spcPts val="600"/>
               </a:spcAft>
               <a:defRPr sz="1400">
-                <a:solidFill>
-                  <a:srgbClr val="222222"/>
-                </a:solidFill>
+                <a:solidFill>val="22344A"/&gt;</a:solidFill>
               </a:defRPr>
             </a:pPr>
             <a:r>
@@ -5658,9 +5999,7 @@
                 <a:spcPts val="600"/>
               </a:spcAft>
               <a:defRPr sz="1400">
-                <a:solidFill>
-                  <a:srgbClr val="222222"/>
-                </a:solidFill>
+                <a:solidFill>val="22344A"/&gt;</a:solidFill>
               </a:defRPr>
             </a:pPr>
             <a:r>
@@ -5673,9 +6012,7 @@
                 <a:spcPts val="600"/>
               </a:spcAft>
               <a:defRPr sz="1400">
-                <a:solidFill>
-                  <a:srgbClr val="222222"/>
-                </a:solidFill>
+                <a:solidFill>val="22344A"/&gt;</a:solidFill>
               </a:defRPr>
             </a:pPr>
             <a:r>
@@ -5688,9 +6025,7 @@
                 <a:spcPts val="600"/>
               </a:spcAft>
               <a:defRPr sz="1400">
-                <a:solidFill>
-                  <a:srgbClr val="222222"/>
-                </a:solidFill>
+                <a:solidFill>val="22344A"/&gt;</a:solidFill>
               </a:defRPr>
             </a:pPr>
             <a:r>
@@ -5703,9 +6038,7 @@
                 <a:spcPts val="600"/>
               </a:spcAft>
               <a:defRPr sz="1400">
-                <a:solidFill>
-                  <a:srgbClr val="222222"/>
-                </a:solidFill>
+                <a:solidFill>val="22344A"/&gt;</a:solidFill>
               </a:defRPr>
             </a:pPr>
             <a:r>
@@ -5718,13 +6051,52 @@
                 <a:spcPts val="600"/>
               </a:spcAft>
               <a:defRPr sz="1400">
+                <a:solidFill>val="22344A"/&gt;</a:solidFill>
+              </a:defRPr>
+            </a:pPr>
+            <a:r>
+              <a:t>• Conclusion : perspectives pour le mémoire M2</a:t>
+            </a:r>
+          </a:p>
+        </p:txBody>
+      </p:sp>
+      <p:sp>
+        <p:nvSpPr>
+          <p:cNvPr id="990001" name="Pied de page FLE"/>
+          <p:cNvSpPr>
+            <a:spLocks noGrp="1"/>
+          </p:cNvSpPr>
+          <p:nvPr/>
+        </p:nvSpPr>
+        <p:spPr>
+          <a:xfrm>
+            <a:off x="-228600" y="6400800"/>
+            <a:ext cx="109728" cy="274320"/>
+          </a:xfrm>
+          <a:prstGeom prst="rect">
+            <a:avLst/>
+          </a:prstGeom>
+        </p:spPr>
+        <p:txBody>
+          <a:bodyPr anchor="b"/>
+          <a:lstStyle/>
+          <a:p>
+            <a:pPr algn="r">
+              <a:defRPr sz="900">
                 <a:solidFill>
-                  <a:srgbClr val="222222"/>
+                  <a:srgbClr val="9AA7B6"/>
                 </a:solidFill>
-              </a:defRPr>
-            </a:pPr>
-            <a:r>
-              <a:t>• Conclusion : perspectives pour le mémoire M2</a:t>
+                <a:latin typeface="Poppins"/>
+              </a:defRPr>
+            </a:pPr>
+            <a:r>
+              <a:rPr lang="fr-FR" sz="900">
+                <a:solidFill>
+                  <a:srgbClr val="9AA7B6"/>
+                </a:solidFill>
+                <a:latin typeface="Poppins"/>
+              </a:rPr>
+              <a:t>Université de Mostaganem — Dr. Madani BELACEL</a:t>
             </a:r>
           </a:p>
         </p:txBody>
@@ -5742,9 +6114,7 @@
   <p:cSld>
     <p:bg>
       <p:bgPr>
-        <a:solidFill>
-          <a:srgbClr val="FFFFFF"/>
-        </a:solidFill>
+        <a:solidFill>val="FFFFFF"/&gt;</a:solidFill>
         <a:effectLst/>
       </p:bgPr>
     </p:bg>
@@ -5769,9 +6139,7 @@
           <a:prstGeom prst="rect">
             <a:avLst/>
           </a:prstGeom>
-          <a:solidFill>
-            <a:srgbClr val="2C6E49"/>
-          </a:solidFill>
+          <a:solidFill>val="00875B"/&gt;</a:solidFill>
           <a:ln>
             <a:noFill/>
           </a:ln>
@@ -5822,9 +6190,7 @@
           <a:p>
             <a:pPr algn="l">
               <a:defRPr sz="2200" b="1">
-                <a:solidFill>
-                  <a:srgbClr val="1A5C33"/>
-                </a:solidFill>
+                <a:solidFill>val="006847"/&gt;</a:solidFill>
               </a:defRPr>
             </a:pPr>
             <a:r>
@@ -5860,9 +6226,7 @@
                 <a:spcPts val="600"/>
               </a:spcAft>
               <a:defRPr sz="1400">
-                <a:solidFill>
-                  <a:srgbClr val="222222"/>
-                </a:solidFill>
+                <a:solidFill>val="22344A"/&gt;</a:solidFill>
               </a:defRPr>
             </a:pPr>
             <a:r>
@@ -5875,13 +6239,52 @@
                 <a:spcPts val="600"/>
               </a:spcAft>
               <a:defRPr sz="1400">
+                <a:solidFill>val="22344A"/&gt;</a:solidFill>
+              </a:defRPr>
+            </a:pPr>
+            <a:r>
+              <a:t>• Objectif du cours :Fournir aux étudiants M2 DLE les connaissances et compétences nécessaires pour intégrer les outils informatiques dans leur projet de recherche, de la collecte à l'analyse des données.</a:t>
+            </a:r>
+          </a:p>
+        </p:txBody>
+      </p:sp>
+      <p:sp>
+        <p:nvSpPr>
+          <p:cNvPr id="990001" name="Pied de page FLE"/>
+          <p:cNvSpPr>
+            <a:spLocks noGrp="1"/>
+          </p:cNvSpPr>
+          <p:nvPr/>
+        </p:nvSpPr>
+        <p:spPr>
+          <a:xfrm>
+            <a:off x="-228600" y="6400800"/>
+            <a:ext cx="109728" cy="274320"/>
+          </a:xfrm>
+          <a:prstGeom prst="rect">
+            <a:avLst/>
+          </a:prstGeom>
+        </p:spPr>
+        <p:txBody>
+          <a:bodyPr anchor="b"/>
+          <a:lstStyle/>
+          <a:p>
+            <a:pPr algn="r">
+              <a:defRPr sz="900">
                 <a:solidFill>
-                  <a:srgbClr val="222222"/>
+                  <a:srgbClr val="9AA7B6"/>
                 </a:solidFill>
-              </a:defRPr>
-            </a:pPr>
-            <a:r>
-              <a:t>• Objectif du cours :Fournir aux étudiants M2 DLE les connaissances et compétences nécessaires pour intégrer les outils informatiques dans leur projet de recherche, de la collecte à l'analyse des données.</a:t>
+                <a:latin typeface="Poppins"/>
+              </a:defRPr>
+            </a:pPr>
+            <a:r>
+              <a:rPr lang="fr-FR" sz="900">
+                <a:solidFill>
+                  <a:srgbClr val="9AA7B6"/>
+                </a:solidFill>
+                <a:latin typeface="Poppins"/>
+              </a:rPr>
+              <a:t>Université de Mostaganem — Dr. Madani BELACEL</a:t>
             </a:r>
           </a:p>
         </p:txBody>
@@ -5937,7 +6340,7 @@
     </a:clrScheme>
     <a:fontScheme name="Office">
       <a:majorFont>
-        <a:latin typeface="Calibri"/>
+        <a:latin typeface="Poppins"/>
         <a:ea typeface=""/>
         <a:cs typeface=""/>
         <a:font script="Jpan" typeface="ＭＳ Ｐゴシック"/>
@@ -5972,7 +6375,7 @@
         <a:font script="Geor" typeface="Sylfaen"/>
       </a:majorFont>
       <a:minorFont>
-        <a:latin typeface="Calibri"/>
+        <a:latin typeface="Poppins"/>
         <a:ea typeface=""/>
         <a:cs typeface=""/>
         <a:font script="Jpan" typeface="ＭＳ Ｐゴシック"/>
